--- a/docs/content/05-teaching-resources/slides/cyber-security/05-cyber-law-and-ethics.pptx
+++ b/docs/content/05-teaching-resources/slides/cyber-security/05-cyber-law-and-ethics.pptx
@@ -10,11 +10,17 @@
     <p:sldId id="258" r:id="rId9"/>
     <p:sldId id="259" r:id="rId10"/>
     <p:sldId id="260" r:id="rId11"/>
-    <p:sldId id="261" r:id="rId12"/>
-    <p:sldId id="262" r:id="rId13"/>
+    <p:sldId id="261" r:id="rId13"/>
+    <p:sldId id="262" r:id="rId14"/>
     <p:sldId id="263" r:id="rId15"/>
     <p:sldId id="264" r:id="rId16"/>
     <p:sldId id="265" r:id="rId17"/>
+    <p:sldId id="266" r:id="rId18"/>
+    <p:sldId id="267" r:id="rId19"/>
+    <p:sldId id="268" r:id="rId20"/>
+    <p:sldId id="269" r:id="rId21"/>
+    <p:sldId id="270" r:id="rId22"/>
+    <p:sldId id="271" r:id="rId23"/>
   </p:sldIdLst>
   <p:sldSz cx="12191695" cy="6858000" type="screen4x3"/>
   <p:notesSz cx="6858000" cy="9144000"/>
@@ -511,7 +517,22 @@
           <a:lstStyle/>
           <a:p>
             <a:r>
-              <a:t>Give students a few minutes to answer on mini whiteboards or paper, then reveal the answers on the next slide.</a:t>
+              <a:t>Answers:</a:t>
+            </a:r>
+          </a:p>
+          <a:p>
+            <a:r>
+              <a:t>1. The Computer Misuse Act 1990.</a:t>
+            </a:r>
+          </a:p>
+          <a:p>
+            <a:r>
+              <a:t>2. The Investigatory Powers Act 2016.</a:t>
+            </a:r>
+          </a:p>
+          <a:p>
+            <a:r>
+              <a:t>3. Network and service providers.</a:t>
             </a:r>
           </a:p>
         </p:txBody>
@@ -581,7 +602,22 @@
           <a:lstStyle/>
           <a:p>
             <a:r>
-              <a:t>Talk through any answers the class found difficult.</a:t>
+              <a:t>Answers:</a:t>
+            </a:r>
+          </a:p>
+          <a:p>
+            <a:r>
+              <a:t>1. The NIS Regulations 2018.</a:t>
+            </a:r>
+          </a:p>
+          <a:p>
+            <a:r>
+              <a:t>2. The Wireless Telegraphy Act 2006.</a:t>
+            </a:r>
+          </a:p>
+          <a:p>
+            <a:r>
+              <a:t>3. No, it is exempt.</a:t>
             </a:r>
           </a:p>
         </p:txBody>
@@ -651,7 +687,22 @@
           <a:lstStyle/>
           <a:p>
             <a:r>
-              <a:t>Dilemma ideas: finding a vulnerability in a supplier's website; being asked to monitor a colleague's email; a friend asking you to recover their ex's social media password.</a:t>
+              <a:t>Answers:</a:t>
+            </a:r>
+          </a:p>
+          <a:p>
+            <a:r>
+              <a:t>1. Credibility, integrity, professionalism, responsibility and respect.</a:t>
+            </a:r>
+          </a:p>
+          <a:p>
+            <a:r>
+              <a:t>2. So others can trust your judgement is unbiased.</a:t>
+            </a:r>
+          </a:p>
+          <a:p>
+            <a:r>
+              <a:t>3. Sharing knowledge, evidence-based practice, correcting misinformation.</a:t>
             </a:r>
           </a:p>
         </p:txBody>
@@ -677,6 +728,216 @@
 </file>
 
 <file path=ppt/notesSlides/notesSlide4.xml><?xml version="1.0" encoding="utf-8"?>
+<p:notes xmlns:a="http://schemas.openxmlformats.org/drawingml/2006/main" xmlns:p="http://schemas.openxmlformats.org/presentationml/2006/main" xmlns:r="http://schemas.openxmlformats.org/officeDocument/2006/relationships">
+  <p:cSld>
+    <p:spTree>
+      <p:nvGrpSpPr>
+        <p:cNvPr id="1" name=""/>
+        <p:cNvGrpSpPr/>
+        <p:nvPr/>
+      </p:nvGrpSpPr>
+      <p:grpSpPr>
+        <a:xfrm>
+          <a:off x="0" y="0"/>
+          <a:ext cx="0" cy="0"/>
+          <a:chOff x="0" y="0"/>
+          <a:chExt cx="0" cy="0"/>
+        </a:xfrm>
+      </p:grpSpPr>
+      <p:sp>
+        <p:nvSpPr>
+          <p:cNvPr id="2" name="Slide Image Placeholder 1"/>
+          <p:cNvSpPr>
+            <a:spLocks noGrp="1"/>
+          </p:cNvSpPr>
+          <p:nvPr>
+            <p:ph type="sldImg" idx="2"/>
+          </p:nvPr>
+        </p:nvSpPr>
+        <p:spPr/>
+      </p:sp>
+      <p:sp>
+        <p:nvSpPr>
+          <p:cNvPr id="3" name="Notes Placeholder 2"/>
+          <p:cNvSpPr>
+            <a:spLocks noGrp="1"/>
+          </p:cNvSpPr>
+          <p:nvPr>
+            <p:ph type="body" idx="3" sz="quarter"/>
+          </p:nvPr>
+        </p:nvSpPr>
+        <p:spPr/>
+        <p:txBody>
+          <a:bodyPr/>
+          <a:lstStyle/>
+          <a:p>
+            <a:r>
+              <a:t>Give students a few minutes to answer on mini whiteboards or paper, then reveal the answers on the next slide.</a:t>
+            </a:r>
+          </a:p>
+        </p:txBody>
+      </p:sp>
+      <p:sp>
+        <p:nvSpPr>
+          <p:cNvPr id="4" name="Slide Number Placeholder 3"/>
+          <p:cNvSpPr>
+            <a:spLocks noGrp="1"/>
+          </p:cNvSpPr>
+          <p:nvPr>
+            <p:ph type="sldNum" idx="5" sz="quarter"/>
+          </p:nvPr>
+        </p:nvSpPr>
+        <p:spPr/>
+      </p:sp>
+    </p:spTree>
+  </p:cSld>
+  <p:clrMapOvr>
+    <a:masterClrMapping/>
+  </p:clrMapOvr>
+</p:notes>
+</file>
+
+<file path=ppt/notesSlides/notesSlide5.xml><?xml version="1.0" encoding="utf-8"?>
+<p:notes xmlns:a="http://schemas.openxmlformats.org/drawingml/2006/main" xmlns:p="http://schemas.openxmlformats.org/presentationml/2006/main" xmlns:r="http://schemas.openxmlformats.org/officeDocument/2006/relationships">
+  <p:cSld>
+    <p:spTree>
+      <p:nvGrpSpPr>
+        <p:cNvPr id="1" name=""/>
+        <p:cNvGrpSpPr/>
+        <p:nvPr/>
+      </p:nvGrpSpPr>
+      <p:grpSpPr>
+        <a:xfrm>
+          <a:off x="0" y="0"/>
+          <a:ext cx="0" cy="0"/>
+          <a:chOff x="0" y="0"/>
+          <a:chExt cx="0" cy="0"/>
+        </a:xfrm>
+      </p:grpSpPr>
+      <p:sp>
+        <p:nvSpPr>
+          <p:cNvPr id="2" name="Slide Image Placeholder 1"/>
+          <p:cNvSpPr>
+            <a:spLocks noGrp="1"/>
+          </p:cNvSpPr>
+          <p:nvPr>
+            <p:ph type="sldImg" idx="2"/>
+          </p:nvPr>
+        </p:nvSpPr>
+        <p:spPr/>
+      </p:sp>
+      <p:sp>
+        <p:nvSpPr>
+          <p:cNvPr id="3" name="Notes Placeholder 2"/>
+          <p:cNvSpPr>
+            <a:spLocks noGrp="1"/>
+          </p:cNvSpPr>
+          <p:nvPr>
+            <p:ph type="body" idx="3" sz="quarter"/>
+          </p:nvPr>
+        </p:nvSpPr>
+        <p:spPr/>
+        <p:txBody>
+          <a:bodyPr/>
+          <a:lstStyle/>
+          <a:p>
+            <a:r>
+              <a:t>Talk through any answers the class found difficult.</a:t>
+            </a:r>
+          </a:p>
+        </p:txBody>
+      </p:sp>
+      <p:sp>
+        <p:nvSpPr>
+          <p:cNvPr id="4" name="Slide Number Placeholder 3"/>
+          <p:cNvSpPr>
+            <a:spLocks noGrp="1"/>
+          </p:cNvSpPr>
+          <p:nvPr>
+            <p:ph type="sldNum" idx="5" sz="quarter"/>
+          </p:nvPr>
+        </p:nvSpPr>
+        <p:spPr/>
+      </p:sp>
+    </p:spTree>
+  </p:cSld>
+  <p:clrMapOvr>
+    <a:masterClrMapping/>
+  </p:clrMapOvr>
+</p:notes>
+</file>
+
+<file path=ppt/notesSlides/notesSlide6.xml><?xml version="1.0" encoding="utf-8"?>
+<p:notes xmlns:a="http://schemas.openxmlformats.org/drawingml/2006/main" xmlns:p="http://schemas.openxmlformats.org/presentationml/2006/main" xmlns:r="http://schemas.openxmlformats.org/officeDocument/2006/relationships">
+  <p:cSld>
+    <p:spTree>
+      <p:nvGrpSpPr>
+        <p:cNvPr id="1" name=""/>
+        <p:cNvGrpSpPr/>
+        <p:nvPr/>
+      </p:nvGrpSpPr>
+      <p:grpSpPr>
+        <a:xfrm>
+          <a:off x="0" y="0"/>
+          <a:ext cx="0" cy="0"/>
+          <a:chOff x="0" y="0"/>
+          <a:chExt cx="0" cy="0"/>
+        </a:xfrm>
+      </p:grpSpPr>
+      <p:sp>
+        <p:nvSpPr>
+          <p:cNvPr id="2" name="Slide Image Placeholder 1"/>
+          <p:cNvSpPr>
+            <a:spLocks noGrp="1"/>
+          </p:cNvSpPr>
+          <p:nvPr>
+            <p:ph type="sldImg" idx="2"/>
+          </p:nvPr>
+        </p:nvSpPr>
+        <p:spPr/>
+      </p:sp>
+      <p:sp>
+        <p:nvSpPr>
+          <p:cNvPr id="3" name="Notes Placeholder 2"/>
+          <p:cNvSpPr>
+            <a:spLocks noGrp="1"/>
+          </p:cNvSpPr>
+          <p:nvPr>
+            <p:ph type="body" idx="3" sz="quarter"/>
+          </p:nvPr>
+        </p:nvSpPr>
+        <p:spPr/>
+        <p:txBody>
+          <a:bodyPr/>
+          <a:lstStyle/>
+          <a:p>
+            <a:r>
+              <a:t>Dilemma ideas: finding a vulnerability in a supplier's website; being asked to monitor a colleague's email; a friend asking you to recover their ex's social media password.</a:t>
+            </a:r>
+          </a:p>
+        </p:txBody>
+      </p:sp>
+      <p:sp>
+        <p:nvSpPr>
+          <p:cNvPr id="4" name="Slide Number Placeholder 3"/>
+          <p:cNvSpPr>
+            <a:spLocks noGrp="1"/>
+          </p:cNvSpPr>
+          <p:nvPr>
+            <p:ph type="sldNum" idx="5" sz="quarter"/>
+          </p:nvPr>
+        </p:nvSpPr>
+        <p:spPr/>
+      </p:sp>
+    </p:spTree>
+  </p:cSld>
+  <p:clrMapOvr>
+    <a:masterClrMapping/>
+  </p:clrMapOvr>
+</p:notes>
+</file>
+
+<file path=ppt/notesSlides/notesSlide7.xml><?xml version="1.0" encoding="utf-8"?>
 <p:notes xmlns:a="http://schemas.openxmlformats.org/drawingml/2006/main" xmlns:p="http://schemas.openxmlformats.org/presentationml/2006/main" xmlns:r="http://schemas.openxmlformats.org/officeDocument/2006/relationships">
   <p:cSld>
     <p:spTree>
@@ -4052,6 +4313,3898 @@
     <p:bg>
       <p:bgPr>
         <a:solidFill>
+          <a:srgbClr val="FFFFFF"/>
+        </a:solidFill>
+        <a:effectLst/>
+      </p:bgPr>
+    </p:bg>
+    <p:spTree>
+      <p:nvGrpSpPr>
+        <p:cNvPr id="1" name=""/>
+        <p:cNvGrpSpPr/>
+        <p:nvPr/>
+      </p:nvGrpSpPr>
+      <p:grpSpPr/>
+      <p:sp>
+        <p:nvSpPr>
+          <p:cNvPr id="2" name="TextBox 1"/>
+          <p:cNvSpPr txBox="1"/>
+          <p:nvPr/>
+        </p:nvSpPr>
+        <p:spPr>
+          <a:xfrm>
+            <a:off x="548640" y="320040"/>
+            <a:ext cx="11094415" cy="274320"/>
+          </a:xfrm>
+          <a:prstGeom prst="rect">
+            <a:avLst/>
+          </a:prstGeom>
+          <a:noFill/>
+        </p:spPr>
+        <p:txBody>
+          <a:bodyPr wrap="square" anchor="t" lIns="0" rIns="0" tIns="0" bIns="0"/>
+          <a:lstStyle/>
+          <a:p>
+            <a:pPr algn="l"/>
+            <a:r>
+              <a:rPr sz="1100" b="1" i="0">
+                <a:solidFill>
+                  <a:srgbClr val="54595D"/>
+                </a:solidFill>
+                <a:latin typeface="Calibri"/>
+              </a:rPr>
+              <a:t>CYBER SECURITY  ·  Cyber Security Content Area 1</a:t>
+            </a:r>
+          </a:p>
+        </p:txBody>
+      </p:sp>
+      <p:sp>
+        <p:nvSpPr>
+          <p:cNvPr id="3" name="TextBox 2"/>
+          <p:cNvSpPr txBox="1"/>
+          <p:nvPr/>
+        </p:nvSpPr>
+        <p:spPr>
+          <a:xfrm>
+            <a:off x="548640" y="566928"/>
+            <a:ext cx="11094415" cy="822960"/>
+          </a:xfrm>
+          <a:prstGeom prst="rect">
+            <a:avLst/>
+          </a:prstGeom>
+          <a:noFill/>
+        </p:spPr>
+        <p:txBody>
+          <a:bodyPr wrap="square" anchor="ctr" lIns="0" rIns="0" tIns="0" bIns="0"/>
+          <a:lstStyle/>
+          <a:p>
+            <a:pPr algn="l"/>
+            <a:r>
+              <a:rPr sz="3200" b="1" i="0">
+                <a:solidFill>
+                  <a:srgbClr val="03306E"/>
+                </a:solidFill>
+                <a:latin typeface="Cambria"/>
+              </a:rPr>
+              <a:t>UK Cyber Security Council Code of Ethics</a:t>
+            </a:r>
+          </a:p>
+        </p:txBody>
+      </p:sp>
+      <p:sp>
+        <p:nvSpPr>
+          <p:cNvPr id="4" name="TextBox 3"/>
+          <p:cNvSpPr txBox="1"/>
+          <p:nvPr/>
+        </p:nvSpPr>
+        <p:spPr>
+          <a:xfrm>
+            <a:off x="548640" y="6446520"/>
+            <a:ext cx="8229600" cy="274320"/>
+          </a:xfrm>
+          <a:prstGeom prst="rect">
+            <a:avLst/>
+          </a:prstGeom>
+          <a:noFill/>
+        </p:spPr>
+        <p:txBody>
+          <a:bodyPr wrap="square" anchor="t" lIns="0" rIns="0" tIns="0" bIns="0"/>
+          <a:lstStyle/>
+          <a:p>
+            <a:pPr algn="l"/>
+            <a:r>
+              <a:rPr sz="1000" b="0" i="0">
+                <a:solidFill>
+                  <a:srgbClr val="54595D"/>
+                </a:solidFill>
+                <a:latin typeface="Calibri"/>
+              </a:rPr>
+              <a:t>Digital Support and Security T Level  ·  Cyber Law and Ethics</a:t>
+            </a:r>
+          </a:p>
+        </p:txBody>
+      </p:sp>
+      <p:sp>
+        <p:nvSpPr>
+          <p:cNvPr id="5" name="TextBox 4"/>
+          <p:cNvSpPr txBox="1"/>
+          <p:nvPr/>
+        </p:nvSpPr>
+        <p:spPr>
+          <a:xfrm>
+            <a:off x="10728655" y="6446520"/>
+            <a:ext cx="914400" cy="274320"/>
+          </a:xfrm>
+          <a:prstGeom prst="rect">
+            <a:avLst/>
+          </a:prstGeom>
+          <a:noFill/>
+        </p:spPr>
+        <p:txBody>
+          <a:bodyPr wrap="square" anchor="t" lIns="0" rIns="0" tIns="0" bIns="0"/>
+          <a:lstStyle/>
+          <a:p>
+            <a:pPr algn="r"/>
+            <a:r>
+              <a:rPr sz="1000" b="0" i="0">
+                <a:solidFill>
+                  <a:srgbClr val="54595D"/>
+                </a:solidFill>
+                <a:latin typeface="Calibri"/>
+              </a:rPr>
+              <a:t>10</a:t>
+            </a:r>
+          </a:p>
+        </p:txBody>
+      </p:sp>
+      <p:sp>
+        <p:nvSpPr>
+          <p:cNvPr id="6" name="Rounded Rectangle 5"/>
+          <p:cNvSpPr/>
+          <p:nvPr/>
+        </p:nvSpPr>
+        <p:spPr>
+          <a:xfrm>
+            <a:off x="548640" y="1600200"/>
+            <a:ext cx="5410047" cy="2148840"/>
+          </a:xfrm>
+          <a:prstGeom prst="roundRect">
+            <a:avLst>
+              <a:gd name="adj" fmla="val 6000"/>
+            </a:avLst>
+          </a:prstGeom>
+          <a:solidFill>
+            <a:srgbClr val="EAF3FF"/>
+          </a:solidFill>
+          <a:ln>
+            <a:noFill/>
+          </a:ln>
+          <a:effectLst/>
+        </p:spPr>
+        <p:style>
+          <a:lnRef idx="1">
+            <a:schemeClr val="accent1"/>
+          </a:lnRef>
+          <a:fillRef idx="3">
+            <a:schemeClr val="accent1"/>
+          </a:fillRef>
+          <a:effectRef idx="2">
+            <a:schemeClr val="accent1"/>
+          </a:effectRef>
+          <a:fontRef idx="minor">
+            <a:schemeClr val="lt1"/>
+          </a:fontRef>
+        </p:style>
+        <p:txBody>
+          <a:bodyPr rtlCol="0" anchor="ctr"/>
+          <a:lstStyle/>
+          <a:p/>
+        </p:txBody>
+      </p:sp>
+      <p:sp>
+        <p:nvSpPr>
+          <p:cNvPr id="7" name="Oval 6"/>
+          <p:cNvSpPr/>
+          <p:nvPr/>
+        </p:nvSpPr>
+        <p:spPr>
+          <a:xfrm>
+            <a:off x="777240" y="1828800"/>
+            <a:ext cx="457200" cy="457200"/>
+          </a:xfrm>
+          <a:prstGeom prst="ellipse">
+            <a:avLst/>
+          </a:prstGeom>
+          <a:solidFill>
+            <a:srgbClr val="E0463A"/>
+          </a:solidFill>
+          <a:ln>
+            <a:noFill/>
+          </a:ln>
+          <a:effectLst/>
+        </p:spPr>
+        <p:style>
+          <a:lnRef idx="1">
+            <a:schemeClr val="accent1"/>
+          </a:lnRef>
+          <a:fillRef idx="3">
+            <a:schemeClr val="accent1"/>
+          </a:fillRef>
+          <a:effectRef idx="2">
+            <a:schemeClr val="accent1"/>
+          </a:effectRef>
+          <a:fontRef idx="minor">
+            <a:schemeClr val="lt1"/>
+          </a:fontRef>
+        </p:style>
+        <p:txBody>
+          <a:bodyPr rtlCol="0" anchor="ctr" lIns="0" rIns="0" tIns="0" bIns="0"/>
+          <a:lstStyle/>
+          <a:p>
+            <a:pPr algn="ctr"/>
+            <a:r>
+              <a:rPr sz="1500" b="1">
+                <a:solidFill>
+                  <a:srgbClr val="FFFFFF"/>
+                </a:solidFill>
+                <a:latin typeface="Calibri"/>
+              </a:rPr>
+              <a:t>1</a:t>
+            </a:r>
+          </a:p>
+        </p:txBody>
+      </p:sp>
+      <p:sp>
+        <p:nvSpPr>
+          <p:cNvPr id="8" name="TextBox 7"/>
+          <p:cNvSpPr txBox="1"/>
+          <p:nvPr/>
+        </p:nvSpPr>
+        <p:spPr>
+          <a:xfrm>
+            <a:off x="1371600" y="1801368"/>
+            <a:ext cx="4404207" cy="512064"/>
+          </a:xfrm>
+          <a:prstGeom prst="rect">
+            <a:avLst/>
+          </a:prstGeom>
+          <a:noFill/>
+        </p:spPr>
+        <p:txBody>
+          <a:bodyPr wrap="square" anchor="ctr" lIns="0" rIns="0" tIns="0" bIns="0"/>
+          <a:lstStyle/>
+          <a:p>
+            <a:pPr algn="l"/>
+            <a:r>
+              <a:rPr sz="1900" b="1" i="0">
+                <a:solidFill>
+                  <a:srgbClr val="03306E"/>
+                </a:solidFill>
+                <a:latin typeface="Calibri"/>
+              </a:rPr>
+              <a:t>Credibility</a:t>
+            </a:r>
+          </a:p>
+        </p:txBody>
+      </p:sp>
+      <p:sp>
+        <p:nvSpPr>
+          <p:cNvPr id="9" name="TextBox 8"/>
+          <p:cNvSpPr txBox="1"/>
+          <p:nvPr/>
+        </p:nvSpPr>
+        <p:spPr>
+          <a:xfrm>
+            <a:off x="777240" y="2468880"/>
+            <a:ext cx="4952847" cy="1143000"/>
+          </a:xfrm>
+          <a:prstGeom prst="rect">
+            <a:avLst/>
+          </a:prstGeom>
+          <a:noFill/>
+        </p:spPr>
+        <p:txBody>
+          <a:bodyPr wrap="square" anchor="t" lIns="0" rIns="0" tIns="0" bIns="0"/>
+          <a:lstStyle/>
+          <a:p>
+            <a:pPr algn="l"/>
+            <a:r>
+              <a:rPr sz="2000" b="0" i="0">
+                <a:solidFill>
+                  <a:srgbClr val="202122"/>
+                </a:solidFill>
+                <a:latin typeface="Calibri"/>
+              </a:rPr>
+              <a:t>Be accountable and act ethically.</a:t>
+            </a:r>
+          </a:p>
+        </p:txBody>
+      </p:sp>
+      <p:sp>
+        <p:nvSpPr>
+          <p:cNvPr id="10" name="Rounded Rectangle 9"/>
+          <p:cNvSpPr/>
+          <p:nvPr/>
+        </p:nvSpPr>
+        <p:spPr>
+          <a:xfrm>
+            <a:off x="6233007" y="1600200"/>
+            <a:ext cx="5410047" cy="2148840"/>
+          </a:xfrm>
+          <a:prstGeom prst="roundRect">
+            <a:avLst>
+              <a:gd name="adj" fmla="val 6000"/>
+            </a:avLst>
+          </a:prstGeom>
+          <a:solidFill>
+            <a:srgbClr val="EAF3FF"/>
+          </a:solidFill>
+          <a:ln>
+            <a:noFill/>
+          </a:ln>
+          <a:effectLst/>
+        </p:spPr>
+        <p:style>
+          <a:lnRef idx="1">
+            <a:schemeClr val="accent1"/>
+          </a:lnRef>
+          <a:fillRef idx="3">
+            <a:schemeClr val="accent1"/>
+          </a:fillRef>
+          <a:effectRef idx="2">
+            <a:schemeClr val="accent1"/>
+          </a:effectRef>
+          <a:fontRef idx="minor">
+            <a:schemeClr val="lt1"/>
+          </a:fontRef>
+        </p:style>
+        <p:txBody>
+          <a:bodyPr rtlCol="0" anchor="ctr"/>
+          <a:lstStyle/>
+          <a:p/>
+        </p:txBody>
+      </p:sp>
+      <p:sp>
+        <p:nvSpPr>
+          <p:cNvPr id="11" name="Oval 10"/>
+          <p:cNvSpPr/>
+          <p:nvPr/>
+        </p:nvSpPr>
+        <p:spPr>
+          <a:xfrm>
+            <a:off x="6461607" y="1828800"/>
+            <a:ext cx="457200" cy="457200"/>
+          </a:xfrm>
+          <a:prstGeom prst="ellipse">
+            <a:avLst/>
+          </a:prstGeom>
+          <a:solidFill>
+            <a:srgbClr val="E0463A"/>
+          </a:solidFill>
+          <a:ln>
+            <a:noFill/>
+          </a:ln>
+          <a:effectLst/>
+        </p:spPr>
+        <p:style>
+          <a:lnRef idx="1">
+            <a:schemeClr val="accent1"/>
+          </a:lnRef>
+          <a:fillRef idx="3">
+            <a:schemeClr val="accent1"/>
+          </a:fillRef>
+          <a:effectRef idx="2">
+            <a:schemeClr val="accent1"/>
+          </a:effectRef>
+          <a:fontRef idx="minor">
+            <a:schemeClr val="lt1"/>
+          </a:fontRef>
+        </p:style>
+        <p:txBody>
+          <a:bodyPr rtlCol="0" anchor="ctr" lIns="0" rIns="0" tIns="0" bIns="0"/>
+          <a:lstStyle/>
+          <a:p>
+            <a:pPr algn="ctr"/>
+            <a:r>
+              <a:rPr sz="1500" b="1">
+                <a:solidFill>
+                  <a:srgbClr val="FFFFFF"/>
+                </a:solidFill>
+                <a:latin typeface="Calibri"/>
+              </a:rPr>
+              <a:t>2</a:t>
+            </a:r>
+          </a:p>
+        </p:txBody>
+      </p:sp>
+      <p:sp>
+        <p:nvSpPr>
+          <p:cNvPr id="12" name="TextBox 11"/>
+          <p:cNvSpPr txBox="1"/>
+          <p:nvPr/>
+        </p:nvSpPr>
+        <p:spPr>
+          <a:xfrm>
+            <a:off x="7055967" y="1801368"/>
+            <a:ext cx="4404207" cy="512064"/>
+          </a:xfrm>
+          <a:prstGeom prst="rect">
+            <a:avLst/>
+          </a:prstGeom>
+          <a:noFill/>
+        </p:spPr>
+        <p:txBody>
+          <a:bodyPr wrap="square" anchor="ctr" lIns="0" rIns="0" tIns="0" bIns="0"/>
+          <a:lstStyle/>
+          <a:p>
+            <a:pPr algn="l"/>
+            <a:r>
+              <a:rPr sz="1900" b="1" i="0">
+                <a:solidFill>
+                  <a:srgbClr val="03306E"/>
+                </a:solidFill>
+                <a:latin typeface="Calibri"/>
+              </a:rPr>
+              <a:t>Integrity</a:t>
+            </a:r>
+          </a:p>
+        </p:txBody>
+      </p:sp>
+      <p:sp>
+        <p:nvSpPr>
+          <p:cNvPr id="13" name="TextBox 12"/>
+          <p:cNvSpPr txBox="1"/>
+          <p:nvPr/>
+        </p:nvSpPr>
+        <p:spPr>
+          <a:xfrm>
+            <a:off x="6461607" y="2468880"/>
+            <a:ext cx="4952847" cy="1143000"/>
+          </a:xfrm>
+          <a:prstGeom prst="rect">
+            <a:avLst/>
+          </a:prstGeom>
+          <a:noFill/>
+        </p:spPr>
+        <p:txBody>
+          <a:bodyPr wrap="square" anchor="t" lIns="0" rIns="0" tIns="0" bIns="0"/>
+          <a:lstStyle/>
+          <a:p>
+            <a:pPr algn="l"/>
+            <a:r>
+              <a:rPr sz="2000" b="0" i="0">
+                <a:solidFill>
+                  <a:srgbClr val="202122"/>
+                </a:solidFill>
+                <a:latin typeface="Calibri"/>
+              </a:rPr>
+              <a:t>Be honest and obey the law.</a:t>
+            </a:r>
+          </a:p>
+        </p:txBody>
+      </p:sp>
+      <p:sp>
+        <p:nvSpPr>
+          <p:cNvPr id="14" name="Rounded Rectangle 13"/>
+          <p:cNvSpPr/>
+          <p:nvPr/>
+        </p:nvSpPr>
+        <p:spPr>
+          <a:xfrm>
+            <a:off x="548640" y="4023360"/>
+            <a:ext cx="5410047" cy="2148840"/>
+          </a:xfrm>
+          <a:prstGeom prst="roundRect">
+            <a:avLst>
+              <a:gd name="adj" fmla="val 6000"/>
+            </a:avLst>
+          </a:prstGeom>
+          <a:solidFill>
+            <a:srgbClr val="EAF3FF"/>
+          </a:solidFill>
+          <a:ln>
+            <a:noFill/>
+          </a:ln>
+          <a:effectLst/>
+        </p:spPr>
+        <p:style>
+          <a:lnRef idx="1">
+            <a:schemeClr val="accent1"/>
+          </a:lnRef>
+          <a:fillRef idx="3">
+            <a:schemeClr val="accent1"/>
+          </a:fillRef>
+          <a:effectRef idx="2">
+            <a:schemeClr val="accent1"/>
+          </a:effectRef>
+          <a:fontRef idx="minor">
+            <a:schemeClr val="lt1"/>
+          </a:fontRef>
+        </p:style>
+        <p:txBody>
+          <a:bodyPr rtlCol="0" anchor="ctr"/>
+          <a:lstStyle/>
+          <a:p/>
+        </p:txBody>
+      </p:sp>
+      <p:sp>
+        <p:nvSpPr>
+          <p:cNvPr id="15" name="Oval 14"/>
+          <p:cNvSpPr/>
+          <p:nvPr/>
+        </p:nvSpPr>
+        <p:spPr>
+          <a:xfrm>
+            <a:off x="777240" y="4251960"/>
+            <a:ext cx="457200" cy="457200"/>
+          </a:xfrm>
+          <a:prstGeom prst="ellipse">
+            <a:avLst/>
+          </a:prstGeom>
+          <a:solidFill>
+            <a:srgbClr val="E0463A"/>
+          </a:solidFill>
+          <a:ln>
+            <a:noFill/>
+          </a:ln>
+          <a:effectLst/>
+        </p:spPr>
+        <p:style>
+          <a:lnRef idx="1">
+            <a:schemeClr val="accent1"/>
+          </a:lnRef>
+          <a:fillRef idx="3">
+            <a:schemeClr val="accent1"/>
+          </a:fillRef>
+          <a:effectRef idx="2">
+            <a:schemeClr val="accent1"/>
+          </a:effectRef>
+          <a:fontRef idx="minor">
+            <a:schemeClr val="lt1"/>
+          </a:fontRef>
+        </p:style>
+        <p:txBody>
+          <a:bodyPr rtlCol="0" anchor="ctr" lIns="0" rIns="0" tIns="0" bIns="0"/>
+          <a:lstStyle/>
+          <a:p>
+            <a:pPr algn="ctr"/>
+            <a:r>
+              <a:rPr sz="1500" b="1">
+                <a:solidFill>
+                  <a:srgbClr val="FFFFFF"/>
+                </a:solidFill>
+                <a:latin typeface="Calibri"/>
+              </a:rPr>
+              <a:t>3</a:t>
+            </a:r>
+          </a:p>
+        </p:txBody>
+      </p:sp>
+      <p:sp>
+        <p:nvSpPr>
+          <p:cNvPr id="16" name="TextBox 15"/>
+          <p:cNvSpPr txBox="1"/>
+          <p:nvPr/>
+        </p:nvSpPr>
+        <p:spPr>
+          <a:xfrm>
+            <a:off x="1371600" y="4224528"/>
+            <a:ext cx="4404207" cy="512064"/>
+          </a:xfrm>
+          <a:prstGeom prst="rect">
+            <a:avLst/>
+          </a:prstGeom>
+          <a:noFill/>
+        </p:spPr>
+        <p:txBody>
+          <a:bodyPr wrap="square" anchor="ctr" lIns="0" rIns="0" tIns="0" bIns="0"/>
+          <a:lstStyle/>
+          <a:p>
+            <a:pPr algn="l"/>
+            <a:r>
+              <a:rPr sz="1900" b="1" i="0">
+                <a:solidFill>
+                  <a:srgbClr val="03306E"/>
+                </a:solidFill>
+                <a:latin typeface="Calibri"/>
+              </a:rPr>
+              <a:t>Professionalism</a:t>
+            </a:r>
+          </a:p>
+        </p:txBody>
+      </p:sp>
+      <p:sp>
+        <p:nvSpPr>
+          <p:cNvPr id="17" name="TextBox 16"/>
+          <p:cNvSpPr txBox="1"/>
+          <p:nvPr/>
+        </p:nvSpPr>
+        <p:spPr>
+          <a:xfrm>
+            <a:off x="777240" y="4892040"/>
+            <a:ext cx="4952847" cy="1143000"/>
+          </a:xfrm>
+          <a:prstGeom prst="rect">
+            <a:avLst/>
+          </a:prstGeom>
+          <a:noFill/>
+        </p:spPr>
+        <p:txBody>
+          <a:bodyPr wrap="square" anchor="t" lIns="0" rIns="0" tIns="0" bIns="0"/>
+          <a:lstStyle/>
+          <a:p>
+            <a:pPr algn="l"/>
+            <a:r>
+              <a:rPr sz="2000" b="0" i="0">
+                <a:solidFill>
+                  <a:srgbClr val="202122"/>
+                </a:solidFill>
+                <a:latin typeface="Calibri"/>
+              </a:rPr>
+              <a:t>Share knowledge, base practice on evidence, correct misinformation.</a:t>
+            </a:r>
+          </a:p>
+        </p:txBody>
+      </p:sp>
+      <p:sp>
+        <p:nvSpPr>
+          <p:cNvPr id="18" name="Rounded Rectangle 17"/>
+          <p:cNvSpPr/>
+          <p:nvPr/>
+        </p:nvSpPr>
+        <p:spPr>
+          <a:xfrm>
+            <a:off x="6233007" y="4023360"/>
+            <a:ext cx="5410047" cy="2148840"/>
+          </a:xfrm>
+          <a:prstGeom prst="roundRect">
+            <a:avLst>
+              <a:gd name="adj" fmla="val 6000"/>
+            </a:avLst>
+          </a:prstGeom>
+          <a:solidFill>
+            <a:srgbClr val="EAF3FF"/>
+          </a:solidFill>
+          <a:ln>
+            <a:noFill/>
+          </a:ln>
+          <a:effectLst/>
+        </p:spPr>
+        <p:style>
+          <a:lnRef idx="1">
+            <a:schemeClr val="accent1"/>
+          </a:lnRef>
+          <a:fillRef idx="3">
+            <a:schemeClr val="accent1"/>
+          </a:fillRef>
+          <a:effectRef idx="2">
+            <a:schemeClr val="accent1"/>
+          </a:effectRef>
+          <a:fontRef idx="minor">
+            <a:schemeClr val="lt1"/>
+          </a:fontRef>
+        </p:style>
+        <p:txBody>
+          <a:bodyPr rtlCol="0" anchor="ctr"/>
+          <a:lstStyle/>
+          <a:p/>
+        </p:txBody>
+      </p:sp>
+      <p:sp>
+        <p:nvSpPr>
+          <p:cNvPr id="19" name="Oval 18"/>
+          <p:cNvSpPr/>
+          <p:nvPr/>
+        </p:nvSpPr>
+        <p:spPr>
+          <a:xfrm>
+            <a:off x="6461607" y="4251960"/>
+            <a:ext cx="457200" cy="457200"/>
+          </a:xfrm>
+          <a:prstGeom prst="ellipse">
+            <a:avLst/>
+          </a:prstGeom>
+          <a:solidFill>
+            <a:srgbClr val="E0463A"/>
+          </a:solidFill>
+          <a:ln>
+            <a:noFill/>
+          </a:ln>
+          <a:effectLst/>
+        </p:spPr>
+        <p:style>
+          <a:lnRef idx="1">
+            <a:schemeClr val="accent1"/>
+          </a:lnRef>
+          <a:fillRef idx="3">
+            <a:schemeClr val="accent1"/>
+          </a:fillRef>
+          <a:effectRef idx="2">
+            <a:schemeClr val="accent1"/>
+          </a:effectRef>
+          <a:fontRef idx="minor">
+            <a:schemeClr val="lt1"/>
+          </a:fontRef>
+        </p:style>
+        <p:txBody>
+          <a:bodyPr rtlCol="0" anchor="ctr" lIns="0" rIns="0" tIns="0" bIns="0"/>
+          <a:lstStyle/>
+          <a:p>
+            <a:pPr algn="ctr"/>
+            <a:r>
+              <a:rPr sz="1500" b="1">
+                <a:solidFill>
+                  <a:srgbClr val="FFFFFF"/>
+                </a:solidFill>
+                <a:latin typeface="Calibri"/>
+              </a:rPr>
+              <a:t>4</a:t>
+            </a:r>
+          </a:p>
+        </p:txBody>
+      </p:sp>
+      <p:sp>
+        <p:nvSpPr>
+          <p:cNvPr id="20" name="TextBox 19"/>
+          <p:cNvSpPr txBox="1"/>
+          <p:nvPr/>
+        </p:nvSpPr>
+        <p:spPr>
+          <a:xfrm>
+            <a:off x="7055967" y="4224528"/>
+            <a:ext cx="4404207" cy="512064"/>
+          </a:xfrm>
+          <a:prstGeom prst="rect">
+            <a:avLst/>
+          </a:prstGeom>
+          <a:noFill/>
+        </p:spPr>
+        <p:txBody>
+          <a:bodyPr wrap="square" anchor="ctr" lIns="0" rIns="0" tIns="0" bIns="0"/>
+          <a:lstStyle/>
+          <a:p>
+            <a:pPr algn="l"/>
+            <a:r>
+              <a:rPr sz="1900" b="1" i="0">
+                <a:solidFill>
+                  <a:srgbClr val="03306E"/>
+                </a:solidFill>
+                <a:latin typeface="Calibri"/>
+              </a:rPr>
+              <a:t>Responsibility and respect</a:t>
+            </a:r>
+          </a:p>
+        </p:txBody>
+      </p:sp>
+      <p:sp>
+        <p:nvSpPr>
+          <p:cNvPr id="21" name="TextBox 20"/>
+          <p:cNvSpPr txBox="1"/>
+          <p:nvPr/>
+        </p:nvSpPr>
+        <p:spPr>
+          <a:xfrm>
+            <a:off x="6461607" y="4892040"/>
+            <a:ext cx="4952847" cy="1143000"/>
+          </a:xfrm>
+          <a:prstGeom prst="rect">
+            <a:avLst/>
+          </a:prstGeom>
+          <a:noFill/>
+        </p:spPr>
+        <p:txBody>
+          <a:bodyPr wrap="square" anchor="t" lIns="0" rIns="0" tIns="0" bIns="0"/>
+          <a:lstStyle/>
+          <a:p>
+            <a:pPr algn="l"/>
+            <a:r>
+              <a:rPr sz="2000" b="0" i="0">
+                <a:solidFill>
+                  <a:srgbClr val="202122"/>
+                </a:solidFill>
+                <a:latin typeface="Calibri"/>
+              </a:rPr>
+              <a:t>Take ownership, safeguard data, declare conflicts of interest, champion inclusion.</a:t>
+            </a:r>
+          </a:p>
+        </p:txBody>
+      </p:sp>
+    </p:spTree>
+  </p:cSld>
+  <p:clrMapOvr>
+    <a:masterClrMapping/>
+  </p:clrMapOvr>
+</p:sld>
+</file>
+
+<file path=ppt/slides/slide11.xml><?xml version="1.0" encoding="utf-8"?>
+<p:sld xmlns:a="http://schemas.openxmlformats.org/drawingml/2006/main" xmlns:p="http://schemas.openxmlformats.org/presentationml/2006/main" xmlns:r="http://schemas.openxmlformats.org/officeDocument/2006/relationships">
+  <p:cSld>
+    <p:bg>
+      <p:bgPr>
+        <a:solidFill>
+          <a:srgbClr val="FFFFFF"/>
+        </a:solidFill>
+        <a:effectLst/>
+      </p:bgPr>
+    </p:bg>
+    <p:spTree>
+      <p:nvGrpSpPr>
+        <p:cNvPr id="1" name=""/>
+        <p:cNvGrpSpPr/>
+        <p:nvPr/>
+      </p:nvGrpSpPr>
+      <p:grpSpPr/>
+      <p:sp>
+        <p:nvSpPr>
+          <p:cNvPr id="2" name="TextBox 1"/>
+          <p:cNvSpPr txBox="1"/>
+          <p:nvPr/>
+        </p:nvSpPr>
+        <p:spPr>
+          <a:xfrm>
+            <a:off x="548640" y="320040"/>
+            <a:ext cx="11094415" cy="274320"/>
+          </a:xfrm>
+          <a:prstGeom prst="rect">
+            <a:avLst/>
+          </a:prstGeom>
+          <a:noFill/>
+        </p:spPr>
+        <p:txBody>
+          <a:bodyPr wrap="square" anchor="t" lIns="0" rIns="0" tIns="0" bIns="0"/>
+          <a:lstStyle/>
+          <a:p>
+            <a:pPr algn="l"/>
+            <a:r>
+              <a:rPr sz="1100" b="1" i="0">
+                <a:solidFill>
+                  <a:srgbClr val="54595D"/>
+                </a:solidFill>
+                <a:latin typeface="Calibri"/>
+              </a:rPr>
+              <a:t>CYBER SECURITY  ·  Cyber Security Content Area 1</a:t>
+            </a:r>
+          </a:p>
+        </p:txBody>
+      </p:sp>
+      <p:sp>
+        <p:nvSpPr>
+          <p:cNvPr id="3" name="TextBox 2"/>
+          <p:cNvSpPr txBox="1"/>
+          <p:nvPr/>
+        </p:nvSpPr>
+        <p:spPr>
+          <a:xfrm>
+            <a:off x="548640" y="566928"/>
+            <a:ext cx="11094415" cy="822960"/>
+          </a:xfrm>
+          <a:prstGeom prst="rect">
+            <a:avLst/>
+          </a:prstGeom>
+          <a:noFill/>
+        </p:spPr>
+        <p:txBody>
+          <a:bodyPr wrap="square" anchor="ctr" lIns="0" rIns="0" tIns="0" bIns="0"/>
+          <a:lstStyle/>
+          <a:p>
+            <a:pPr algn="l"/>
+            <a:r>
+              <a:rPr sz="3100" b="1" i="0">
+                <a:solidFill>
+                  <a:srgbClr val="03306E"/>
+                </a:solidFill>
+                <a:latin typeface="Cambria"/>
+              </a:rPr>
+              <a:t>Quick check: UK Cyber Security Council Code of Ethics</a:t>
+            </a:r>
+          </a:p>
+        </p:txBody>
+      </p:sp>
+      <p:sp>
+        <p:nvSpPr>
+          <p:cNvPr id="4" name="TextBox 3"/>
+          <p:cNvSpPr txBox="1"/>
+          <p:nvPr/>
+        </p:nvSpPr>
+        <p:spPr>
+          <a:xfrm>
+            <a:off x="548640" y="6446520"/>
+            <a:ext cx="8229600" cy="274320"/>
+          </a:xfrm>
+          <a:prstGeom prst="rect">
+            <a:avLst/>
+          </a:prstGeom>
+          <a:noFill/>
+        </p:spPr>
+        <p:txBody>
+          <a:bodyPr wrap="square" anchor="t" lIns="0" rIns="0" tIns="0" bIns="0"/>
+          <a:lstStyle/>
+          <a:p>
+            <a:pPr algn="l"/>
+            <a:r>
+              <a:rPr sz="1000" b="0" i="0">
+                <a:solidFill>
+                  <a:srgbClr val="54595D"/>
+                </a:solidFill>
+                <a:latin typeface="Calibri"/>
+              </a:rPr>
+              <a:t>Digital Support and Security T Level  ·  Cyber Law and Ethics</a:t>
+            </a:r>
+          </a:p>
+        </p:txBody>
+      </p:sp>
+      <p:sp>
+        <p:nvSpPr>
+          <p:cNvPr id="5" name="TextBox 4"/>
+          <p:cNvSpPr txBox="1"/>
+          <p:nvPr/>
+        </p:nvSpPr>
+        <p:spPr>
+          <a:xfrm>
+            <a:off x="10728655" y="6446520"/>
+            <a:ext cx="914400" cy="274320"/>
+          </a:xfrm>
+          <a:prstGeom prst="rect">
+            <a:avLst/>
+          </a:prstGeom>
+          <a:noFill/>
+        </p:spPr>
+        <p:txBody>
+          <a:bodyPr wrap="square" anchor="t" lIns="0" rIns="0" tIns="0" bIns="0"/>
+          <a:lstStyle/>
+          <a:p>
+            <a:pPr algn="r"/>
+            <a:r>
+              <a:rPr sz="1000" b="0" i="0">
+                <a:solidFill>
+                  <a:srgbClr val="54595D"/>
+                </a:solidFill>
+                <a:latin typeface="Calibri"/>
+              </a:rPr>
+              <a:t>11</a:t>
+            </a:r>
+          </a:p>
+        </p:txBody>
+      </p:sp>
+      <p:sp>
+        <p:nvSpPr>
+          <p:cNvPr id="6" name="Oval 5"/>
+          <p:cNvSpPr/>
+          <p:nvPr/>
+        </p:nvSpPr>
+        <p:spPr>
+          <a:xfrm>
+            <a:off x="548640" y="1691640"/>
+            <a:ext cx="502920" cy="502920"/>
+          </a:xfrm>
+          <a:prstGeom prst="ellipse">
+            <a:avLst/>
+          </a:prstGeom>
+          <a:solidFill>
+            <a:srgbClr val="E0463A"/>
+          </a:solidFill>
+          <a:ln>
+            <a:noFill/>
+          </a:ln>
+          <a:effectLst/>
+        </p:spPr>
+        <p:style>
+          <a:lnRef idx="1">
+            <a:schemeClr val="accent1"/>
+          </a:lnRef>
+          <a:fillRef idx="3">
+            <a:schemeClr val="accent1"/>
+          </a:fillRef>
+          <a:effectRef idx="2">
+            <a:schemeClr val="accent1"/>
+          </a:effectRef>
+          <a:fontRef idx="minor">
+            <a:schemeClr val="lt1"/>
+          </a:fontRef>
+        </p:style>
+        <p:txBody>
+          <a:bodyPr rtlCol="0" anchor="ctr" lIns="0" rIns="0" tIns="0" bIns="0"/>
+          <a:lstStyle/>
+          <a:p>
+            <a:pPr algn="ctr"/>
+            <a:r>
+              <a:rPr sz="1600" b="1">
+                <a:solidFill>
+                  <a:srgbClr val="FFFFFF"/>
+                </a:solidFill>
+                <a:latin typeface="Calibri"/>
+              </a:rPr>
+              <a:t>1</a:t>
+            </a:r>
+          </a:p>
+        </p:txBody>
+      </p:sp>
+      <p:sp>
+        <p:nvSpPr>
+          <p:cNvPr id="7" name="TextBox 6"/>
+          <p:cNvSpPr txBox="1"/>
+          <p:nvPr/>
+        </p:nvSpPr>
+        <p:spPr>
+          <a:xfrm>
+            <a:off x="1371600" y="1645920"/>
+            <a:ext cx="10271455" cy="1188720"/>
+          </a:xfrm>
+          <a:prstGeom prst="rect">
+            <a:avLst/>
+          </a:prstGeom>
+          <a:noFill/>
+        </p:spPr>
+        <p:txBody>
+          <a:bodyPr wrap="square" anchor="t" lIns="0" rIns="0" tIns="0" bIns="0"/>
+          <a:lstStyle/>
+          <a:p>
+            <a:pPr algn="l"/>
+            <a:r>
+              <a:rPr sz="2400" b="0" i="0">
+                <a:solidFill>
+                  <a:srgbClr val="202122"/>
+                </a:solidFill>
+                <a:latin typeface="Calibri"/>
+              </a:rPr>
+              <a:t>Name the four principles.</a:t>
+            </a:r>
+          </a:p>
+        </p:txBody>
+      </p:sp>
+      <p:sp>
+        <p:nvSpPr>
+          <p:cNvPr id="8" name="Oval 7"/>
+          <p:cNvSpPr/>
+          <p:nvPr/>
+        </p:nvSpPr>
+        <p:spPr>
+          <a:xfrm>
+            <a:off x="548640" y="3108960"/>
+            <a:ext cx="502920" cy="502920"/>
+          </a:xfrm>
+          <a:prstGeom prst="ellipse">
+            <a:avLst/>
+          </a:prstGeom>
+          <a:solidFill>
+            <a:srgbClr val="E0463A"/>
+          </a:solidFill>
+          <a:ln>
+            <a:noFill/>
+          </a:ln>
+          <a:effectLst/>
+        </p:spPr>
+        <p:style>
+          <a:lnRef idx="1">
+            <a:schemeClr val="accent1"/>
+          </a:lnRef>
+          <a:fillRef idx="3">
+            <a:schemeClr val="accent1"/>
+          </a:fillRef>
+          <a:effectRef idx="2">
+            <a:schemeClr val="accent1"/>
+          </a:effectRef>
+          <a:fontRef idx="minor">
+            <a:schemeClr val="lt1"/>
+          </a:fontRef>
+        </p:style>
+        <p:txBody>
+          <a:bodyPr rtlCol="0" anchor="ctr" lIns="0" rIns="0" tIns="0" bIns="0"/>
+          <a:lstStyle/>
+          <a:p>
+            <a:pPr algn="ctr"/>
+            <a:r>
+              <a:rPr sz="1600" b="1">
+                <a:solidFill>
+                  <a:srgbClr val="FFFFFF"/>
+                </a:solidFill>
+                <a:latin typeface="Calibri"/>
+              </a:rPr>
+              <a:t>2</a:t>
+            </a:r>
+          </a:p>
+        </p:txBody>
+      </p:sp>
+      <p:sp>
+        <p:nvSpPr>
+          <p:cNvPr id="9" name="TextBox 8"/>
+          <p:cNvSpPr txBox="1"/>
+          <p:nvPr/>
+        </p:nvSpPr>
+        <p:spPr>
+          <a:xfrm>
+            <a:off x="1371600" y="3063240"/>
+            <a:ext cx="10271455" cy="1188720"/>
+          </a:xfrm>
+          <a:prstGeom prst="rect">
+            <a:avLst/>
+          </a:prstGeom>
+          <a:noFill/>
+        </p:spPr>
+        <p:txBody>
+          <a:bodyPr wrap="square" anchor="t" lIns="0" rIns="0" tIns="0" bIns="0"/>
+          <a:lstStyle/>
+          <a:p>
+            <a:pPr algn="l"/>
+            <a:r>
+              <a:rPr sz="2400" b="0" i="0">
+                <a:solidFill>
+                  <a:srgbClr val="202122"/>
+                </a:solidFill>
+                <a:latin typeface="Calibri"/>
+              </a:rPr>
+              <a:t>Why declare a conflict of interest?</a:t>
+            </a:r>
+          </a:p>
+        </p:txBody>
+      </p:sp>
+      <p:sp>
+        <p:nvSpPr>
+          <p:cNvPr id="10" name="Oval 9"/>
+          <p:cNvSpPr/>
+          <p:nvPr/>
+        </p:nvSpPr>
+        <p:spPr>
+          <a:xfrm>
+            <a:off x="548640" y="4526280"/>
+            <a:ext cx="502920" cy="502920"/>
+          </a:xfrm>
+          <a:prstGeom prst="ellipse">
+            <a:avLst/>
+          </a:prstGeom>
+          <a:solidFill>
+            <a:srgbClr val="E0463A"/>
+          </a:solidFill>
+          <a:ln>
+            <a:noFill/>
+          </a:ln>
+          <a:effectLst/>
+        </p:spPr>
+        <p:style>
+          <a:lnRef idx="1">
+            <a:schemeClr val="accent1"/>
+          </a:lnRef>
+          <a:fillRef idx="3">
+            <a:schemeClr val="accent1"/>
+          </a:fillRef>
+          <a:effectRef idx="2">
+            <a:schemeClr val="accent1"/>
+          </a:effectRef>
+          <a:fontRef idx="minor">
+            <a:schemeClr val="lt1"/>
+          </a:fontRef>
+        </p:style>
+        <p:txBody>
+          <a:bodyPr rtlCol="0" anchor="ctr" lIns="0" rIns="0" tIns="0" bIns="0"/>
+          <a:lstStyle/>
+          <a:p>
+            <a:pPr algn="ctr"/>
+            <a:r>
+              <a:rPr sz="1600" b="1">
+                <a:solidFill>
+                  <a:srgbClr val="FFFFFF"/>
+                </a:solidFill>
+                <a:latin typeface="Calibri"/>
+              </a:rPr>
+              <a:t>3</a:t>
+            </a:r>
+          </a:p>
+        </p:txBody>
+      </p:sp>
+      <p:sp>
+        <p:nvSpPr>
+          <p:cNvPr id="11" name="TextBox 10"/>
+          <p:cNvSpPr txBox="1"/>
+          <p:nvPr/>
+        </p:nvSpPr>
+        <p:spPr>
+          <a:xfrm>
+            <a:off x="1371600" y="4480560"/>
+            <a:ext cx="10271455" cy="1188720"/>
+          </a:xfrm>
+          <a:prstGeom prst="rect">
+            <a:avLst/>
+          </a:prstGeom>
+          <a:noFill/>
+        </p:spPr>
+        <p:txBody>
+          <a:bodyPr wrap="square" anchor="t" lIns="0" rIns="0" tIns="0" bIns="0"/>
+          <a:lstStyle/>
+          <a:p>
+            <a:pPr algn="l"/>
+            <a:r>
+              <a:rPr sz="2400" b="0" i="0">
+                <a:solidFill>
+                  <a:srgbClr val="202122"/>
+                </a:solidFill>
+                <a:latin typeface="Calibri"/>
+              </a:rPr>
+              <a:t>What does professionalism include?</a:t>
+            </a:r>
+          </a:p>
+        </p:txBody>
+      </p:sp>
+      <p:sp>
+        <p:nvSpPr>
+          <p:cNvPr id="12" name="TextBox 11"/>
+          <p:cNvSpPr txBox="1"/>
+          <p:nvPr/>
+        </p:nvSpPr>
+        <p:spPr>
+          <a:xfrm>
+            <a:off x="548640" y="5852160"/>
+            <a:ext cx="11094415" cy="365760"/>
+          </a:xfrm>
+          <a:prstGeom prst="rect">
+            <a:avLst/>
+          </a:prstGeom>
+          <a:noFill/>
+        </p:spPr>
+        <p:txBody>
+          <a:bodyPr wrap="square" anchor="t" lIns="0" rIns="0" tIns="0" bIns="0"/>
+          <a:lstStyle/>
+          <a:p>
+            <a:pPr algn="l"/>
+            <a:r>
+              <a:rPr sz="1300" b="0" i="1">
+                <a:solidFill>
+                  <a:srgbClr val="54595D"/>
+                </a:solidFill>
+                <a:latin typeface="Calibri"/>
+              </a:rPr>
+              <a:t>Answer on mini whiteboards or in your book. Answers are in the speaker notes.</a:t>
+            </a:r>
+          </a:p>
+        </p:txBody>
+      </p:sp>
+    </p:spTree>
+  </p:cSld>
+  <p:clrMapOvr>
+    <a:masterClrMapping/>
+  </p:clrMapOvr>
+</p:sld>
+</file>
+
+<file path=ppt/slides/slide12.xml><?xml version="1.0" encoding="utf-8"?>
+<p:sld xmlns:a="http://schemas.openxmlformats.org/drawingml/2006/main" xmlns:p="http://schemas.openxmlformats.org/presentationml/2006/main" xmlns:r="http://schemas.openxmlformats.org/officeDocument/2006/relationships">
+  <p:cSld>
+    <p:bg>
+      <p:bgPr>
+        <a:solidFill>
+          <a:srgbClr val="FFFFFF"/>
+        </a:solidFill>
+        <a:effectLst/>
+      </p:bgPr>
+    </p:bg>
+    <p:spTree>
+      <p:nvGrpSpPr>
+        <p:cNvPr id="1" name=""/>
+        <p:cNvGrpSpPr/>
+        <p:nvPr/>
+      </p:nvGrpSpPr>
+      <p:grpSpPr/>
+      <p:sp>
+        <p:nvSpPr>
+          <p:cNvPr id="2" name="TextBox 1"/>
+          <p:cNvSpPr txBox="1"/>
+          <p:nvPr/>
+        </p:nvSpPr>
+        <p:spPr>
+          <a:xfrm>
+            <a:off x="548640" y="320040"/>
+            <a:ext cx="11094415" cy="274320"/>
+          </a:xfrm>
+          <a:prstGeom prst="rect">
+            <a:avLst/>
+          </a:prstGeom>
+          <a:noFill/>
+        </p:spPr>
+        <p:txBody>
+          <a:bodyPr wrap="square" anchor="t" lIns="0" rIns="0" tIns="0" bIns="0"/>
+          <a:lstStyle/>
+          <a:p>
+            <a:pPr algn="l"/>
+            <a:r>
+              <a:rPr sz="1100" b="1" i="0">
+                <a:solidFill>
+                  <a:srgbClr val="54595D"/>
+                </a:solidFill>
+                <a:latin typeface="Calibri"/>
+              </a:rPr>
+              <a:t>CYBER SECURITY  ·  Cyber Security Content Area 1</a:t>
+            </a:r>
+          </a:p>
+        </p:txBody>
+      </p:sp>
+      <p:sp>
+        <p:nvSpPr>
+          <p:cNvPr id="3" name="TextBox 2"/>
+          <p:cNvSpPr txBox="1"/>
+          <p:nvPr/>
+        </p:nvSpPr>
+        <p:spPr>
+          <a:xfrm>
+            <a:off x="548640" y="566928"/>
+            <a:ext cx="11094415" cy="822960"/>
+          </a:xfrm>
+          <a:prstGeom prst="rect">
+            <a:avLst/>
+          </a:prstGeom>
+          <a:noFill/>
+        </p:spPr>
+        <p:txBody>
+          <a:bodyPr wrap="square" anchor="ctr" lIns="0" rIns="0" tIns="0" bIns="0"/>
+          <a:lstStyle/>
+          <a:p>
+            <a:pPr algn="l"/>
+            <a:r>
+              <a:rPr sz="3200" b="1" i="0">
+                <a:solidFill>
+                  <a:srgbClr val="03306E"/>
+                </a:solidFill>
+                <a:latin typeface="Cambria"/>
+              </a:rPr>
+              <a:t>BCS code of conduct</a:t>
+            </a:r>
+          </a:p>
+        </p:txBody>
+      </p:sp>
+      <p:sp>
+        <p:nvSpPr>
+          <p:cNvPr id="4" name="TextBox 3"/>
+          <p:cNvSpPr txBox="1"/>
+          <p:nvPr/>
+        </p:nvSpPr>
+        <p:spPr>
+          <a:xfrm>
+            <a:off x="548640" y="6446520"/>
+            <a:ext cx="8229600" cy="274320"/>
+          </a:xfrm>
+          <a:prstGeom prst="rect">
+            <a:avLst/>
+          </a:prstGeom>
+          <a:noFill/>
+        </p:spPr>
+        <p:txBody>
+          <a:bodyPr wrap="square" anchor="t" lIns="0" rIns="0" tIns="0" bIns="0"/>
+          <a:lstStyle/>
+          <a:p>
+            <a:pPr algn="l"/>
+            <a:r>
+              <a:rPr sz="1000" b="0" i="0">
+                <a:solidFill>
+                  <a:srgbClr val="54595D"/>
+                </a:solidFill>
+                <a:latin typeface="Calibri"/>
+              </a:rPr>
+              <a:t>Digital Support and Security T Level  ·  Cyber Law and Ethics</a:t>
+            </a:r>
+          </a:p>
+        </p:txBody>
+      </p:sp>
+      <p:sp>
+        <p:nvSpPr>
+          <p:cNvPr id="5" name="TextBox 4"/>
+          <p:cNvSpPr txBox="1"/>
+          <p:nvPr/>
+        </p:nvSpPr>
+        <p:spPr>
+          <a:xfrm>
+            <a:off x="10728655" y="6446520"/>
+            <a:ext cx="914400" cy="274320"/>
+          </a:xfrm>
+          <a:prstGeom prst="rect">
+            <a:avLst/>
+          </a:prstGeom>
+          <a:noFill/>
+        </p:spPr>
+        <p:txBody>
+          <a:bodyPr wrap="square" anchor="t" lIns="0" rIns="0" tIns="0" bIns="0"/>
+          <a:lstStyle/>
+          <a:p>
+            <a:pPr algn="r"/>
+            <a:r>
+              <a:rPr sz="1000" b="0" i="0">
+                <a:solidFill>
+                  <a:srgbClr val="54595D"/>
+                </a:solidFill>
+                <a:latin typeface="Calibri"/>
+              </a:rPr>
+              <a:t>12</a:t>
+            </a:r>
+          </a:p>
+        </p:txBody>
+      </p:sp>
+      <p:sp>
+        <p:nvSpPr>
+          <p:cNvPr id="6" name="Rounded Rectangle 5"/>
+          <p:cNvSpPr/>
+          <p:nvPr/>
+        </p:nvSpPr>
+        <p:spPr>
+          <a:xfrm>
+            <a:off x="548640" y="1600200"/>
+            <a:ext cx="5410047" cy="2148840"/>
+          </a:xfrm>
+          <a:prstGeom prst="roundRect">
+            <a:avLst>
+              <a:gd name="adj" fmla="val 6000"/>
+            </a:avLst>
+          </a:prstGeom>
+          <a:solidFill>
+            <a:srgbClr val="EAF3FF"/>
+          </a:solidFill>
+          <a:ln>
+            <a:noFill/>
+          </a:ln>
+          <a:effectLst/>
+        </p:spPr>
+        <p:style>
+          <a:lnRef idx="1">
+            <a:schemeClr val="accent1"/>
+          </a:lnRef>
+          <a:fillRef idx="3">
+            <a:schemeClr val="accent1"/>
+          </a:fillRef>
+          <a:effectRef idx="2">
+            <a:schemeClr val="accent1"/>
+          </a:effectRef>
+          <a:fontRef idx="minor">
+            <a:schemeClr val="lt1"/>
+          </a:fontRef>
+        </p:style>
+        <p:txBody>
+          <a:bodyPr rtlCol="0" anchor="ctr"/>
+          <a:lstStyle/>
+          <a:p/>
+        </p:txBody>
+      </p:sp>
+      <p:sp>
+        <p:nvSpPr>
+          <p:cNvPr id="7" name="Oval 6"/>
+          <p:cNvSpPr/>
+          <p:nvPr/>
+        </p:nvSpPr>
+        <p:spPr>
+          <a:xfrm>
+            <a:off x="777240" y="1828800"/>
+            <a:ext cx="457200" cy="457200"/>
+          </a:xfrm>
+          <a:prstGeom prst="ellipse">
+            <a:avLst/>
+          </a:prstGeom>
+          <a:solidFill>
+            <a:srgbClr val="E0463A"/>
+          </a:solidFill>
+          <a:ln>
+            <a:noFill/>
+          </a:ln>
+          <a:effectLst/>
+        </p:spPr>
+        <p:style>
+          <a:lnRef idx="1">
+            <a:schemeClr val="accent1"/>
+          </a:lnRef>
+          <a:fillRef idx="3">
+            <a:schemeClr val="accent1"/>
+          </a:fillRef>
+          <a:effectRef idx="2">
+            <a:schemeClr val="accent1"/>
+          </a:effectRef>
+          <a:fontRef idx="minor">
+            <a:schemeClr val="lt1"/>
+          </a:fontRef>
+        </p:style>
+        <p:txBody>
+          <a:bodyPr rtlCol="0" anchor="ctr" lIns="0" rIns="0" tIns="0" bIns="0"/>
+          <a:lstStyle/>
+          <a:p>
+            <a:pPr algn="ctr"/>
+            <a:r>
+              <a:rPr sz="1500" b="1">
+                <a:solidFill>
+                  <a:srgbClr val="FFFFFF"/>
+                </a:solidFill>
+                <a:latin typeface="Calibri"/>
+              </a:rPr>
+              <a:t>1</a:t>
+            </a:r>
+          </a:p>
+        </p:txBody>
+      </p:sp>
+      <p:sp>
+        <p:nvSpPr>
+          <p:cNvPr id="8" name="TextBox 7"/>
+          <p:cNvSpPr txBox="1"/>
+          <p:nvPr/>
+        </p:nvSpPr>
+        <p:spPr>
+          <a:xfrm>
+            <a:off x="1371600" y="1801368"/>
+            <a:ext cx="4404207" cy="512064"/>
+          </a:xfrm>
+          <a:prstGeom prst="rect">
+            <a:avLst/>
+          </a:prstGeom>
+          <a:noFill/>
+        </p:spPr>
+        <p:txBody>
+          <a:bodyPr wrap="square" anchor="ctr" lIns="0" rIns="0" tIns="0" bIns="0"/>
+          <a:lstStyle/>
+          <a:p>
+            <a:pPr algn="l"/>
+            <a:r>
+              <a:rPr sz="1900" b="1" i="0">
+                <a:solidFill>
+                  <a:srgbClr val="03306E"/>
+                </a:solidFill>
+                <a:latin typeface="Calibri"/>
+              </a:rPr>
+              <a:t>Make IT for everyone</a:t>
+            </a:r>
+          </a:p>
+        </p:txBody>
+      </p:sp>
+      <p:sp>
+        <p:nvSpPr>
+          <p:cNvPr id="9" name="TextBox 8"/>
+          <p:cNvSpPr txBox="1"/>
+          <p:nvPr/>
+        </p:nvSpPr>
+        <p:spPr>
+          <a:xfrm>
+            <a:off x="777240" y="2468880"/>
+            <a:ext cx="4952847" cy="1143000"/>
+          </a:xfrm>
+          <a:prstGeom prst="rect">
+            <a:avLst/>
+          </a:prstGeom>
+          <a:noFill/>
+        </p:spPr>
+        <p:txBody>
+          <a:bodyPr wrap="square" anchor="t" lIns="0" rIns="0" tIns="0" bIns="0"/>
+          <a:lstStyle/>
+          <a:p>
+            <a:pPr algn="l"/>
+            <a:r>
+              <a:rPr sz="2000" b="0" i="0">
+                <a:solidFill>
+                  <a:srgbClr val="202122"/>
+                </a:solidFill>
+                <a:latin typeface="Calibri"/>
+              </a:rPr>
+              <a:t>Share professional information.</a:t>
+            </a:r>
+          </a:p>
+        </p:txBody>
+      </p:sp>
+      <p:sp>
+        <p:nvSpPr>
+          <p:cNvPr id="10" name="Rounded Rectangle 9"/>
+          <p:cNvSpPr/>
+          <p:nvPr/>
+        </p:nvSpPr>
+        <p:spPr>
+          <a:xfrm>
+            <a:off x="6233007" y="1600200"/>
+            <a:ext cx="5410047" cy="2148840"/>
+          </a:xfrm>
+          <a:prstGeom prst="roundRect">
+            <a:avLst>
+              <a:gd name="adj" fmla="val 6000"/>
+            </a:avLst>
+          </a:prstGeom>
+          <a:solidFill>
+            <a:srgbClr val="EAF3FF"/>
+          </a:solidFill>
+          <a:ln>
+            <a:noFill/>
+          </a:ln>
+          <a:effectLst/>
+        </p:spPr>
+        <p:style>
+          <a:lnRef idx="1">
+            <a:schemeClr val="accent1"/>
+          </a:lnRef>
+          <a:fillRef idx="3">
+            <a:schemeClr val="accent1"/>
+          </a:fillRef>
+          <a:effectRef idx="2">
+            <a:schemeClr val="accent1"/>
+          </a:effectRef>
+          <a:fontRef idx="minor">
+            <a:schemeClr val="lt1"/>
+          </a:fontRef>
+        </p:style>
+        <p:txBody>
+          <a:bodyPr rtlCol="0" anchor="ctr"/>
+          <a:lstStyle/>
+          <a:p/>
+        </p:txBody>
+      </p:sp>
+      <p:sp>
+        <p:nvSpPr>
+          <p:cNvPr id="11" name="Oval 10"/>
+          <p:cNvSpPr/>
+          <p:nvPr/>
+        </p:nvSpPr>
+        <p:spPr>
+          <a:xfrm>
+            <a:off x="6461607" y="1828800"/>
+            <a:ext cx="457200" cy="457200"/>
+          </a:xfrm>
+          <a:prstGeom prst="ellipse">
+            <a:avLst/>
+          </a:prstGeom>
+          <a:solidFill>
+            <a:srgbClr val="E0463A"/>
+          </a:solidFill>
+          <a:ln>
+            <a:noFill/>
+          </a:ln>
+          <a:effectLst/>
+        </p:spPr>
+        <p:style>
+          <a:lnRef idx="1">
+            <a:schemeClr val="accent1"/>
+          </a:lnRef>
+          <a:fillRef idx="3">
+            <a:schemeClr val="accent1"/>
+          </a:fillRef>
+          <a:effectRef idx="2">
+            <a:schemeClr val="accent1"/>
+          </a:effectRef>
+          <a:fontRef idx="minor">
+            <a:schemeClr val="lt1"/>
+          </a:fontRef>
+        </p:style>
+        <p:txBody>
+          <a:bodyPr rtlCol="0" anchor="ctr" lIns="0" rIns="0" tIns="0" bIns="0"/>
+          <a:lstStyle/>
+          <a:p>
+            <a:pPr algn="ctr"/>
+            <a:r>
+              <a:rPr sz="1500" b="1">
+                <a:solidFill>
+                  <a:srgbClr val="FFFFFF"/>
+                </a:solidFill>
+                <a:latin typeface="Calibri"/>
+              </a:rPr>
+              <a:t>2</a:t>
+            </a:r>
+          </a:p>
+        </p:txBody>
+      </p:sp>
+      <p:sp>
+        <p:nvSpPr>
+          <p:cNvPr id="12" name="TextBox 11"/>
+          <p:cNvSpPr txBox="1"/>
+          <p:nvPr/>
+        </p:nvSpPr>
+        <p:spPr>
+          <a:xfrm>
+            <a:off x="7055967" y="1801368"/>
+            <a:ext cx="4404207" cy="512064"/>
+          </a:xfrm>
+          <a:prstGeom prst="rect">
+            <a:avLst/>
+          </a:prstGeom>
+          <a:noFill/>
+        </p:spPr>
+        <p:txBody>
+          <a:bodyPr wrap="square" anchor="ctr" lIns="0" rIns="0" tIns="0" bIns="0"/>
+          <a:lstStyle/>
+          <a:p>
+            <a:pPr algn="l"/>
+            <a:r>
+              <a:rPr sz="1900" b="1" i="0">
+                <a:solidFill>
+                  <a:srgbClr val="03306E"/>
+                </a:solidFill>
+                <a:latin typeface="Calibri"/>
+              </a:rPr>
+              <a:t>Show what you know</a:t>
+            </a:r>
+          </a:p>
+        </p:txBody>
+      </p:sp>
+      <p:sp>
+        <p:nvSpPr>
+          <p:cNvPr id="13" name="TextBox 12"/>
+          <p:cNvSpPr txBox="1"/>
+          <p:nvPr/>
+        </p:nvSpPr>
+        <p:spPr>
+          <a:xfrm>
+            <a:off x="6461607" y="2468880"/>
+            <a:ext cx="4952847" cy="1143000"/>
+          </a:xfrm>
+          <a:prstGeom prst="rect">
+            <a:avLst/>
+          </a:prstGeom>
+          <a:noFill/>
+        </p:spPr>
+        <p:txBody>
+          <a:bodyPr wrap="square" anchor="t" lIns="0" rIns="0" tIns="0" bIns="0"/>
+          <a:lstStyle/>
+          <a:p>
+            <a:pPr algn="l"/>
+            <a:r>
+              <a:rPr sz="2000" b="0" i="0">
+                <a:solidFill>
+                  <a:srgbClr val="202122"/>
+                </a:solidFill>
+                <a:latin typeface="Calibri"/>
+              </a:rPr>
+              <a:t>Work within your competence, keep learning, know the law.</a:t>
+            </a:r>
+          </a:p>
+        </p:txBody>
+      </p:sp>
+      <p:sp>
+        <p:nvSpPr>
+          <p:cNvPr id="14" name="Rounded Rectangle 13"/>
+          <p:cNvSpPr/>
+          <p:nvPr/>
+        </p:nvSpPr>
+        <p:spPr>
+          <a:xfrm>
+            <a:off x="548640" y="4023360"/>
+            <a:ext cx="5410047" cy="2148840"/>
+          </a:xfrm>
+          <a:prstGeom prst="roundRect">
+            <a:avLst>
+              <a:gd name="adj" fmla="val 6000"/>
+            </a:avLst>
+          </a:prstGeom>
+          <a:solidFill>
+            <a:srgbClr val="EAF3FF"/>
+          </a:solidFill>
+          <a:ln>
+            <a:noFill/>
+          </a:ln>
+          <a:effectLst/>
+        </p:spPr>
+        <p:style>
+          <a:lnRef idx="1">
+            <a:schemeClr val="accent1"/>
+          </a:lnRef>
+          <a:fillRef idx="3">
+            <a:schemeClr val="accent1"/>
+          </a:fillRef>
+          <a:effectRef idx="2">
+            <a:schemeClr val="accent1"/>
+          </a:effectRef>
+          <a:fontRef idx="minor">
+            <a:schemeClr val="lt1"/>
+          </a:fontRef>
+        </p:style>
+        <p:txBody>
+          <a:bodyPr rtlCol="0" anchor="ctr"/>
+          <a:lstStyle/>
+          <a:p/>
+        </p:txBody>
+      </p:sp>
+      <p:sp>
+        <p:nvSpPr>
+          <p:cNvPr id="15" name="Oval 14"/>
+          <p:cNvSpPr/>
+          <p:nvPr/>
+        </p:nvSpPr>
+        <p:spPr>
+          <a:xfrm>
+            <a:off x="777240" y="4251960"/>
+            <a:ext cx="457200" cy="457200"/>
+          </a:xfrm>
+          <a:prstGeom prst="ellipse">
+            <a:avLst/>
+          </a:prstGeom>
+          <a:solidFill>
+            <a:srgbClr val="E0463A"/>
+          </a:solidFill>
+          <a:ln>
+            <a:noFill/>
+          </a:ln>
+          <a:effectLst/>
+        </p:spPr>
+        <p:style>
+          <a:lnRef idx="1">
+            <a:schemeClr val="accent1"/>
+          </a:lnRef>
+          <a:fillRef idx="3">
+            <a:schemeClr val="accent1"/>
+          </a:fillRef>
+          <a:effectRef idx="2">
+            <a:schemeClr val="accent1"/>
+          </a:effectRef>
+          <a:fontRef idx="minor">
+            <a:schemeClr val="lt1"/>
+          </a:fontRef>
+        </p:style>
+        <p:txBody>
+          <a:bodyPr rtlCol="0" anchor="ctr" lIns="0" rIns="0" tIns="0" bIns="0"/>
+          <a:lstStyle/>
+          <a:p>
+            <a:pPr algn="ctr"/>
+            <a:r>
+              <a:rPr sz="1500" b="1">
+                <a:solidFill>
+                  <a:srgbClr val="FFFFFF"/>
+                </a:solidFill>
+                <a:latin typeface="Calibri"/>
+              </a:rPr>
+              <a:t>3</a:t>
+            </a:r>
+          </a:p>
+        </p:txBody>
+      </p:sp>
+      <p:sp>
+        <p:nvSpPr>
+          <p:cNvPr id="16" name="TextBox 15"/>
+          <p:cNvSpPr txBox="1"/>
+          <p:nvPr/>
+        </p:nvSpPr>
+        <p:spPr>
+          <a:xfrm>
+            <a:off x="1371600" y="4224528"/>
+            <a:ext cx="4404207" cy="512064"/>
+          </a:xfrm>
+          <a:prstGeom prst="rect">
+            <a:avLst/>
+          </a:prstGeom>
+          <a:noFill/>
+        </p:spPr>
+        <p:txBody>
+          <a:bodyPr wrap="square" anchor="ctr" lIns="0" rIns="0" tIns="0" bIns="0"/>
+          <a:lstStyle/>
+          <a:p>
+            <a:pPr algn="l"/>
+            <a:r>
+              <a:rPr sz="1900" b="1" i="0">
+                <a:solidFill>
+                  <a:srgbClr val="03306E"/>
+                </a:solidFill>
+                <a:latin typeface="Calibri"/>
+              </a:rPr>
+              <a:t>Respect the organisation</a:t>
+            </a:r>
+          </a:p>
+        </p:txBody>
+      </p:sp>
+      <p:sp>
+        <p:nvSpPr>
+          <p:cNvPr id="17" name="TextBox 16"/>
+          <p:cNvSpPr txBox="1"/>
+          <p:nvPr/>
+        </p:nvSpPr>
+        <p:spPr>
+          <a:xfrm>
+            <a:off x="777240" y="4892040"/>
+            <a:ext cx="4952847" cy="1143000"/>
+          </a:xfrm>
+          <a:prstGeom prst="rect">
+            <a:avLst/>
+          </a:prstGeom>
+          <a:noFill/>
+        </p:spPr>
+        <p:txBody>
+          <a:bodyPr wrap="square" anchor="t" lIns="0" rIns="0" tIns="0" bIns="0"/>
+          <a:lstStyle/>
+          <a:p>
+            <a:pPr algn="l"/>
+            <a:r>
+              <a:rPr sz="2000" b="0" i="0">
+                <a:solidFill>
+                  <a:srgbClr val="202122"/>
+                </a:solidFill>
+                <a:latin typeface="Calibri"/>
+              </a:rPr>
+              <a:t>Due care, no disclosures for personal gain, do not exploit inexperience.</a:t>
+            </a:r>
+          </a:p>
+        </p:txBody>
+      </p:sp>
+      <p:sp>
+        <p:nvSpPr>
+          <p:cNvPr id="18" name="Rounded Rectangle 17"/>
+          <p:cNvSpPr/>
+          <p:nvPr/>
+        </p:nvSpPr>
+        <p:spPr>
+          <a:xfrm>
+            <a:off x="6233007" y="4023360"/>
+            <a:ext cx="5410047" cy="2148840"/>
+          </a:xfrm>
+          <a:prstGeom prst="roundRect">
+            <a:avLst>
+              <a:gd name="adj" fmla="val 6000"/>
+            </a:avLst>
+          </a:prstGeom>
+          <a:solidFill>
+            <a:srgbClr val="EAF3FF"/>
+          </a:solidFill>
+          <a:ln>
+            <a:noFill/>
+          </a:ln>
+          <a:effectLst/>
+        </p:spPr>
+        <p:style>
+          <a:lnRef idx="1">
+            <a:schemeClr val="accent1"/>
+          </a:lnRef>
+          <a:fillRef idx="3">
+            <a:schemeClr val="accent1"/>
+          </a:fillRef>
+          <a:effectRef idx="2">
+            <a:schemeClr val="accent1"/>
+          </a:effectRef>
+          <a:fontRef idx="minor">
+            <a:schemeClr val="lt1"/>
+          </a:fontRef>
+        </p:style>
+        <p:txBody>
+          <a:bodyPr rtlCol="0" anchor="ctr"/>
+          <a:lstStyle/>
+          <a:p/>
+        </p:txBody>
+      </p:sp>
+      <p:sp>
+        <p:nvSpPr>
+          <p:cNvPr id="19" name="Oval 18"/>
+          <p:cNvSpPr/>
+          <p:nvPr/>
+        </p:nvSpPr>
+        <p:spPr>
+          <a:xfrm>
+            <a:off x="6461607" y="4251960"/>
+            <a:ext cx="457200" cy="457200"/>
+          </a:xfrm>
+          <a:prstGeom prst="ellipse">
+            <a:avLst/>
+          </a:prstGeom>
+          <a:solidFill>
+            <a:srgbClr val="E0463A"/>
+          </a:solidFill>
+          <a:ln>
+            <a:noFill/>
+          </a:ln>
+          <a:effectLst/>
+        </p:spPr>
+        <p:style>
+          <a:lnRef idx="1">
+            <a:schemeClr val="accent1"/>
+          </a:lnRef>
+          <a:fillRef idx="3">
+            <a:schemeClr val="accent1"/>
+          </a:fillRef>
+          <a:effectRef idx="2">
+            <a:schemeClr val="accent1"/>
+          </a:effectRef>
+          <a:fontRef idx="minor">
+            <a:schemeClr val="lt1"/>
+          </a:fontRef>
+        </p:style>
+        <p:txBody>
+          <a:bodyPr rtlCol="0" anchor="ctr" lIns="0" rIns="0" tIns="0" bIns="0"/>
+          <a:lstStyle/>
+          <a:p>
+            <a:pPr algn="ctr"/>
+            <a:r>
+              <a:rPr sz="1500" b="1">
+                <a:solidFill>
+                  <a:srgbClr val="FFFFFF"/>
+                </a:solidFill>
+                <a:latin typeface="Calibri"/>
+              </a:rPr>
+              <a:t>4</a:t>
+            </a:r>
+          </a:p>
+        </p:txBody>
+      </p:sp>
+      <p:sp>
+        <p:nvSpPr>
+          <p:cNvPr id="20" name="TextBox 19"/>
+          <p:cNvSpPr txBox="1"/>
+          <p:nvPr/>
+        </p:nvSpPr>
+        <p:spPr>
+          <a:xfrm>
+            <a:off x="7055967" y="4224528"/>
+            <a:ext cx="4404207" cy="512064"/>
+          </a:xfrm>
+          <a:prstGeom prst="rect">
+            <a:avLst/>
+          </a:prstGeom>
+          <a:noFill/>
+        </p:spPr>
+        <p:txBody>
+          <a:bodyPr wrap="square" anchor="ctr" lIns="0" rIns="0" tIns="0" bIns="0"/>
+          <a:lstStyle/>
+          <a:p>
+            <a:pPr algn="l"/>
+            <a:r>
+              <a:rPr sz="1900" b="1" i="0">
+                <a:solidFill>
+                  <a:srgbClr val="03306E"/>
+                </a:solidFill>
+                <a:latin typeface="Calibri"/>
+              </a:rPr>
+              <a:t>Keep IT professional</a:t>
+            </a:r>
+          </a:p>
+        </p:txBody>
+      </p:sp>
+      <p:sp>
+        <p:nvSpPr>
+          <p:cNvPr id="21" name="TextBox 20"/>
+          <p:cNvSpPr txBox="1"/>
+          <p:nvPr/>
+        </p:nvSpPr>
+        <p:spPr>
+          <a:xfrm>
+            <a:off x="6461607" y="4892040"/>
+            <a:ext cx="4952847" cy="1143000"/>
+          </a:xfrm>
+          <a:prstGeom prst="rect">
+            <a:avLst/>
+          </a:prstGeom>
+          <a:noFill/>
+        </p:spPr>
+        <p:txBody>
+          <a:bodyPr wrap="square" anchor="t" lIns="0" rIns="0" tIns="0" bIns="0"/>
+          <a:lstStyle/>
+          <a:p>
+            <a:pPr algn="l"/>
+            <a:r>
+              <a:rPr sz="2000" b="0" i="0">
+                <a:solidFill>
+                  <a:srgbClr val="202122"/>
+                </a:solidFill>
+                <a:latin typeface="Calibri"/>
+              </a:rPr>
+              <a:t>Uphold the profession, raise standards, support colleagues.</a:t>
+            </a:r>
+          </a:p>
+        </p:txBody>
+      </p:sp>
+    </p:spTree>
+  </p:cSld>
+  <p:clrMapOvr>
+    <a:masterClrMapping/>
+  </p:clrMapOvr>
+</p:sld>
+</file>
+
+<file path=ppt/slides/slide13.xml><?xml version="1.0" encoding="utf-8"?>
+<p:sld xmlns:a="http://schemas.openxmlformats.org/drawingml/2006/main" xmlns:p="http://schemas.openxmlformats.org/presentationml/2006/main" xmlns:r="http://schemas.openxmlformats.org/officeDocument/2006/relationships">
+  <p:cSld>
+    <p:bg>
+      <p:bgPr>
+        <a:solidFill>
+          <a:srgbClr val="FFFFFF"/>
+        </a:solidFill>
+        <a:effectLst/>
+      </p:bgPr>
+    </p:bg>
+    <p:spTree>
+      <p:nvGrpSpPr>
+        <p:cNvPr id="1" name=""/>
+        <p:cNvGrpSpPr/>
+        <p:nvPr/>
+      </p:nvGrpSpPr>
+      <p:grpSpPr/>
+      <p:sp>
+        <p:nvSpPr>
+          <p:cNvPr id="2" name="TextBox 1"/>
+          <p:cNvSpPr txBox="1"/>
+          <p:nvPr/>
+        </p:nvSpPr>
+        <p:spPr>
+          <a:xfrm>
+            <a:off x="548640" y="320040"/>
+            <a:ext cx="11094415" cy="274320"/>
+          </a:xfrm>
+          <a:prstGeom prst="rect">
+            <a:avLst/>
+          </a:prstGeom>
+          <a:noFill/>
+        </p:spPr>
+        <p:txBody>
+          <a:bodyPr wrap="square" anchor="t" lIns="0" rIns="0" tIns="0" bIns="0"/>
+          <a:lstStyle/>
+          <a:p>
+            <a:pPr algn="l"/>
+            <a:r>
+              <a:rPr sz="1100" b="1" i="0">
+                <a:solidFill>
+                  <a:srgbClr val="54595D"/>
+                </a:solidFill>
+                <a:latin typeface="Calibri"/>
+              </a:rPr>
+              <a:t>CYBER SECURITY  ·  Cyber Security Content Area 1</a:t>
+            </a:r>
+          </a:p>
+        </p:txBody>
+      </p:sp>
+      <p:sp>
+        <p:nvSpPr>
+          <p:cNvPr id="3" name="TextBox 2"/>
+          <p:cNvSpPr txBox="1"/>
+          <p:nvPr/>
+        </p:nvSpPr>
+        <p:spPr>
+          <a:xfrm>
+            <a:off x="548640" y="566928"/>
+            <a:ext cx="11094415" cy="822960"/>
+          </a:xfrm>
+          <a:prstGeom prst="rect">
+            <a:avLst/>
+          </a:prstGeom>
+          <a:noFill/>
+        </p:spPr>
+        <p:txBody>
+          <a:bodyPr wrap="square" anchor="ctr" lIns="0" rIns="0" tIns="0" bIns="0"/>
+          <a:lstStyle/>
+          <a:p>
+            <a:pPr algn="l"/>
+            <a:r>
+              <a:rPr sz="3200" b="1" i="0">
+                <a:solidFill>
+                  <a:srgbClr val="03306E"/>
+                </a:solidFill>
+                <a:latin typeface="Cambria"/>
+              </a:rPr>
+              <a:t>Check your understanding</a:t>
+            </a:r>
+          </a:p>
+        </p:txBody>
+      </p:sp>
+      <p:sp>
+        <p:nvSpPr>
+          <p:cNvPr id="4" name="TextBox 3"/>
+          <p:cNvSpPr txBox="1"/>
+          <p:nvPr/>
+        </p:nvSpPr>
+        <p:spPr>
+          <a:xfrm>
+            <a:off x="548640" y="6446520"/>
+            <a:ext cx="8229600" cy="274320"/>
+          </a:xfrm>
+          <a:prstGeom prst="rect">
+            <a:avLst/>
+          </a:prstGeom>
+          <a:noFill/>
+        </p:spPr>
+        <p:txBody>
+          <a:bodyPr wrap="square" anchor="t" lIns="0" rIns="0" tIns="0" bIns="0"/>
+          <a:lstStyle/>
+          <a:p>
+            <a:pPr algn="l"/>
+            <a:r>
+              <a:rPr sz="1000" b="0" i="0">
+                <a:solidFill>
+                  <a:srgbClr val="54595D"/>
+                </a:solidFill>
+                <a:latin typeface="Calibri"/>
+              </a:rPr>
+              <a:t>Digital Support and Security T Level  ·  Cyber Law and Ethics</a:t>
+            </a:r>
+          </a:p>
+        </p:txBody>
+      </p:sp>
+      <p:sp>
+        <p:nvSpPr>
+          <p:cNvPr id="5" name="TextBox 4"/>
+          <p:cNvSpPr txBox="1"/>
+          <p:nvPr/>
+        </p:nvSpPr>
+        <p:spPr>
+          <a:xfrm>
+            <a:off x="10728655" y="6446520"/>
+            <a:ext cx="914400" cy="274320"/>
+          </a:xfrm>
+          <a:prstGeom prst="rect">
+            <a:avLst/>
+          </a:prstGeom>
+          <a:noFill/>
+        </p:spPr>
+        <p:txBody>
+          <a:bodyPr wrap="square" anchor="t" lIns="0" rIns="0" tIns="0" bIns="0"/>
+          <a:lstStyle/>
+          <a:p>
+            <a:pPr algn="r"/>
+            <a:r>
+              <a:rPr sz="1000" b="0" i="0">
+                <a:solidFill>
+                  <a:srgbClr val="54595D"/>
+                </a:solidFill>
+                <a:latin typeface="Calibri"/>
+              </a:rPr>
+              <a:t>13</a:t>
+            </a:r>
+          </a:p>
+        </p:txBody>
+      </p:sp>
+      <p:sp>
+        <p:nvSpPr>
+          <p:cNvPr id="6" name="Oval 5"/>
+          <p:cNvSpPr/>
+          <p:nvPr/>
+        </p:nvSpPr>
+        <p:spPr>
+          <a:xfrm>
+            <a:off x="548640" y="1618488"/>
+            <a:ext cx="411480" cy="411480"/>
+          </a:xfrm>
+          <a:prstGeom prst="ellipse">
+            <a:avLst/>
+          </a:prstGeom>
+          <a:solidFill>
+            <a:srgbClr val="E0463A"/>
+          </a:solidFill>
+          <a:ln>
+            <a:noFill/>
+          </a:ln>
+          <a:effectLst/>
+        </p:spPr>
+        <p:style>
+          <a:lnRef idx="1">
+            <a:schemeClr val="accent1"/>
+          </a:lnRef>
+          <a:fillRef idx="3">
+            <a:schemeClr val="accent1"/>
+          </a:fillRef>
+          <a:effectRef idx="2">
+            <a:schemeClr val="accent1"/>
+          </a:effectRef>
+          <a:fontRef idx="minor">
+            <a:schemeClr val="lt1"/>
+          </a:fontRef>
+        </p:style>
+        <p:txBody>
+          <a:bodyPr rtlCol="0" anchor="ctr" lIns="0" rIns="0" tIns="0" bIns="0"/>
+          <a:lstStyle/>
+          <a:p>
+            <a:pPr algn="ctr"/>
+            <a:r>
+              <a:rPr sz="1400" b="1">
+                <a:solidFill>
+                  <a:srgbClr val="FFFFFF"/>
+                </a:solidFill>
+                <a:latin typeface="Calibri"/>
+              </a:rPr>
+              <a:t>1</a:t>
+            </a:r>
+          </a:p>
+        </p:txBody>
+      </p:sp>
+      <p:sp>
+        <p:nvSpPr>
+          <p:cNvPr id="7" name="TextBox 6"/>
+          <p:cNvSpPr txBox="1"/>
+          <p:nvPr/>
+        </p:nvSpPr>
+        <p:spPr>
+          <a:xfrm>
+            <a:off x="1234440" y="1600200"/>
+            <a:ext cx="10408615" cy="1030986"/>
+          </a:xfrm>
+          <a:prstGeom prst="rect">
+            <a:avLst/>
+          </a:prstGeom>
+          <a:noFill/>
+        </p:spPr>
+        <p:txBody>
+          <a:bodyPr wrap="square" anchor="t" lIns="0" rIns="0" tIns="0" bIns="0"/>
+          <a:lstStyle/>
+          <a:p>
+            <a:pPr algn="l"/>
+            <a:r>
+              <a:rPr sz="2200" b="0" i="0">
+                <a:solidFill>
+                  <a:srgbClr val="202122"/>
+                </a:solidFill>
+                <a:latin typeface="Calibri"/>
+              </a:rPr>
+              <a:t>Which Act makes supplying hacking tools an offence?</a:t>
+            </a:r>
+          </a:p>
+        </p:txBody>
+      </p:sp>
+      <p:sp>
+        <p:nvSpPr>
+          <p:cNvPr id="8" name="Oval 7"/>
+          <p:cNvSpPr/>
+          <p:nvPr/>
+        </p:nvSpPr>
+        <p:spPr>
+          <a:xfrm>
+            <a:off x="548640" y="2814066"/>
+            <a:ext cx="411480" cy="411480"/>
+          </a:xfrm>
+          <a:prstGeom prst="ellipse">
+            <a:avLst/>
+          </a:prstGeom>
+          <a:solidFill>
+            <a:srgbClr val="E0463A"/>
+          </a:solidFill>
+          <a:ln>
+            <a:noFill/>
+          </a:ln>
+          <a:effectLst/>
+        </p:spPr>
+        <p:style>
+          <a:lnRef idx="1">
+            <a:schemeClr val="accent1"/>
+          </a:lnRef>
+          <a:fillRef idx="3">
+            <a:schemeClr val="accent1"/>
+          </a:fillRef>
+          <a:effectRef idx="2">
+            <a:schemeClr val="accent1"/>
+          </a:effectRef>
+          <a:fontRef idx="minor">
+            <a:schemeClr val="lt1"/>
+          </a:fontRef>
+        </p:style>
+        <p:txBody>
+          <a:bodyPr rtlCol="0" anchor="ctr" lIns="0" rIns="0" tIns="0" bIns="0"/>
+          <a:lstStyle/>
+          <a:p>
+            <a:pPr algn="ctr"/>
+            <a:r>
+              <a:rPr sz="1400" b="1">
+                <a:solidFill>
+                  <a:srgbClr val="FFFFFF"/>
+                </a:solidFill>
+                <a:latin typeface="Calibri"/>
+              </a:rPr>
+              <a:t>2</a:t>
+            </a:r>
+          </a:p>
+        </p:txBody>
+      </p:sp>
+      <p:sp>
+        <p:nvSpPr>
+          <p:cNvPr id="9" name="TextBox 8"/>
+          <p:cNvSpPr txBox="1"/>
+          <p:nvPr/>
+        </p:nvSpPr>
+        <p:spPr>
+          <a:xfrm>
+            <a:off x="1234440" y="2795778"/>
+            <a:ext cx="10408615" cy="1030986"/>
+          </a:xfrm>
+          <a:prstGeom prst="rect">
+            <a:avLst/>
+          </a:prstGeom>
+          <a:noFill/>
+        </p:spPr>
+        <p:txBody>
+          <a:bodyPr wrap="square" anchor="t" lIns="0" rIns="0" tIns="0" bIns="0"/>
+          <a:lstStyle/>
+          <a:p>
+            <a:pPr algn="l"/>
+            <a:r>
+              <a:rPr sz="2200" b="0" i="0">
+                <a:solidFill>
+                  <a:srgbClr val="202122"/>
+                </a:solidFill>
+                <a:latin typeface="Calibri"/>
+              </a:rPr>
+              <a:t>Which regulations set a security baseline for operators of essential services?</a:t>
+            </a:r>
+          </a:p>
+        </p:txBody>
+      </p:sp>
+      <p:sp>
+        <p:nvSpPr>
+          <p:cNvPr id="10" name="Oval 9"/>
+          <p:cNvSpPr/>
+          <p:nvPr/>
+        </p:nvSpPr>
+        <p:spPr>
+          <a:xfrm>
+            <a:off x="548640" y="4009644"/>
+            <a:ext cx="411480" cy="411480"/>
+          </a:xfrm>
+          <a:prstGeom prst="ellipse">
+            <a:avLst/>
+          </a:prstGeom>
+          <a:solidFill>
+            <a:srgbClr val="E0463A"/>
+          </a:solidFill>
+          <a:ln>
+            <a:noFill/>
+          </a:ln>
+          <a:effectLst/>
+        </p:spPr>
+        <p:style>
+          <a:lnRef idx="1">
+            <a:schemeClr val="accent1"/>
+          </a:lnRef>
+          <a:fillRef idx="3">
+            <a:schemeClr val="accent1"/>
+          </a:fillRef>
+          <a:effectRef idx="2">
+            <a:schemeClr val="accent1"/>
+          </a:effectRef>
+          <a:fontRef idx="minor">
+            <a:schemeClr val="lt1"/>
+          </a:fontRef>
+        </p:style>
+        <p:txBody>
+          <a:bodyPr rtlCol="0" anchor="ctr" lIns="0" rIns="0" tIns="0" bIns="0"/>
+          <a:lstStyle/>
+          <a:p>
+            <a:pPr algn="ctr"/>
+            <a:r>
+              <a:rPr sz="1400" b="1">
+                <a:solidFill>
+                  <a:srgbClr val="FFFFFF"/>
+                </a:solidFill>
+                <a:latin typeface="Calibri"/>
+              </a:rPr>
+              <a:t>3</a:t>
+            </a:r>
+          </a:p>
+        </p:txBody>
+      </p:sp>
+      <p:sp>
+        <p:nvSpPr>
+          <p:cNvPr id="11" name="TextBox 10"/>
+          <p:cNvSpPr txBox="1"/>
+          <p:nvPr/>
+        </p:nvSpPr>
+        <p:spPr>
+          <a:xfrm>
+            <a:off x="1234440" y="3991356"/>
+            <a:ext cx="10408615" cy="1030986"/>
+          </a:xfrm>
+          <a:prstGeom prst="rect">
+            <a:avLst/>
+          </a:prstGeom>
+          <a:noFill/>
+        </p:spPr>
+        <p:txBody>
+          <a:bodyPr wrap="square" anchor="t" lIns="0" rIns="0" tIns="0" bIns="0"/>
+          <a:lstStyle/>
+          <a:p>
+            <a:pPr algn="l"/>
+            <a:r>
+              <a:rPr sz="2200" b="0" i="0">
+                <a:solidFill>
+                  <a:srgbClr val="202122"/>
+                </a:solidFill>
+                <a:latin typeface="Calibri"/>
+              </a:rPr>
+              <a:t>Which Act criminalises intercepting someone else's Wi-Fi traffic?</a:t>
+            </a:r>
+          </a:p>
+        </p:txBody>
+      </p:sp>
+      <p:sp>
+        <p:nvSpPr>
+          <p:cNvPr id="12" name="Oval 11"/>
+          <p:cNvSpPr/>
+          <p:nvPr/>
+        </p:nvSpPr>
+        <p:spPr>
+          <a:xfrm>
+            <a:off x="548640" y="5205221"/>
+            <a:ext cx="411480" cy="411480"/>
+          </a:xfrm>
+          <a:prstGeom prst="ellipse">
+            <a:avLst/>
+          </a:prstGeom>
+          <a:solidFill>
+            <a:srgbClr val="E0463A"/>
+          </a:solidFill>
+          <a:ln>
+            <a:noFill/>
+          </a:ln>
+          <a:effectLst/>
+        </p:spPr>
+        <p:style>
+          <a:lnRef idx="1">
+            <a:schemeClr val="accent1"/>
+          </a:lnRef>
+          <a:fillRef idx="3">
+            <a:schemeClr val="accent1"/>
+          </a:fillRef>
+          <a:effectRef idx="2">
+            <a:schemeClr val="accent1"/>
+          </a:effectRef>
+          <a:fontRef idx="minor">
+            <a:schemeClr val="lt1"/>
+          </a:fontRef>
+        </p:style>
+        <p:txBody>
+          <a:bodyPr rtlCol="0" anchor="ctr" lIns="0" rIns="0" tIns="0" bIns="0"/>
+          <a:lstStyle/>
+          <a:p>
+            <a:pPr algn="ctr"/>
+            <a:r>
+              <a:rPr sz="1400" b="1">
+                <a:solidFill>
+                  <a:srgbClr val="FFFFFF"/>
+                </a:solidFill>
+                <a:latin typeface="Calibri"/>
+              </a:rPr>
+              <a:t>4</a:t>
+            </a:r>
+          </a:p>
+        </p:txBody>
+      </p:sp>
+      <p:sp>
+        <p:nvSpPr>
+          <p:cNvPr id="13" name="TextBox 12"/>
+          <p:cNvSpPr txBox="1"/>
+          <p:nvPr/>
+        </p:nvSpPr>
+        <p:spPr>
+          <a:xfrm>
+            <a:off x="1234440" y="5186933"/>
+            <a:ext cx="10408615" cy="1030986"/>
+          </a:xfrm>
+          <a:prstGeom prst="rect">
+            <a:avLst/>
+          </a:prstGeom>
+          <a:noFill/>
+        </p:spPr>
+        <p:txBody>
+          <a:bodyPr wrap="square" anchor="t" lIns="0" rIns="0" tIns="0" bIns="0"/>
+          <a:lstStyle/>
+          <a:p>
+            <a:pPr algn="l"/>
+            <a:r>
+              <a:rPr sz="2200" b="0" i="0">
+                <a:solidFill>
+                  <a:srgbClr val="202122"/>
+                </a:solidFill>
+                <a:latin typeface="Calibri"/>
+              </a:rPr>
+              <a:t>Name two principles of the UK Cyber Security Council Code of Ethics.</a:t>
+            </a:r>
+          </a:p>
+        </p:txBody>
+      </p:sp>
+    </p:spTree>
+  </p:cSld>
+  <p:clrMapOvr>
+    <a:masterClrMapping/>
+  </p:clrMapOvr>
+</p:sld>
+</file>
+
+<file path=ppt/slides/slide14.xml><?xml version="1.0" encoding="utf-8"?>
+<p:sld xmlns:a="http://schemas.openxmlformats.org/drawingml/2006/main" xmlns:p="http://schemas.openxmlformats.org/presentationml/2006/main" xmlns:r="http://schemas.openxmlformats.org/officeDocument/2006/relationships">
+  <p:cSld>
+    <p:bg>
+      <p:bgPr>
+        <a:solidFill>
+          <a:srgbClr val="FFFFFF"/>
+        </a:solidFill>
+        <a:effectLst/>
+      </p:bgPr>
+    </p:bg>
+    <p:spTree>
+      <p:nvGrpSpPr>
+        <p:cNvPr id="1" name=""/>
+        <p:cNvGrpSpPr/>
+        <p:nvPr/>
+      </p:nvGrpSpPr>
+      <p:grpSpPr/>
+      <p:sp>
+        <p:nvSpPr>
+          <p:cNvPr id="2" name="TextBox 1"/>
+          <p:cNvSpPr txBox="1"/>
+          <p:nvPr/>
+        </p:nvSpPr>
+        <p:spPr>
+          <a:xfrm>
+            <a:off x="548640" y="320040"/>
+            <a:ext cx="11094415" cy="274320"/>
+          </a:xfrm>
+          <a:prstGeom prst="rect">
+            <a:avLst/>
+          </a:prstGeom>
+          <a:noFill/>
+        </p:spPr>
+        <p:txBody>
+          <a:bodyPr wrap="square" anchor="t" lIns="0" rIns="0" tIns="0" bIns="0"/>
+          <a:lstStyle/>
+          <a:p>
+            <a:pPr algn="l"/>
+            <a:r>
+              <a:rPr sz="1100" b="1" i="0">
+                <a:solidFill>
+                  <a:srgbClr val="54595D"/>
+                </a:solidFill>
+                <a:latin typeface="Calibri"/>
+              </a:rPr>
+              <a:t>CYBER SECURITY  ·  Cyber Security Content Area 1</a:t>
+            </a:r>
+          </a:p>
+        </p:txBody>
+      </p:sp>
+      <p:sp>
+        <p:nvSpPr>
+          <p:cNvPr id="3" name="TextBox 2"/>
+          <p:cNvSpPr txBox="1"/>
+          <p:nvPr/>
+        </p:nvSpPr>
+        <p:spPr>
+          <a:xfrm>
+            <a:off x="548640" y="566928"/>
+            <a:ext cx="11094415" cy="822960"/>
+          </a:xfrm>
+          <a:prstGeom prst="rect">
+            <a:avLst/>
+          </a:prstGeom>
+          <a:noFill/>
+        </p:spPr>
+        <p:txBody>
+          <a:bodyPr wrap="square" anchor="ctr" lIns="0" rIns="0" tIns="0" bIns="0"/>
+          <a:lstStyle/>
+          <a:p>
+            <a:pPr algn="l"/>
+            <a:r>
+              <a:rPr sz="3200" b="1" i="0">
+                <a:solidFill>
+                  <a:srgbClr val="03306E"/>
+                </a:solidFill>
+                <a:latin typeface="Cambria"/>
+              </a:rPr>
+              <a:t>Answers</a:t>
+            </a:r>
+          </a:p>
+        </p:txBody>
+      </p:sp>
+      <p:sp>
+        <p:nvSpPr>
+          <p:cNvPr id="4" name="TextBox 3"/>
+          <p:cNvSpPr txBox="1"/>
+          <p:nvPr/>
+        </p:nvSpPr>
+        <p:spPr>
+          <a:xfrm>
+            <a:off x="548640" y="6446520"/>
+            <a:ext cx="8229600" cy="274320"/>
+          </a:xfrm>
+          <a:prstGeom prst="rect">
+            <a:avLst/>
+          </a:prstGeom>
+          <a:noFill/>
+        </p:spPr>
+        <p:txBody>
+          <a:bodyPr wrap="square" anchor="t" lIns="0" rIns="0" tIns="0" bIns="0"/>
+          <a:lstStyle/>
+          <a:p>
+            <a:pPr algn="l"/>
+            <a:r>
+              <a:rPr sz="1000" b="0" i="0">
+                <a:solidFill>
+                  <a:srgbClr val="54595D"/>
+                </a:solidFill>
+                <a:latin typeface="Calibri"/>
+              </a:rPr>
+              <a:t>Digital Support and Security T Level  ·  Cyber Law and Ethics</a:t>
+            </a:r>
+          </a:p>
+        </p:txBody>
+      </p:sp>
+      <p:sp>
+        <p:nvSpPr>
+          <p:cNvPr id="5" name="TextBox 4"/>
+          <p:cNvSpPr txBox="1"/>
+          <p:nvPr/>
+        </p:nvSpPr>
+        <p:spPr>
+          <a:xfrm>
+            <a:off x="10728655" y="6446520"/>
+            <a:ext cx="914400" cy="274320"/>
+          </a:xfrm>
+          <a:prstGeom prst="rect">
+            <a:avLst/>
+          </a:prstGeom>
+          <a:noFill/>
+        </p:spPr>
+        <p:txBody>
+          <a:bodyPr wrap="square" anchor="t" lIns="0" rIns="0" tIns="0" bIns="0"/>
+          <a:lstStyle/>
+          <a:p>
+            <a:pPr algn="r"/>
+            <a:r>
+              <a:rPr sz="1000" b="0" i="0">
+                <a:solidFill>
+                  <a:srgbClr val="54595D"/>
+                </a:solidFill>
+                <a:latin typeface="Calibri"/>
+              </a:rPr>
+              <a:t>14</a:t>
+            </a:r>
+          </a:p>
+        </p:txBody>
+      </p:sp>
+      <p:sp>
+        <p:nvSpPr>
+          <p:cNvPr id="6" name="Oval 5"/>
+          <p:cNvSpPr/>
+          <p:nvPr/>
+        </p:nvSpPr>
+        <p:spPr>
+          <a:xfrm>
+            <a:off x="548640" y="1618488"/>
+            <a:ext cx="411480" cy="411480"/>
+          </a:xfrm>
+          <a:prstGeom prst="ellipse">
+            <a:avLst/>
+          </a:prstGeom>
+          <a:solidFill>
+            <a:srgbClr val="E0463A"/>
+          </a:solidFill>
+          <a:ln>
+            <a:noFill/>
+          </a:ln>
+          <a:effectLst/>
+        </p:spPr>
+        <p:style>
+          <a:lnRef idx="1">
+            <a:schemeClr val="accent1"/>
+          </a:lnRef>
+          <a:fillRef idx="3">
+            <a:schemeClr val="accent1"/>
+          </a:fillRef>
+          <a:effectRef idx="2">
+            <a:schemeClr val="accent1"/>
+          </a:effectRef>
+          <a:fontRef idx="minor">
+            <a:schemeClr val="lt1"/>
+          </a:fontRef>
+        </p:style>
+        <p:txBody>
+          <a:bodyPr rtlCol="0" anchor="ctr" lIns="0" rIns="0" tIns="0" bIns="0"/>
+          <a:lstStyle/>
+          <a:p>
+            <a:pPr algn="ctr"/>
+            <a:r>
+              <a:rPr sz="1400" b="1">
+                <a:solidFill>
+                  <a:srgbClr val="FFFFFF"/>
+                </a:solidFill>
+                <a:latin typeface="Calibri"/>
+              </a:rPr>
+              <a:t>1</a:t>
+            </a:r>
+          </a:p>
+        </p:txBody>
+      </p:sp>
+      <p:sp>
+        <p:nvSpPr>
+          <p:cNvPr id="7" name="TextBox 6"/>
+          <p:cNvSpPr txBox="1"/>
+          <p:nvPr/>
+        </p:nvSpPr>
+        <p:spPr>
+          <a:xfrm>
+            <a:off x="1234440" y="1600200"/>
+            <a:ext cx="10408615" cy="1030986"/>
+          </a:xfrm>
+          <a:prstGeom prst="rect">
+            <a:avLst/>
+          </a:prstGeom>
+          <a:noFill/>
+        </p:spPr>
+        <p:txBody>
+          <a:bodyPr wrap="square" anchor="t" lIns="0" rIns="0" tIns="0" bIns="0"/>
+          <a:lstStyle/>
+          <a:p>
+            <a:pPr algn="l"/>
+            <a:r>
+              <a:rPr sz="1800" b="0" i="0">
+                <a:solidFill>
+                  <a:srgbClr val="54595D"/>
+                </a:solidFill>
+                <a:latin typeface="Calibri"/>
+              </a:rPr>
+              <a:t>Which Act makes supplying hacking tools an offence?</a:t>
+            </a:r>
+          </a:p>
+          <a:p>
+            <a:r>
+              <a:rPr sz="1800" b="1">
+                <a:solidFill>
+                  <a:srgbClr val="03306E"/>
+                </a:solidFill>
+                <a:latin typeface="Calibri"/>
+              </a:rPr>
+              <a:t>The Computer Misuse Act 1990.</a:t>
+            </a:r>
+          </a:p>
+        </p:txBody>
+      </p:sp>
+      <p:sp>
+        <p:nvSpPr>
+          <p:cNvPr id="8" name="Oval 7"/>
+          <p:cNvSpPr/>
+          <p:nvPr/>
+        </p:nvSpPr>
+        <p:spPr>
+          <a:xfrm>
+            <a:off x="548640" y="2814066"/>
+            <a:ext cx="411480" cy="411480"/>
+          </a:xfrm>
+          <a:prstGeom prst="ellipse">
+            <a:avLst/>
+          </a:prstGeom>
+          <a:solidFill>
+            <a:srgbClr val="E0463A"/>
+          </a:solidFill>
+          <a:ln>
+            <a:noFill/>
+          </a:ln>
+          <a:effectLst/>
+        </p:spPr>
+        <p:style>
+          <a:lnRef idx="1">
+            <a:schemeClr val="accent1"/>
+          </a:lnRef>
+          <a:fillRef idx="3">
+            <a:schemeClr val="accent1"/>
+          </a:fillRef>
+          <a:effectRef idx="2">
+            <a:schemeClr val="accent1"/>
+          </a:effectRef>
+          <a:fontRef idx="minor">
+            <a:schemeClr val="lt1"/>
+          </a:fontRef>
+        </p:style>
+        <p:txBody>
+          <a:bodyPr rtlCol="0" anchor="ctr" lIns="0" rIns="0" tIns="0" bIns="0"/>
+          <a:lstStyle/>
+          <a:p>
+            <a:pPr algn="ctr"/>
+            <a:r>
+              <a:rPr sz="1400" b="1">
+                <a:solidFill>
+                  <a:srgbClr val="FFFFFF"/>
+                </a:solidFill>
+                <a:latin typeface="Calibri"/>
+              </a:rPr>
+              <a:t>2</a:t>
+            </a:r>
+          </a:p>
+        </p:txBody>
+      </p:sp>
+      <p:sp>
+        <p:nvSpPr>
+          <p:cNvPr id="9" name="TextBox 8"/>
+          <p:cNvSpPr txBox="1"/>
+          <p:nvPr/>
+        </p:nvSpPr>
+        <p:spPr>
+          <a:xfrm>
+            <a:off x="1234440" y="2795778"/>
+            <a:ext cx="10408615" cy="1030986"/>
+          </a:xfrm>
+          <a:prstGeom prst="rect">
+            <a:avLst/>
+          </a:prstGeom>
+          <a:noFill/>
+        </p:spPr>
+        <p:txBody>
+          <a:bodyPr wrap="square" anchor="t" lIns="0" rIns="0" tIns="0" bIns="0"/>
+          <a:lstStyle/>
+          <a:p>
+            <a:pPr algn="l"/>
+            <a:r>
+              <a:rPr sz="1800" b="0" i="0">
+                <a:solidFill>
+                  <a:srgbClr val="54595D"/>
+                </a:solidFill>
+                <a:latin typeface="Calibri"/>
+              </a:rPr>
+              <a:t>Which regulations set a security baseline for operators of essential services?</a:t>
+            </a:r>
+          </a:p>
+          <a:p>
+            <a:r>
+              <a:rPr sz="1800" b="1">
+                <a:solidFill>
+                  <a:srgbClr val="03306E"/>
+                </a:solidFill>
+                <a:latin typeface="Calibri"/>
+              </a:rPr>
+              <a:t>The Network and Information Systems (NIS) Regulations 2018.</a:t>
+            </a:r>
+          </a:p>
+        </p:txBody>
+      </p:sp>
+      <p:sp>
+        <p:nvSpPr>
+          <p:cNvPr id="10" name="Oval 9"/>
+          <p:cNvSpPr/>
+          <p:nvPr/>
+        </p:nvSpPr>
+        <p:spPr>
+          <a:xfrm>
+            <a:off x="548640" y="4009644"/>
+            <a:ext cx="411480" cy="411480"/>
+          </a:xfrm>
+          <a:prstGeom prst="ellipse">
+            <a:avLst/>
+          </a:prstGeom>
+          <a:solidFill>
+            <a:srgbClr val="E0463A"/>
+          </a:solidFill>
+          <a:ln>
+            <a:noFill/>
+          </a:ln>
+          <a:effectLst/>
+        </p:spPr>
+        <p:style>
+          <a:lnRef idx="1">
+            <a:schemeClr val="accent1"/>
+          </a:lnRef>
+          <a:fillRef idx="3">
+            <a:schemeClr val="accent1"/>
+          </a:fillRef>
+          <a:effectRef idx="2">
+            <a:schemeClr val="accent1"/>
+          </a:effectRef>
+          <a:fontRef idx="minor">
+            <a:schemeClr val="lt1"/>
+          </a:fontRef>
+        </p:style>
+        <p:txBody>
+          <a:bodyPr rtlCol="0" anchor="ctr" lIns="0" rIns="0" tIns="0" bIns="0"/>
+          <a:lstStyle/>
+          <a:p>
+            <a:pPr algn="ctr"/>
+            <a:r>
+              <a:rPr sz="1400" b="1">
+                <a:solidFill>
+                  <a:srgbClr val="FFFFFF"/>
+                </a:solidFill>
+                <a:latin typeface="Calibri"/>
+              </a:rPr>
+              <a:t>3</a:t>
+            </a:r>
+          </a:p>
+        </p:txBody>
+      </p:sp>
+      <p:sp>
+        <p:nvSpPr>
+          <p:cNvPr id="11" name="TextBox 10"/>
+          <p:cNvSpPr txBox="1"/>
+          <p:nvPr/>
+        </p:nvSpPr>
+        <p:spPr>
+          <a:xfrm>
+            <a:off x="1234440" y="3991356"/>
+            <a:ext cx="10408615" cy="1030986"/>
+          </a:xfrm>
+          <a:prstGeom prst="rect">
+            <a:avLst/>
+          </a:prstGeom>
+          <a:noFill/>
+        </p:spPr>
+        <p:txBody>
+          <a:bodyPr wrap="square" anchor="t" lIns="0" rIns="0" tIns="0" bIns="0"/>
+          <a:lstStyle/>
+          <a:p>
+            <a:pPr algn="l"/>
+            <a:r>
+              <a:rPr sz="1800" b="0" i="0">
+                <a:solidFill>
+                  <a:srgbClr val="54595D"/>
+                </a:solidFill>
+                <a:latin typeface="Calibri"/>
+              </a:rPr>
+              <a:t>Which Act criminalises intercepting someone else's Wi-Fi traffic?</a:t>
+            </a:r>
+          </a:p>
+          <a:p>
+            <a:r>
+              <a:rPr sz="1800" b="1">
+                <a:solidFill>
+                  <a:srgbClr val="03306E"/>
+                </a:solidFill>
+                <a:latin typeface="Calibri"/>
+              </a:rPr>
+              <a:t>The Wireless Telegraphy Act 2006.</a:t>
+            </a:r>
+          </a:p>
+        </p:txBody>
+      </p:sp>
+      <p:sp>
+        <p:nvSpPr>
+          <p:cNvPr id="12" name="Oval 11"/>
+          <p:cNvSpPr/>
+          <p:nvPr/>
+        </p:nvSpPr>
+        <p:spPr>
+          <a:xfrm>
+            <a:off x="548640" y="5205221"/>
+            <a:ext cx="411480" cy="411480"/>
+          </a:xfrm>
+          <a:prstGeom prst="ellipse">
+            <a:avLst/>
+          </a:prstGeom>
+          <a:solidFill>
+            <a:srgbClr val="E0463A"/>
+          </a:solidFill>
+          <a:ln>
+            <a:noFill/>
+          </a:ln>
+          <a:effectLst/>
+        </p:spPr>
+        <p:style>
+          <a:lnRef idx="1">
+            <a:schemeClr val="accent1"/>
+          </a:lnRef>
+          <a:fillRef idx="3">
+            <a:schemeClr val="accent1"/>
+          </a:fillRef>
+          <a:effectRef idx="2">
+            <a:schemeClr val="accent1"/>
+          </a:effectRef>
+          <a:fontRef idx="minor">
+            <a:schemeClr val="lt1"/>
+          </a:fontRef>
+        </p:style>
+        <p:txBody>
+          <a:bodyPr rtlCol="0" anchor="ctr" lIns="0" rIns="0" tIns="0" bIns="0"/>
+          <a:lstStyle/>
+          <a:p>
+            <a:pPr algn="ctr"/>
+            <a:r>
+              <a:rPr sz="1400" b="1">
+                <a:solidFill>
+                  <a:srgbClr val="FFFFFF"/>
+                </a:solidFill>
+                <a:latin typeface="Calibri"/>
+              </a:rPr>
+              <a:t>4</a:t>
+            </a:r>
+          </a:p>
+        </p:txBody>
+      </p:sp>
+      <p:sp>
+        <p:nvSpPr>
+          <p:cNvPr id="13" name="TextBox 12"/>
+          <p:cNvSpPr txBox="1"/>
+          <p:nvPr/>
+        </p:nvSpPr>
+        <p:spPr>
+          <a:xfrm>
+            <a:off x="1234440" y="5186933"/>
+            <a:ext cx="10408615" cy="1030986"/>
+          </a:xfrm>
+          <a:prstGeom prst="rect">
+            <a:avLst/>
+          </a:prstGeom>
+          <a:noFill/>
+        </p:spPr>
+        <p:txBody>
+          <a:bodyPr wrap="square" anchor="t" lIns="0" rIns="0" tIns="0" bIns="0"/>
+          <a:lstStyle/>
+          <a:p>
+            <a:pPr algn="l"/>
+            <a:r>
+              <a:rPr sz="1800" b="0" i="0">
+                <a:solidFill>
+                  <a:srgbClr val="54595D"/>
+                </a:solidFill>
+                <a:latin typeface="Calibri"/>
+              </a:rPr>
+              <a:t>Name two principles of the UK Cyber Security Council Code of Ethics.</a:t>
+            </a:r>
+          </a:p>
+          <a:p>
+            <a:r>
+              <a:rPr sz="1800" b="1">
+                <a:solidFill>
+                  <a:srgbClr val="03306E"/>
+                </a:solidFill>
+                <a:latin typeface="Calibri"/>
+              </a:rPr>
+              <a:t>Any two of: credibility, integrity, professionalism, responsibility and respect.</a:t>
+            </a:r>
+          </a:p>
+        </p:txBody>
+      </p:sp>
+    </p:spTree>
+  </p:cSld>
+  <p:clrMapOvr>
+    <a:masterClrMapping/>
+  </p:clrMapOvr>
+</p:sld>
+</file>
+
+<file path=ppt/slides/slide15.xml><?xml version="1.0" encoding="utf-8"?>
+<p:sld xmlns:a="http://schemas.openxmlformats.org/drawingml/2006/main" xmlns:p="http://schemas.openxmlformats.org/presentationml/2006/main" xmlns:r="http://schemas.openxmlformats.org/officeDocument/2006/relationships">
+  <p:cSld>
+    <p:bg>
+      <p:bgPr>
+        <a:solidFill>
+          <a:srgbClr val="FFFFFF"/>
+        </a:solidFill>
+        <a:effectLst/>
+      </p:bgPr>
+    </p:bg>
+    <p:spTree>
+      <p:nvGrpSpPr>
+        <p:cNvPr id="1" name=""/>
+        <p:cNvGrpSpPr/>
+        <p:nvPr/>
+      </p:nvGrpSpPr>
+      <p:grpSpPr/>
+      <p:sp>
+        <p:nvSpPr>
+          <p:cNvPr id="2" name="TextBox 1"/>
+          <p:cNvSpPr txBox="1"/>
+          <p:nvPr/>
+        </p:nvSpPr>
+        <p:spPr>
+          <a:xfrm>
+            <a:off x="548640" y="320040"/>
+            <a:ext cx="11094415" cy="274320"/>
+          </a:xfrm>
+          <a:prstGeom prst="rect">
+            <a:avLst/>
+          </a:prstGeom>
+          <a:noFill/>
+        </p:spPr>
+        <p:txBody>
+          <a:bodyPr wrap="square" anchor="t" lIns="0" rIns="0" tIns="0" bIns="0"/>
+          <a:lstStyle/>
+          <a:p>
+            <a:pPr algn="l"/>
+            <a:r>
+              <a:rPr sz="1100" b="1" i="0">
+                <a:solidFill>
+                  <a:srgbClr val="54595D"/>
+                </a:solidFill>
+                <a:latin typeface="Calibri"/>
+              </a:rPr>
+              <a:t>CYBER SECURITY  ·  Cyber Security Content Area 1</a:t>
+            </a:r>
+          </a:p>
+        </p:txBody>
+      </p:sp>
+      <p:sp>
+        <p:nvSpPr>
+          <p:cNvPr id="3" name="TextBox 2"/>
+          <p:cNvSpPr txBox="1"/>
+          <p:nvPr/>
+        </p:nvSpPr>
+        <p:spPr>
+          <a:xfrm>
+            <a:off x="548640" y="566928"/>
+            <a:ext cx="11094415" cy="822960"/>
+          </a:xfrm>
+          <a:prstGeom prst="rect">
+            <a:avLst/>
+          </a:prstGeom>
+          <a:noFill/>
+        </p:spPr>
+        <p:txBody>
+          <a:bodyPr wrap="square" anchor="ctr" lIns="0" rIns="0" tIns="0" bIns="0"/>
+          <a:lstStyle/>
+          <a:p>
+            <a:pPr algn="l"/>
+            <a:r>
+              <a:rPr sz="3200" b="1" i="0">
+                <a:solidFill>
+                  <a:srgbClr val="03306E"/>
+                </a:solidFill>
+                <a:latin typeface="Cambria"/>
+              </a:rPr>
+              <a:t>Activity: Ethics dilemmas</a:t>
+            </a:r>
+          </a:p>
+        </p:txBody>
+      </p:sp>
+      <p:sp>
+        <p:nvSpPr>
+          <p:cNvPr id="4" name="TextBox 3"/>
+          <p:cNvSpPr txBox="1"/>
+          <p:nvPr/>
+        </p:nvSpPr>
+        <p:spPr>
+          <a:xfrm>
+            <a:off x="548640" y="6446520"/>
+            <a:ext cx="8229600" cy="274320"/>
+          </a:xfrm>
+          <a:prstGeom prst="rect">
+            <a:avLst/>
+          </a:prstGeom>
+          <a:noFill/>
+        </p:spPr>
+        <p:txBody>
+          <a:bodyPr wrap="square" anchor="t" lIns="0" rIns="0" tIns="0" bIns="0"/>
+          <a:lstStyle/>
+          <a:p>
+            <a:pPr algn="l"/>
+            <a:r>
+              <a:rPr sz="1000" b="0" i="0">
+                <a:solidFill>
+                  <a:srgbClr val="54595D"/>
+                </a:solidFill>
+                <a:latin typeface="Calibri"/>
+              </a:rPr>
+              <a:t>Digital Support and Security T Level  ·  Cyber Law and Ethics</a:t>
+            </a:r>
+          </a:p>
+        </p:txBody>
+      </p:sp>
+      <p:sp>
+        <p:nvSpPr>
+          <p:cNvPr id="5" name="TextBox 4"/>
+          <p:cNvSpPr txBox="1"/>
+          <p:nvPr/>
+        </p:nvSpPr>
+        <p:spPr>
+          <a:xfrm>
+            <a:off x="10728655" y="6446520"/>
+            <a:ext cx="914400" cy="274320"/>
+          </a:xfrm>
+          <a:prstGeom prst="rect">
+            <a:avLst/>
+          </a:prstGeom>
+          <a:noFill/>
+        </p:spPr>
+        <p:txBody>
+          <a:bodyPr wrap="square" anchor="t" lIns="0" rIns="0" tIns="0" bIns="0"/>
+          <a:lstStyle/>
+          <a:p>
+            <a:pPr algn="r"/>
+            <a:r>
+              <a:rPr sz="1000" b="0" i="0">
+                <a:solidFill>
+                  <a:srgbClr val="54595D"/>
+                </a:solidFill>
+                <a:latin typeface="Calibri"/>
+              </a:rPr>
+              <a:t>15</a:t>
+            </a:r>
+          </a:p>
+        </p:txBody>
+      </p:sp>
+      <p:sp>
+        <p:nvSpPr>
+          <p:cNvPr id="6" name="Rounded Rectangle 5"/>
+          <p:cNvSpPr/>
+          <p:nvPr/>
+        </p:nvSpPr>
+        <p:spPr>
+          <a:xfrm>
+            <a:off x="548640" y="1508760"/>
+            <a:ext cx="2011680" cy="457200"/>
+          </a:xfrm>
+          <a:prstGeom prst="roundRect">
+            <a:avLst>
+              <a:gd name="adj" fmla="val 50000"/>
+            </a:avLst>
+          </a:prstGeom>
+          <a:solidFill>
+            <a:srgbClr val="E0463A"/>
+          </a:solidFill>
+          <a:ln>
+            <a:noFill/>
+          </a:ln>
+          <a:effectLst/>
+        </p:spPr>
+        <p:style>
+          <a:lnRef idx="1">
+            <a:schemeClr val="accent1"/>
+          </a:lnRef>
+          <a:fillRef idx="3">
+            <a:schemeClr val="accent1"/>
+          </a:fillRef>
+          <a:effectRef idx="2">
+            <a:schemeClr val="accent1"/>
+          </a:effectRef>
+          <a:fontRef idx="minor">
+            <a:schemeClr val="lt1"/>
+          </a:fontRef>
+        </p:style>
+        <p:txBody>
+          <a:bodyPr rtlCol="0" anchor="ctr"/>
+          <a:lstStyle/>
+          <a:p/>
+        </p:txBody>
+      </p:sp>
+      <p:sp>
+        <p:nvSpPr>
+          <p:cNvPr id="7" name="TextBox 6"/>
+          <p:cNvSpPr txBox="1"/>
+          <p:nvPr/>
+        </p:nvSpPr>
+        <p:spPr>
+          <a:xfrm>
+            <a:off x="548640" y="1508760"/>
+            <a:ext cx="2011680" cy="457200"/>
+          </a:xfrm>
+          <a:prstGeom prst="rect">
+            <a:avLst/>
+          </a:prstGeom>
+          <a:noFill/>
+        </p:spPr>
+        <p:txBody>
+          <a:bodyPr wrap="square" anchor="ctr" lIns="0" rIns="0" tIns="0" bIns="0"/>
+          <a:lstStyle/>
+          <a:p>
+            <a:pPr algn="ctr"/>
+            <a:r>
+              <a:rPr sz="1400" b="1" i="0">
+                <a:solidFill>
+                  <a:srgbClr val="FFFFFF"/>
+                </a:solidFill>
+                <a:latin typeface="Calibri"/>
+              </a:rPr>
+              <a:t>20 minutes</a:t>
+            </a:r>
+          </a:p>
+        </p:txBody>
+      </p:sp>
+      <p:sp>
+        <p:nvSpPr>
+          <p:cNvPr id="8" name="TextBox 7"/>
+          <p:cNvSpPr txBox="1"/>
+          <p:nvPr/>
+        </p:nvSpPr>
+        <p:spPr>
+          <a:xfrm>
+            <a:off x="2743200" y="1508760"/>
+            <a:ext cx="4754880" cy="457200"/>
+          </a:xfrm>
+          <a:prstGeom prst="rect">
+            <a:avLst/>
+          </a:prstGeom>
+          <a:noFill/>
+        </p:spPr>
+        <p:txBody>
+          <a:bodyPr wrap="square" anchor="ctr" lIns="0" rIns="0" tIns="0" bIns="0"/>
+          <a:lstStyle/>
+          <a:p>
+            <a:pPr algn="l"/>
+            <a:r>
+              <a:rPr sz="1400" b="0" i="1">
+                <a:solidFill>
+                  <a:srgbClr val="54595D"/>
+                </a:solidFill>
+                <a:latin typeface="Calibri"/>
+              </a:rPr>
+              <a:t>Small groups</a:t>
+            </a:r>
+          </a:p>
+        </p:txBody>
+      </p:sp>
+      <p:sp>
+        <p:nvSpPr>
+          <p:cNvPr id="9" name="Oval 8"/>
+          <p:cNvSpPr/>
+          <p:nvPr/>
+        </p:nvSpPr>
+        <p:spPr>
+          <a:xfrm>
+            <a:off x="548640" y="2482596"/>
+            <a:ext cx="384048" cy="384048"/>
+          </a:xfrm>
+          <a:prstGeom prst="ellipse">
+            <a:avLst/>
+          </a:prstGeom>
+          <a:solidFill>
+            <a:srgbClr val="0645AD"/>
+          </a:solidFill>
+          <a:ln>
+            <a:noFill/>
+          </a:ln>
+          <a:effectLst/>
+        </p:spPr>
+        <p:style>
+          <a:lnRef idx="1">
+            <a:schemeClr val="accent1"/>
+          </a:lnRef>
+          <a:fillRef idx="3">
+            <a:schemeClr val="accent1"/>
+          </a:fillRef>
+          <a:effectRef idx="2">
+            <a:schemeClr val="accent1"/>
+          </a:effectRef>
+          <a:fontRef idx="minor">
+            <a:schemeClr val="lt1"/>
+          </a:fontRef>
+        </p:style>
+        <p:txBody>
+          <a:bodyPr rtlCol="0" anchor="ctr" lIns="0" rIns="0" tIns="0" bIns="0"/>
+          <a:lstStyle/>
+          <a:p>
+            <a:pPr algn="ctr"/>
+            <a:r>
+              <a:rPr sz="1300" b="1">
+                <a:solidFill>
+                  <a:srgbClr val="FFFFFF"/>
+                </a:solidFill>
+                <a:latin typeface="Calibri"/>
+              </a:rPr>
+              <a:t>1</a:t>
+            </a:r>
+          </a:p>
+        </p:txBody>
+      </p:sp>
+      <p:sp>
+        <p:nvSpPr>
+          <p:cNvPr id="10" name="TextBox 9"/>
+          <p:cNvSpPr txBox="1"/>
+          <p:nvPr/>
+        </p:nvSpPr>
+        <p:spPr>
+          <a:xfrm>
+            <a:off x="1143000" y="2240280"/>
+            <a:ext cx="5943600" cy="868680"/>
+          </a:xfrm>
+          <a:prstGeom prst="rect">
+            <a:avLst/>
+          </a:prstGeom>
+          <a:noFill/>
+        </p:spPr>
+        <p:txBody>
+          <a:bodyPr wrap="square" anchor="ctr" lIns="0" rIns="0" tIns="0" bIns="0"/>
+          <a:lstStyle/>
+          <a:p>
+            <a:pPr algn="l"/>
+            <a:r>
+              <a:rPr sz="1700" b="0" i="0">
+                <a:solidFill>
+                  <a:srgbClr val="202122"/>
+                </a:solidFill>
+                <a:latin typeface="Calibri"/>
+              </a:rPr>
+              <a:t>Discuss the starter dilemma and three more from your teacher.</a:t>
+            </a:r>
+          </a:p>
+        </p:txBody>
+      </p:sp>
+      <p:sp>
+        <p:nvSpPr>
+          <p:cNvPr id="11" name="Oval 10"/>
+          <p:cNvSpPr/>
+          <p:nvPr/>
+        </p:nvSpPr>
+        <p:spPr>
+          <a:xfrm>
+            <a:off x="548640" y="3461004"/>
+            <a:ext cx="384048" cy="384048"/>
+          </a:xfrm>
+          <a:prstGeom prst="ellipse">
+            <a:avLst/>
+          </a:prstGeom>
+          <a:solidFill>
+            <a:srgbClr val="0645AD"/>
+          </a:solidFill>
+          <a:ln>
+            <a:noFill/>
+          </a:ln>
+          <a:effectLst/>
+        </p:spPr>
+        <p:style>
+          <a:lnRef idx="1">
+            <a:schemeClr val="accent1"/>
+          </a:lnRef>
+          <a:fillRef idx="3">
+            <a:schemeClr val="accent1"/>
+          </a:fillRef>
+          <a:effectRef idx="2">
+            <a:schemeClr val="accent1"/>
+          </a:effectRef>
+          <a:fontRef idx="minor">
+            <a:schemeClr val="lt1"/>
+          </a:fontRef>
+        </p:style>
+        <p:txBody>
+          <a:bodyPr rtlCol="0" anchor="ctr" lIns="0" rIns="0" tIns="0" bIns="0"/>
+          <a:lstStyle/>
+          <a:p>
+            <a:pPr algn="ctr"/>
+            <a:r>
+              <a:rPr sz="1300" b="1">
+                <a:solidFill>
+                  <a:srgbClr val="FFFFFF"/>
+                </a:solidFill>
+                <a:latin typeface="Calibri"/>
+              </a:rPr>
+              <a:t>2</a:t>
+            </a:r>
+          </a:p>
+        </p:txBody>
+      </p:sp>
+      <p:sp>
+        <p:nvSpPr>
+          <p:cNvPr id="12" name="TextBox 11"/>
+          <p:cNvSpPr txBox="1"/>
+          <p:nvPr/>
+        </p:nvSpPr>
+        <p:spPr>
+          <a:xfrm>
+            <a:off x="1143000" y="3218688"/>
+            <a:ext cx="5943600" cy="868680"/>
+          </a:xfrm>
+          <a:prstGeom prst="rect">
+            <a:avLst/>
+          </a:prstGeom>
+          <a:noFill/>
+        </p:spPr>
+        <p:txBody>
+          <a:bodyPr wrap="square" anchor="ctr" lIns="0" rIns="0" tIns="0" bIns="0"/>
+          <a:lstStyle/>
+          <a:p>
+            <a:pPr algn="l"/>
+            <a:r>
+              <a:rPr sz="1700" b="0" i="0">
+                <a:solidFill>
+                  <a:srgbClr val="202122"/>
+                </a:solidFill>
+                <a:latin typeface="Calibri"/>
+              </a:rPr>
+              <a:t>For each, name any law that would be broken.</a:t>
+            </a:r>
+          </a:p>
+        </p:txBody>
+      </p:sp>
+      <p:sp>
+        <p:nvSpPr>
+          <p:cNvPr id="13" name="Oval 12"/>
+          <p:cNvSpPr/>
+          <p:nvPr/>
+        </p:nvSpPr>
+        <p:spPr>
+          <a:xfrm>
+            <a:off x="548640" y="4439412"/>
+            <a:ext cx="384048" cy="384048"/>
+          </a:xfrm>
+          <a:prstGeom prst="ellipse">
+            <a:avLst/>
+          </a:prstGeom>
+          <a:solidFill>
+            <a:srgbClr val="0645AD"/>
+          </a:solidFill>
+          <a:ln>
+            <a:noFill/>
+          </a:ln>
+          <a:effectLst/>
+        </p:spPr>
+        <p:style>
+          <a:lnRef idx="1">
+            <a:schemeClr val="accent1"/>
+          </a:lnRef>
+          <a:fillRef idx="3">
+            <a:schemeClr val="accent1"/>
+          </a:fillRef>
+          <a:effectRef idx="2">
+            <a:schemeClr val="accent1"/>
+          </a:effectRef>
+          <a:fontRef idx="minor">
+            <a:schemeClr val="lt1"/>
+          </a:fontRef>
+        </p:style>
+        <p:txBody>
+          <a:bodyPr rtlCol="0" anchor="ctr" lIns="0" rIns="0" tIns="0" bIns="0"/>
+          <a:lstStyle/>
+          <a:p>
+            <a:pPr algn="ctr"/>
+            <a:r>
+              <a:rPr sz="1300" b="1">
+                <a:solidFill>
+                  <a:srgbClr val="FFFFFF"/>
+                </a:solidFill>
+                <a:latin typeface="Calibri"/>
+              </a:rPr>
+              <a:t>3</a:t>
+            </a:r>
+          </a:p>
+        </p:txBody>
+      </p:sp>
+      <p:sp>
+        <p:nvSpPr>
+          <p:cNvPr id="14" name="TextBox 13"/>
+          <p:cNvSpPr txBox="1"/>
+          <p:nvPr/>
+        </p:nvSpPr>
+        <p:spPr>
+          <a:xfrm>
+            <a:off x="1143000" y="4197096"/>
+            <a:ext cx="5943600" cy="868680"/>
+          </a:xfrm>
+          <a:prstGeom prst="rect">
+            <a:avLst/>
+          </a:prstGeom>
+          <a:noFill/>
+        </p:spPr>
+        <p:txBody>
+          <a:bodyPr wrap="square" anchor="ctr" lIns="0" rIns="0" tIns="0" bIns="0"/>
+          <a:lstStyle/>
+          <a:p>
+            <a:pPr algn="l"/>
+            <a:r>
+              <a:rPr sz="1700" b="0" i="0">
+                <a:solidFill>
+                  <a:srgbClr val="202122"/>
+                </a:solidFill>
+                <a:latin typeface="Calibri"/>
+              </a:rPr>
+              <a:t>Name the ethical principle that guides the right action.</a:t>
+            </a:r>
+          </a:p>
+        </p:txBody>
+      </p:sp>
+      <p:sp>
+        <p:nvSpPr>
+          <p:cNvPr id="15" name="Oval 14"/>
+          <p:cNvSpPr/>
+          <p:nvPr/>
+        </p:nvSpPr>
+        <p:spPr>
+          <a:xfrm>
+            <a:off x="548640" y="5417820"/>
+            <a:ext cx="384048" cy="384048"/>
+          </a:xfrm>
+          <a:prstGeom prst="ellipse">
+            <a:avLst/>
+          </a:prstGeom>
+          <a:solidFill>
+            <a:srgbClr val="0645AD"/>
+          </a:solidFill>
+          <a:ln>
+            <a:noFill/>
+          </a:ln>
+          <a:effectLst/>
+        </p:spPr>
+        <p:style>
+          <a:lnRef idx="1">
+            <a:schemeClr val="accent1"/>
+          </a:lnRef>
+          <a:fillRef idx="3">
+            <a:schemeClr val="accent1"/>
+          </a:fillRef>
+          <a:effectRef idx="2">
+            <a:schemeClr val="accent1"/>
+          </a:effectRef>
+          <a:fontRef idx="minor">
+            <a:schemeClr val="lt1"/>
+          </a:fontRef>
+        </p:style>
+        <p:txBody>
+          <a:bodyPr rtlCol="0" anchor="ctr" lIns="0" rIns="0" tIns="0" bIns="0"/>
+          <a:lstStyle/>
+          <a:p>
+            <a:pPr algn="ctr"/>
+            <a:r>
+              <a:rPr sz="1300" b="1">
+                <a:solidFill>
+                  <a:srgbClr val="FFFFFF"/>
+                </a:solidFill>
+                <a:latin typeface="Calibri"/>
+              </a:rPr>
+              <a:t>4</a:t>
+            </a:r>
+          </a:p>
+        </p:txBody>
+      </p:sp>
+      <p:sp>
+        <p:nvSpPr>
+          <p:cNvPr id="16" name="TextBox 15"/>
+          <p:cNvSpPr txBox="1"/>
+          <p:nvPr/>
+        </p:nvSpPr>
+        <p:spPr>
+          <a:xfrm>
+            <a:off x="1143000" y="5175504"/>
+            <a:ext cx="5943600" cy="868680"/>
+          </a:xfrm>
+          <a:prstGeom prst="rect">
+            <a:avLst/>
+          </a:prstGeom>
+          <a:noFill/>
+        </p:spPr>
+        <p:txBody>
+          <a:bodyPr wrap="square" anchor="ctr" lIns="0" rIns="0" tIns="0" bIns="0"/>
+          <a:lstStyle/>
+          <a:p>
+            <a:pPr algn="l"/>
+            <a:r>
+              <a:rPr sz="1700" b="0" i="0">
+                <a:solidFill>
+                  <a:srgbClr val="202122"/>
+                </a:solidFill>
+                <a:latin typeface="Calibri"/>
+              </a:rPr>
+              <a:t>Agree what a professional would actually do.</a:t>
+            </a:r>
+          </a:p>
+        </p:txBody>
+      </p:sp>
+      <p:sp>
+        <p:nvSpPr>
+          <p:cNvPr id="17" name="Rounded Rectangle 16"/>
+          <p:cNvSpPr/>
+          <p:nvPr/>
+        </p:nvSpPr>
+        <p:spPr>
+          <a:xfrm>
+            <a:off x="7772400" y="1508760"/>
+            <a:ext cx="3867912" cy="4572000"/>
+          </a:xfrm>
+          <a:prstGeom prst="roundRect">
+            <a:avLst>
+              <a:gd name="adj" fmla="val 8000"/>
+            </a:avLst>
+          </a:prstGeom>
+          <a:solidFill>
+            <a:srgbClr val="EAF3FF"/>
+          </a:solidFill>
+          <a:ln>
+            <a:noFill/>
+          </a:ln>
+          <a:effectLst/>
+        </p:spPr>
+        <p:style>
+          <a:lnRef idx="1">
+            <a:schemeClr val="accent1"/>
+          </a:lnRef>
+          <a:fillRef idx="3">
+            <a:schemeClr val="accent1"/>
+          </a:fillRef>
+          <a:effectRef idx="2">
+            <a:schemeClr val="accent1"/>
+          </a:effectRef>
+          <a:fontRef idx="minor">
+            <a:schemeClr val="lt1"/>
+          </a:fontRef>
+        </p:style>
+        <p:txBody>
+          <a:bodyPr rtlCol="0" anchor="ctr"/>
+          <a:lstStyle/>
+          <a:p/>
+        </p:txBody>
+      </p:sp>
+      <p:sp>
+        <p:nvSpPr>
+          <p:cNvPr id="18" name="TextBox 17"/>
+          <p:cNvSpPr txBox="1"/>
+          <p:nvPr/>
+        </p:nvSpPr>
+        <p:spPr>
+          <a:xfrm>
+            <a:off x="8046720" y="1737360"/>
+            <a:ext cx="3291840" cy="365760"/>
+          </a:xfrm>
+          <a:prstGeom prst="rect">
+            <a:avLst/>
+          </a:prstGeom>
+          <a:noFill/>
+        </p:spPr>
+        <p:txBody>
+          <a:bodyPr wrap="square" anchor="t" lIns="0" rIns="0" tIns="0" bIns="0"/>
+          <a:lstStyle/>
+          <a:p>
+            <a:pPr algn="l"/>
+            <a:r>
+              <a:rPr sz="1300" b="1" i="0">
+                <a:solidFill>
+                  <a:srgbClr val="0645AD"/>
+                </a:solidFill>
+                <a:latin typeface="Calibri"/>
+              </a:rPr>
+              <a:t>SUCCESS CRITERIA</a:t>
+            </a:r>
+          </a:p>
+        </p:txBody>
+      </p:sp>
+      <p:sp>
+        <p:nvSpPr>
+          <p:cNvPr id="19" name="TextBox 18"/>
+          <p:cNvSpPr txBox="1"/>
+          <p:nvPr/>
+        </p:nvSpPr>
+        <p:spPr>
+          <a:xfrm>
+            <a:off x="8046720" y="2240280"/>
+            <a:ext cx="3337560" cy="3657600"/>
+          </a:xfrm>
+          <a:prstGeom prst="rect">
+            <a:avLst/>
+          </a:prstGeom>
+          <a:noFill/>
+        </p:spPr>
+        <p:txBody>
+          <a:bodyPr wrap="square" lIns="0" rIns="0" tIns="0" bIns="0">
+            <a:spAutoFit/>
+          </a:bodyPr>
+          <a:lstStyle/>
+          <a:p>
+            <a:pPr marL="274320" indent="-274320">
+              <a:spcAft>
+                <a:spcPts val="810"/>
+              </a:spcAft>
+              <a:buClr>
+                <a:srgbClr val="0645AD"/>
+              </a:buClr>
+              <a:buFont typeface="Arial"/>
+              <a:buChar char="•"/>
+            </a:pPr>
+            <a:r>
+              <a:rPr sz="1800" b="0">
+                <a:solidFill>
+                  <a:srgbClr val="202122"/>
+                </a:solidFill>
+                <a:latin typeface="Calibri"/>
+              </a:rPr>
+              <a:t>Laws named accurately</a:t>
+            </a:r>
+          </a:p>
+          <a:p>
+            <a:pPr marL="274320" indent="-274320">
+              <a:spcAft>
+                <a:spcPts val="810"/>
+              </a:spcAft>
+              <a:buClr>
+                <a:srgbClr val="0645AD"/>
+              </a:buClr>
+              <a:buFont typeface="Arial"/>
+              <a:buChar char="•"/>
+            </a:pPr>
+            <a:r>
+              <a:rPr sz="1800" b="0">
+                <a:solidFill>
+                  <a:srgbClr val="202122"/>
+                </a:solidFill>
+                <a:latin typeface="Calibri"/>
+              </a:rPr>
+              <a:t>Ethical principles applied, not just opinions</a:t>
+            </a:r>
+          </a:p>
+          <a:p>
+            <a:pPr marL="274320" indent="-274320">
+              <a:spcAft>
+                <a:spcPts val="810"/>
+              </a:spcAft>
+              <a:buClr>
+                <a:srgbClr val="0645AD"/>
+              </a:buClr>
+              <a:buFont typeface="Arial"/>
+              <a:buChar char="•"/>
+            </a:pPr>
+            <a:r>
+              <a:rPr sz="1800" b="0">
+                <a:solidFill>
+                  <a:srgbClr val="202122"/>
+                </a:solidFill>
+                <a:latin typeface="Calibri"/>
+              </a:rPr>
+              <a:t>Actions are realistic and professional</a:t>
+            </a:r>
+          </a:p>
+        </p:txBody>
+      </p:sp>
+    </p:spTree>
+  </p:cSld>
+  <p:clrMapOvr>
+    <a:masterClrMapping/>
+  </p:clrMapOvr>
+</p:sld>
+</file>
+
+<file path=ppt/slides/slide16.xml><?xml version="1.0" encoding="utf-8"?>
+<p:sld xmlns:a="http://schemas.openxmlformats.org/drawingml/2006/main" xmlns:p="http://schemas.openxmlformats.org/presentationml/2006/main" xmlns:r="http://schemas.openxmlformats.org/officeDocument/2006/relationships">
+  <p:cSld>
+    <p:bg>
+      <p:bgPr>
+        <a:solidFill>
           <a:srgbClr val="03306E"/>
         </a:solidFill>
         <a:effectLst/>
@@ -5363,6 +9516,446 @@
                 <a:latin typeface="Calibri"/>
               </a:rPr>
               <a:t>3</a:t>
+            </a:r>
+          </a:p>
+        </p:txBody>
+      </p:sp>
+      <p:sp>
+        <p:nvSpPr>
+          <p:cNvPr id="6" name="TextBox 5"/>
+          <p:cNvSpPr txBox="1"/>
+          <p:nvPr/>
+        </p:nvSpPr>
+        <p:spPr>
+          <a:xfrm>
+            <a:off x="548640" y="1554480"/>
+            <a:ext cx="6720840" cy="4617720"/>
+          </a:xfrm>
+          <a:prstGeom prst="rect">
+            <a:avLst/>
+          </a:prstGeom>
+          <a:noFill/>
+        </p:spPr>
+        <p:txBody>
+          <a:bodyPr wrap="square" lIns="0" rIns="0" tIns="0" bIns="0">
+            <a:spAutoFit/>
+          </a:bodyPr>
+          <a:lstStyle/>
+          <a:p>
+            <a:pPr>
+              <a:spcAft>
+                <a:spcPts val="1019"/>
+              </a:spcAft>
+            </a:pPr>
+            <a:r>
+              <a:rPr sz="1700" b="0">
+                <a:solidFill>
+                  <a:srgbClr val="202122"/>
+                </a:solidFill>
+                <a:latin typeface="Calibri"/>
+              </a:rPr>
+              <a:t>Several laws shape cyber security work.</a:t>
+            </a:r>
+          </a:p>
+          <a:p>
+            <a:pPr>
+              <a:spcAft>
+                <a:spcPts val="1019"/>
+              </a:spcAft>
+            </a:pPr>
+            <a:r>
+              <a:rPr sz="1700" b="0">
+                <a:solidFill>
+                  <a:srgbClr val="202122"/>
+                </a:solidFill>
+                <a:latin typeface="Calibri"/>
+              </a:rPr>
+              <a:t>The Data Protection Act 2018 requires organisations to protect personal data, detect security events and minimise the impact of incidents.</a:t>
+            </a:r>
+          </a:p>
+          <a:p>
+            <a:pPr>
+              <a:spcAft>
+                <a:spcPts val="1019"/>
+              </a:spcAft>
+            </a:pPr>
+            <a:r>
+              <a:rPr sz="1700" b="0">
+                <a:solidFill>
+                  <a:srgbClr val="202122"/>
+                </a:solidFill>
+                <a:latin typeface="Calibri"/>
+              </a:rPr>
+              <a:t>The Computer Misuse Act 1990 criminalises unauthorised access, access intended to enable further crimes, unauthorised modification of data, and making or supplying tools for these offences.</a:t>
+            </a:r>
+          </a:p>
+          <a:p>
+            <a:pPr>
+              <a:spcAft>
+                <a:spcPts val="1019"/>
+              </a:spcAft>
+            </a:pPr>
+            <a:r>
+              <a:rPr sz="1700" b="0">
+                <a:solidFill>
+                  <a:srgbClr val="202122"/>
+                </a:solidFill>
+                <a:latin typeface="Calibri"/>
+              </a:rPr>
+              <a:t>The Investigatory Powers Act 2016 sets how law enforcement and security agencies can obtain communications data.</a:t>
+            </a:r>
+          </a:p>
+          <a:p>
+            <a:pPr>
+              <a:spcAft>
+                <a:spcPts val="1019"/>
+              </a:spcAft>
+            </a:pPr>
+            <a:r>
+              <a:rPr sz="1700" b="0">
+                <a:solidFill>
+                  <a:srgbClr val="202122"/>
+                </a:solidFill>
+                <a:latin typeface="Calibri"/>
+              </a:rPr>
+              <a:t>The Human Rights Act 1998 protects rights such as privacy and binds public authorities.</a:t>
+            </a:r>
+          </a:p>
+          <a:p>
+            <a:pPr>
+              <a:spcAft>
+                <a:spcPts val="1019"/>
+              </a:spcAft>
+            </a:pPr>
+            <a:r>
+              <a:rPr sz="1700" b="0">
+                <a:solidFill>
+                  <a:srgbClr val="202122"/>
+                </a:solidFill>
+                <a:latin typeface="Calibri"/>
+              </a:rPr>
+              <a:t>The Telecommunications (Security) Act 2021 requires network providers to prevent, fix and disclose security compromises.</a:t>
+            </a:r>
+          </a:p>
+        </p:txBody>
+      </p:sp>
+      <p:sp>
+        <p:nvSpPr>
+          <p:cNvPr id="7" name="Rounded Rectangle 6"/>
+          <p:cNvSpPr/>
+          <p:nvPr/>
+        </p:nvSpPr>
+        <p:spPr>
+          <a:xfrm>
+            <a:off x="7772400" y="1554480"/>
+            <a:ext cx="3867912" cy="4526280"/>
+          </a:xfrm>
+          <a:prstGeom prst="roundRect">
+            <a:avLst>
+              <a:gd name="adj" fmla="val 8000"/>
+            </a:avLst>
+          </a:prstGeom>
+          <a:solidFill>
+            <a:srgbClr val="03306E"/>
+          </a:solidFill>
+          <a:ln>
+            <a:noFill/>
+          </a:ln>
+          <a:effectLst/>
+        </p:spPr>
+        <p:style>
+          <a:lnRef idx="1">
+            <a:schemeClr val="accent1"/>
+          </a:lnRef>
+          <a:fillRef idx="3">
+            <a:schemeClr val="accent1"/>
+          </a:fillRef>
+          <a:effectRef idx="2">
+            <a:schemeClr val="accent1"/>
+          </a:effectRef>
+          <a:fontRef idx="minor">
+            <a:schemeClr val="lt1"/>
+          </a:fontRef>
+        </p:style>
+        <p:txBody>
+          <a:bodyPr rtlCol="0" anchor="ctr"/>
+          <a:lstStyle/>
+          <a:p/>
+        </p:txBody>
+      </p:sp>
+      <p:sp>
+        <p:nvSpPr>
+          <p:cNvPr id="8" name="Oval 7"/>
+          <p:cNvSpPr/>
+          <p:nvPr/>
+        </p:nvSpPr>
+        <p:spPr>
+          <a:xfrm>
+            <a:off x="8046720" y="1828800"/>
+            <a:ext cx="548640" cy="548640"/>
+          </a:xfrm>
+          <a:prstGeom prst="ellipse">
+            <a:avLst/>
+          </a:prstGeom>
+          <a:solidFill>
+            <a:srgbClr val="E0463A"/>
+          </a:solidFill>
+          <a:ln>
+            <a:noFill/>
+          </a:ln>
+          <a:effectLst/>
+        </p:spPr>
+        <p:style>
+          <a:lnRef idx="1">
+            <a:schemeClr val="accent1"/>
+          </a:lnRef>
+          <a:fillRef idx="3">
+            <a:schemeClr val="accent1"/>
+          </a:fillRef>
+          <a:effectRef idx="2">
+            <a:schemeClr val="accent1"/>
+          </a:effectRef>
+          <a:fontRef idx="minor">
+            <a:schemeClr val="lt1"/>
+          </a:fontRef>
+        </p:style>
+        <p:txBody>
+          <a:bodyPr rtlCol="0" anchor="ctr" lIns="0" rIns="0" tIns="0" bIns="0"/>
+          <a:lstStyle/>
+          <a:p>
+            <a:pPr algn="ctr"/>
+            <a:r>
+              <a:rPr sz="1300" b="1">
+                <a:solidFill>
+                  <a:srgbClr val="FFFFFF"/>
+                </a:solidFill>
+                <a:latin typeface="Calibri"/>
+              </a:rPr>
+              <a:t>e.g.</a:t>
+            </a:r>
+          </a:p>
+        </p:txBody>
+      </p:sp>
+      <p:sp>
+        <p:nvSpPr>
+          <p:cNvPr id="9" name="TextBox 8"/>
+          <p:cNvSpPr txBox="1"/>
+          <p:nvPr/>
+        </p:nvSpPr>
+        <p:spPr>
+          <a:xfrm>
+            <a:off x="8046720" y="2560320"/>
+            <a:ext cx="3291840" cy="365760"/>
+          </a:xfrm>
+          <a:prstGeom prst="rect">
+            <a:avLst/>
+          </a:prstGeom>
+          <a:noFill/>
+        </p:spPr>
+        <p:txBody>
+          <a:bodyPr wrap="square" anchor="t" lIns="0" rIns="0" tIns="0" bIns="0"/>
+          <a:lstStyle/>
+          <a:p>
+            <a:pPr algn="l"/>
+            <a:r>
+              <a:rPr sz="1300" b="1" i="0">
+                <a:solidFill>
+                  <a:srgbClr val="A9C8F0"/>
+                </a:solidFill>
+                <a:latin typeface="Calibri"/>
+              </a:rPr>
+              <a:t>EXAMPLE</a:t>
+            </a:r>
+          </a:p>
+        </p:txBody>
+      </p:sp>
+      <p:sp>
+        <p:nvSpPr>
+          <p:cNvPr id="10" name="TextBox 9"/>
+          <p:cNvSpPr txBox="1"/>
+          <p:nvPr/>
+        </p:nvSpPr>
+        <p:spPr>
+          <a:xfrm>
+            <a:off x="8046720" y="2971800"/>
+            <a:ext cx="3291840" cy="2971800"/>
+          </a:xfrm>
+          <a:prstGeom prst="rect">
+            <a:avLst/>
+          </a:prstGeom>
+          <a:noFill/>
+        </p:spPr>
+        <p:txBody>
+          <a:bodyPr wrap="square" anchor="t" lIns="0" rIns="0" tIns="0" bIns="0"/>
+          <a:lstStyle/>
+          <a:p>
+            <a:pPr algn="l"/>
+            <a:r>
+              <a:rPr sz="1900" b="0" i="0">
+                <a:solidFill>
+                  <a:srgbClr val="FFFFFF"/>
+                </a:solidFill>
+                <a:latin typeface="Cambria"/>
+              </a:rPr>
+              <a:t>Selling a password-cracking tool to someone you know will use it illegally is itself an offence under the Computer Misuse Act.</a:t>
+            </a:r>
+          </a:p>
+        </p:txBody>
+      </p:sp>
+    </p:spTree>
+  </p:cSld>
+  <p:clrMapOvr>
+    <a:masterClrMapping/>
+  </p:clrMapOvr>
+</p:sld>
+</file>
+
+<file path=ppt/slides/slide4.xml><?xml version="1.0" encoding="utf-8"?>
+<p:sld xmlns:a="http://schemas.openxmlformats.org/drawingml/2006/main" xmlns:p="http://schemas.openxmlformats.org/presentationml/2006/main" xmlns:r="http://schemas.openxmlformats.org/officeDocument/2006/relationships">
+  <p:cSld>
+    <p:bg>
+      <p:bgPr>
+        <a:solidFill>
+          <a:srgbClr val="FFFFFF"/>
+        </a:solidFill>
+        <a:effectLst/>
+      </p:bgPr>
+    </p:bg>
+    <p:spTree>
+      <p:nvGrpSpPr>
+        <p:cNvPr id="1" name=""/>
+        <p:cNvGrpSpPr/>
+        <p:nvPr/>
+      </p:nvGrpSpPr>
+      <p:grpSpPr/>
+      <p:sp>
+        <p:nvSpPr>
+          <p:cNvPr id="2" name="TextBox 1"/>
+          <p:cNvSpPr txBox="1"/>
+          <p:nvPr/>
+        </p:nvSpPr>
+        <p:spPr>
+          <a:xfrm>
+            <a:off x="548640" y="320040"/>
+            <a:ext cx="11094415" cy="274320"/>
+          </a:xfrm>
+          <a:prstGeom prst="rect">
+            <a:avLst/>
+          </a:prstGeom>
+          <a:noFill/>
+        </p:spPr>
+        <p:txBody>
+          <a:bodyPr wrap="square" anchor="t" lIns="0" rIns="0" tIns="0" bIns="0"/>
+          <a:lstStyle/>
+          <a:p>
+            <a:pPr algn="l"/>
+            <a:r>
+              <a:rPr sz="1100" b="1" i="0">
+                <a:solidFill>
+                  <a:srgbClr val="54595D"/>
+                </a:solidFill>
+                <a:latin typeface="Calibri"/>
+              </a:rPr>
+              <a:t>CYBER SECURITY  ·  Cyber Security Content Area 1</a:t>
+            </a:r>
+          </a:p>
+        </p:txBody>
+      </p:sp>
+      <p:sp>
+        <p:nvSpPr>
+          <p:cNvPr id="3" name="TextBox 2"/>
+          <p:cNvSpPr txBox="1"/>
+          <p:nvPr/>
+        </p:nvSpPr>
+        <p:spPr>
+          <a:xfrm>
+            <a:off x="548640" y="566928"/>
+            <a:ext cx="11094415" cy="822960"/>
+          </a:xfrm>
+          <a:prstGeom prst="rect">
+            <a:avLst/>
+          </a:prstGeom>
+          <a:noFill/>
+        </p:spPr>
+        <p:txBody>
+          <a:bodyPr wrap="square" anchor="ctr" lIns="0" rIns="0" tIns="0" bIns="0"/>
+          <a:lstStyle/>
+          <a:p>
+            <a:pPr algn="l"/>
+            <a:r>
+              <a:rPr sz="3200" b="1" i="0">
+                <a:solidFill>
+                  <a:srgbClr val="03306E"/>
+                </a:solidFill>
+                <a:latin typeface="Cambria"/>
+              </a:rPr>
+              <a:t>Legislation for cyber security (1)</a:t>
+            </a:r>
+          </a:p>
+        </p:txBody>
+      </p:sp>
+      <p:sp>
+        <p:nvSpPr>
+          <p:cNvPr id="4" name="TextBox 3"/>
+          <p:cNvSpPr txBox="1"/>
+          <p:nvPr/>
+        </p:nvSpPr>
+        <p:spPr>
+          <a:xfrm>
+            <a:off x="548640" y="6446520"/>
+            <a:ext cx="8229600" cy="274320"/>
+          </a:xfrm>
+          <a:prstGeom prst="rect">
+            <a:avLst/>
+          </a:prstGeom>
+          <a:noFill/>
+        </p:spPr>
+        <p:txBody>
+          <a:bodyPr wrap="square" anchor="t" lIns="0" rIns="0" tIns="0" bIns="0"/>
+          <a:lstStyle/>
+          <a:p>
+            <a:pPr algn="l"/>
+            <a:r>
+              <a:rPr sz="1000" b="0" i="0">
+                <a:solidFill>
+                  <a:srgbClr val="54595D"/>
+                </a:solidFill>
+                <a:latin typeface="Calibri"/>
+              </a:rPr>
+              <a:t>Digital Support and Security T Level  ·  Cyber Law and Ethics</a:t>
+            </a:r>
+          </a:p>
+        </p:txBody>
+      </p:sp>
+      <p:sp>
+        <p:nvSpPr>
+          <p:cNvPr id="5" name="TextBox 4"/>
+          <p:cNvSpPr txBox="1"/>
+          <p:nvPr/>
+        </p:nvSpPr>
+        <p:spPr>
+          <a:xfrm>
+            <a:off x="10728655" y="6446520"/>
+            <a:ext cx="914400" cy="274320"/>
+          </a:xfrm>
+          <a:prstGeom prst="rect">
+            <a:avLst/>
+          </a:prstGeom>
+          <a:noFill/>
+        </p:spPr>
+        <p:txBody>
+          <a:bodyPr wrap="square" anchor="t" lIns="0" rIns="0" tIns="0" bIns="0"/>
+          <a:lstStyle/>
+          <a:p>
+            <a:pPr algn="r"/>
+            <a:r>
+              <a:rPr sz="1000" b="0" i="0">
+                <a:solidFill>
+                  <a:srgbClr val="54595D"/>
+                </a:solidFill>
+                <a:latin typeface="Calibri"/>
+              </a:rPr>
+              <a:t>4</a:t>
             </a:r>
           </a:p>
         </p:txBody>
@@ -5677,7 +10270,7 @@
 </p:sld>
 </file>
 
-<file path=ppt/slides/slide4.xml><?xml version="1.0" encoding="utf-8"?>
+<file path=ppt/slides/slide5.xml><?xml version="1.0" encoding="utf-8"?>
 <p:sld xmlns:a="http://schemas.openxmlformats.org/drawingml/2006/main" xmlns:p="http://schemas.openxmlformats.org/presentationml/2006/main" xmlns:r="http://schemas.openxmlformats.org/officeDocument/2006/relationships">
   <p:cSld>
     <p:bg>
@@ -5756,7 +10349,7 @@
                 </a:solidFill>
                 <a:latin typeface="Cambria"/>
               </a:rPr>
-              <a:t>Legislation for cyber security (2)</a:t>
+              <a:t>Quick check: Legislation for cyber security (1)</a:t>
             </a:r>
           </a:p>
         </p:txBody>
@@ -5822,7 +10415,864 @@
                 </a:solidFill>
                 <a:latin typeface="Calibri"/>
               </a:rPr>
-              <a:t>4</a:t>
+              <a:t>5</a:t>
+            </a:r>
+          </a:p>
+        </p:txBody>
+      </p:sp>
+      <p:sp>
+        <p:nvSpPr>
+          <p:cNvPr id="6" name="Oval 5"/>
+          <p:cNvSpPr/>
+          <p:nvPr/>
+        </p:nvSpPr>
+        <p:spPr>
+          <a:xfrm>
+            <a:off x="548640" y="1691640"/>
+            <a:ext cx="502920" cy="502920"/>
+          </a:xfrm>
+          <a:prstGeom prst="ellipse">
+            <a:avLst/>
+          </a:prstGeom>
+          <a:solidFill>
+            <a:srgbClr val="E0463A"/>
+          </a:solidFill>
+          <a:ln>
+            <a:noFill/>
+          </a:ln>
+          <a:effectLst/>
+        </p:spPr>
+        <p:style>
+          <a:lnRef idx="1">
+            <a:schemeClr val="accent1"/>
+          </a:lnRef>
+          <a:fillRef idx="3">
+            <a:schemeClr val="accent1"/>
+          </a:fillRef>
+          <a:effectRef idx="2">
+            <a:schemeClr val="accent1"/>
+          </a:effectRef>
+          <a:fontRef idx="minor">
+            <a:schemeClr val="lt1"/>
+          </a:fontRef>
+        </p:style>
+        <p:txBody>
+          <a:bodyPr rtlCol="0" anchor="ctr" lIns="0" rIns="0" tIns="0" bIns="0"/>
+          <a:lstStyle/>
+          <a:p>
+            <a:pPr algn="ctr"/>
+            <a:r>
+              <a:rPr sz="1600" b="1">
+                <a:solidFill>
+                  <a:srgbClr val="FFFFFF"/>
+                </a:solidFill>
+                <a:latin typeface="Calibri"/>
+              </a:rPr>
+              <a:t>1</a:t>
+            </a:r>
+          </a:p>
+        </p:txBody>
+      </p:sp>
+      <p:sp>
+        <p:nvSpPr>
+          <p:cNvPr id="7" name="TextBox 6"/>
+          <p:cNvSpPr txBox="1"/>
+          <p:nvPr/>
+        </p:nvSpPr>
+        <p:spPr>
+          <a:xfrm>
+            <a:off x="1371600" y="1645920"/>
+            <a:ext cx="10271455" cy="1188720"/>
+          </a:xfrm>
+          <a:prstGeom prst="rect">
+            <a:avLst/>
+          </a:prstGeom>
+          <a:noFill/>
+        </p:spPr>
+        <p:txBody>
+          <a:bodyPr wrap="square" anchor="t" lIns="0" rIns="0" tIns="0" bIns="0"/>
+          <a:lstStyle/>
+          <a:p>
+            <a:pPr algn="l"/>
+            <a:r>
+              <a:rPr sz="2400" b="0" i="0">
+                <a:solidFill>
+                  <a:srgbClr val="202122"/>
+                </a:solidFill>
+                <a:latin typeface="Calibri"/>
+              </a:rPr>
+              <a:t>Which Act covers supplying hacking tools?</a:t>
+            </a:r>
+          </a:p>
+        </p:txBody>
+      </p:sp>
+      <p:sp>
+        <p:nvSpPr>
+          <p:cNvPr id="8" name="Oval 7"/>
+          <p:cNvSpPr/>
+          <p:nvPr/>
+        </p:nvSpPr>
+        <p:spPr>
+          <a:xfrm>
+            <a:off x="548640" y="3108960"/>
+            <a:ext cx="502920" cy="502920"/>
+          </a:xfrm>
+          <a:prstGeom prst="ellipse">
+            <a:avLst/>
+          </a:prstGeom>
+          <a:solidFill>
+            <a:srgbClr val="E0463A"/>
+          </a:solidFill>
+          <a:ln>
+            <a:noFill/>
+          </a:ln>
+          <a:effectLst/>
+        </p:spPr>
+        <p:style>
+          <a:lnRef idx="1">
+            <a:schemeClr val="accent1"/>
+          </a:lnRef>
+          <a:fillRef idx="3">
+            <a:schemeClr val="accent1"/>
+          </a:fillRef>
+          <a:effectRef idx="2">
+            <a:schemeClr val="accent1"/>
+          </a:effectRef>
+          <a:fontRef idx="minor">
+            <a:schemeClr val="lt1"/>
+          </a:fontRef>
+        </p:style>
+        <p:txBody>
+          <a:bodyPr rtlCol="0" anchor="ctr" lIns="0" rIns="0" tIns="0" bIns="0"/>
+          <a:lstStyle/>
+          <a:p>
+            <a:pPr algn="ctr"/>
+            <a:r>
+              <a:rPr sz="1600" b="1">
+                <a:solidFill>
+                  <a:srgbClr val="FFFFFF"/>
+                </a:solidFill>
+                <a:latin typeface="Calibri"/>
+              </a:rPr>
+              <a:t>2</a:t>
+            </a:r>
+          </a:p>
+        </p:txBody>
+      </p:sp>
+      <p:sp>
+        <p:nvSpPr>
+          <p:cNvPr id="9" name="TextBox 8"/>
+          <p:cNvSpPr txBox="1"/>
+          <p:nvPr/>
+        </p:nvSpPr>
+        <p:spPr>
+          <a:xfrm>
+            <a:off x="1371600" y="3063240"/>
+            <a:ext cx="10271455" cy="1188720"/>
+          </a:xfrm>
+          <a:prstGeom prst="rect">
+            <a:avLst/>
+          </a:prstGeom>
+          <a:noFill/>
+        </p:spPr>
+        <p:txBody>
+          <a:bodyPr wrap="square" anchor="t" lIns="0" rIns="0" tIns="0" bIns="0"/>
+          <a:lstStyle/>
+          <a:p>
+            <a:pPr algn="l"/>
+            <a:r>
+              <a:rPr sz="2400" b="0" i="0">
+                <a:solidFill>
+                  <a:srgbClr val="202122"/>
+                </a:solidFill>
+                <a:latin typeface="Calibri"/>
+              </a:rPr>
+              <a:t>Which Act governs how agencies obtain communications data?</a:t>
+            </a:r>
+          </a:p>
+        </p:txBody>
+      </p:sp>
+      <p:sp>
+        <p:nvSpPr>
+          <p:cNvPr id="10" name="Oval 9"/>
+          <p:cNvSpPr/>
+          <p:nvPr/>
+        </p:nvSpPr>
+        <p:spPr>
+          <a:xfrm>
+            <a:off x="548640" y="4526280"/>
+            <a:ext cx="502920" cy="502920"/>
+          </a:xfrm>
+          <a:prstGeom prst="ellipse">
+            <a:avLst/>
+          </a:prstGeom>
+          <a:solidFill>
+            <a:srgbClr val="E0463A"/>
+          </a:solidFill>
+          <a:ln>
+            <a:noFill/>
+          </a:ln>
+          <a:effectLst/>
+        </p:spPr>
+        <p:style>
+          <a:lnRef idx="1">
+            <a:schemeClr val="accent1"/>
+          </a:lnRef>
+          <a:fillRef idx="3">
+            <a:schemeClr val="accent1"/>
+          </a:fillRef>
+          <a:effectRef idx="2">
+            <a:schemeClr val="accent1"/>
+          </a:effectRef>
+          <a:fontRef idx="minor">
+            <a:schemeClr val="lt1"/>
+          </a:fontRef>
+        </p:style>
+        <p:txBody>
+          <a:bodyPr rtlCol="0" anchor="ctr" lIns="0" rIns="0" tIns="0" bIns="0"/>
+          <a:lstStyle/>
+          <a:p>
+            <a:pPr algn="ctr"/>
+            <a:r>
+              <a:rPr sz="1600" b="1">
+                <a:solidFill>
+                  <a:srgbClr val="FFFFFF"/>
+                </a:solidFill>
+                <a:latin typeface="Calibri"/>
+              </a:rPr>
+              <a:t>3</a:t>
+            </a:r>
+          </a:p>
+        </p:txBody>
+      </p:sp>
+      <p:sp>
+        <p:nvSpPr>
+          <p:cNvPr id="11" name="TextBox 10"/>
+          <p:cNvSpPr txBox="1"/>
+          <p:nvPr/>
+        </p:nvSpPr>
+        <p:spPr>
+          <a:xfrm>
+            <a:off x="1371600" y="4480560"/>
+            <a:ext cx="10271455" cy="1188720"/>
+          </a:xfrm>
+          <a:prstGeom prst="rect">
+            <a:avLst/>
+          </a:prstGeom>
+          <a:noFill/>
+        </p:spPr>
+        <p:txBody>
+          <a:bodyPr wrap="square" anchor="t" lIns="0" rIns="0" tIns="0" bIns="0"/>
+          <a:lstStyle/>
+          <a:p>
+            <a:pPr algn="l"/>
+            <a:r>
+              <a:rPr sz="2400" b="0" i="0">
+                <a:solidFill>
+                  <a:srgbClr val="202122"/>
+                </a:solidFill>
+                <a:latin typeface="Calibri"/>
+              </a:rPr>
+              <a:t>Who must follow the Telecommunications (Security) Act?</a:t>
+            </a:r>
+          </a:p>
+        </p:txBody>
+      </p:sp>
+      <p:sp>
+        <p:nvSpPr>
+          <p:cNvPr id="12" name="TextBox 11"/>
+          <p:cNvSpPr txBox="1"/>
+          <p:nvPr/>
+        </p:nvSpPr>
+        <p:spPr>
+          <a:xfrm>
+            <a:off x="548640" y="5852160"/>
+            <a:ext cx="11094415" cy="365760"/>
+          </a:xfrm>
+          <a:prstGeom prst="rect">
+            <a:avLst/>
+          </a:prstGeom>
+          <a:noFill/>
+        </p:spPr>
+        <p:txBody>
+          <a:bodyPr wrap="square" anchor="t" lIns="0" rIns="0" tIns="0" bIns="0"/>
+          <a:lstStyle/>
+          <a:p>
+            <a:pPr algn="l"/>
+            <a:r>
+              <a:rPr sz="1300" b="0" i="1">
+                <a:solidFill>
+                  <a:srgbClr val="54595D"/>
+                </a:solidFill>
+                <a:latin typeface="Calibri"/>
+              </a:rPr>
+              <a:t>Answer on mini whiteboards or in your book. Answers are in the speaker notes.</a:t>
+            </a:r>
+          </a:p>
+        </p:txBody>
+      </p:sp>
+    </p:spTree>
+  </p:cSld>
+  <p:clrMapOvr>
+    <a:masterClrMapping/>
+  </p:clrMapOvr>
+</p:sld>
+</file>
+
+<file path=ppt/slides/slide6.xml><?xml version="1.0" encoding="utf-8"?>
+<p:sld xmlns:a="http://schemas.openxmlformats.org/drawingml/2006/main" xmlns:p="http://schemas.openxmlformats.org/presentationml/2006/main" xmlns:r="http://schemas.openxmlformats.org/officeDocument/2006/relationships">
+  <p:cSld>
+    <p:bg>
+      <p:bgPr>
+        <a:solidFill>
+          <a:srgbClr val="FFFFFF"/>
+        </a:solidFill>
+        <a:effectLst/>
+      </p:bgPr>
+    </p:bg>
+    <p:spTree>
+      <p:nvGrpSpPr>
+        <p:cNvPr id="1" name=""/>
+        <p:cNvGrpSpPr/>
+        <p:nvPr/>
+      </p:nvGrpSpPr>
+      <p:grpSpPr/>
+      <p:sp>
+        <p:nvSpPr>
+          <p:cNvPr id="2" name="TextBox 1"/>
+          <p:cNvSpPr txBox="1"/>
+          <p:nvPr/>
+        </p:nvSpPr>
+        <p:spPr>
+          <a:xfrm>
+            <a:off x="548640" y="320040"/>
+            <a:ext cx="11094415" cy="274320"/>
+          </a:xfrm>
+          <a:prstGeom prst="rect">
+            <a:avLst/>
+          </a:prstGeom>
+          <a:noFill/>
+        </p:spPr>
+        <p:txBody>
+          <a:bodyPr wrap="square" anchor="t" lIns="0" rIns="0" tIns="0" bIns="0"/>
+          <a:lstStyle/>
+          <a:p>
+            <a:pPr algn="l"/>
+            <a:r>
+              <a:rPr sz="1100" b="1" i="0">
+                <a:solidFill>
+                  <a:srgbClr val="54595D"/>
+                </a:solidFill>
+                <a:latin typeface="Calibri"/>
+              </a:rPr>
+              <a:t>CYBER SECURITY  ·  Cyber Security Content Area 1</a:t>
+            </a:r>
+          </a:p>
+        </p:txBody>
+      </p:sp>
+      <p:sp>
+        <p:nvSpPr>
+          <p:cNvPr id="3" name="TextBox 2"/>
+          <p:cNvSpPr txBox="1"/>
+          <p:nvPr/>
+        </p:nvSpPr>
+        <p:spPr>
+          <a:xfrm>
+            <a:off x="548640" y="566928"/>
+            <a:ext cx="11094415" cy="822960"/>
+          </a:xfrm>
+          <a:prstGeom prst="rect">
+            <a:avLst/>
+          </a:prstGeom>
+          <a:noFill/>
+        </p:spPr>
+        <p:txBody>
+          <a:bodyPr wrap="square" anchor="ctr" lIns="0" rIns="0" tIns="0" bIns="0"/>
+          <a:lstStyle/>
+          <a:p>
+            <a:pPr algn="l"/>
+            <a:r>
+              <a:rPr sz="3200" b="1" i="0">
+                <a:solidFill>
+                  <a:srgbClr val="03306E"/>
+                </a:solidFill>
+                <a:latin typeface="Cambria"/>
+              </a:rPr>
+              <a:t>Legislation for cyber security (2)</a:t>
+            </a:r>
+          </a:p>
+        </p:txBody>
+      </p:sp>
+      <p:sp>
+        <p:nvSpPr>
+          <p:cNvPr id="4" name="TextBox 3"/>
+          <p:cNvSpPr txBox="1"/>
+          <p:nvPr/>
+        </p:nvSpPr>
+        <p:spPr>
+          <a:xfrm>
+            <a:off x="548640" y="6446520"/>
+            <a:ext cx="8229600" cy="274320"/>
+          </a:xfrm>
+          <a:prstGeom prst="rect">
+            <a:avLst/>
+          </a:prstGeom>
+          <a:noFill/>
+        </p:spPr>
+        <p:txBody>
+          <a:bodyPr wrap="square" anchor="t" lIns="0" rIns="0" tIns="0" bIns="0"/>
+          <a:lstStyle/>
+          <a:p>
+            <a:pPr algn="l"/>
+            <a:r>
+              <a:rPr sz="1000" b="0" i="0">
+                <a:solidFill>
+                  <a:srgbClr val="54595D"/>
+                </a:solidFill>
+                <a:latin typeface="Calibri"/>
+              </a:rPr>
+              <a:t>Digital Support and Security T Level  ·  Cyber Law and Ethics</a:t>
+            </a:r>
+          </a:p>
+        </p:txBody>
+      </p:sp>
+      <p:sp>
+        <p:nvSpPr>
+          <p:cNvPr id="5" name="TextBox 4"/>
+          <p:cNvSpPr txBox="1"/>
+          <p:nvPr/>
+        </p:nvSpPr>
+        <p:spPr>
+          <a:xfrm>
+            <a:off x="10728655" y="6446520"/>
+            <a:ext cx="914400" cy="274320"/>
+          </a:xfrm>
+          <a:prstGeom prst="rect">
+            <a:avLst/>
+          </a:prstGeom>
+          <a:noFill/>
+        </p:spPr>
+        <p:txBody>
+          <a:bodyPr wrap="square" anchor="t" lIns="0" rIns="0" tIns="0" bIns="0"/>
+          <a:lstStyle/>
+          <a:p>
+            <a:pPr algn="r"/>
+            <a:r>
+              <a:rPr sz="1000" b="0" i="0">
+                <a:solidFill>
+                  <a:srgbClr val="54595D"/>
+                </a:solidFill>
+                <a:latin typeface="Calibri"/>
+              </a:rPr>
+              <a:t>6</a:t>
+            </a:r>
+          </a:p>
+        </p:txBody>
+      </p:sp>
+      <p:sp>
+        <p:nvSpPr>
+          <p:cNvPr id="6" name="TextBox 5"/>
+          <p:cNvSpPr txBox="1"/>
+          <p:nvPr/>
+        </p:nvSpPr>
+        <p:spPr>
+          <a:xfrm>
+            <a:off x="548640" y="1554480"/>
+            <a:ext cx="6720840" cy="4617720"/>
+          </a:xfrm>
+          <a:prstGeom prst="rect">
+            <a:avLst/>
+          </a:prstGeom>
+          <a:noFill/>
+        </p:spPr>
+        <p:txBody>
+          <a:bodyPr wrap="square" lIns="0" rIns="0" tIns="0" bIns="0">
+            <a:spAutoFit/>
+          </a:bodyPr>
+          <a:lstStyle/>
+          <a:p>
+            <a:pPr>
+              <a:spcAft>
+                <a:spcPts val="1200"/>
+              </a:spcAft>
+            </a:pPr>
+            <a:r>
+              <a:rPr sz="2000" b="0">
+                <a:solidFill>
+                  <a:srgbClr val="202122"/>
+                </a:solidFill>
+                <a:latin typeface="Calibri"/>
+              </a:rPr>
+              <a:t>The Freedom of Information Act 2000 lets the public request information from public bodies, but exempts some security bodies, such as the NCSC.</a:t>
+            </a:r>
+          </a:p>
+          <a:p>
+            <a:pPr>
+              <a:spcAft>
+                <a:spcPts val="1200"/>
+              </a:spcAft>
+            </a:pPr>
+            <a:r>
+              <a:rPr sz="2000" b="0">
+                <a:solidFill>
+                  <a:srgbClr val="202122"/>
+                </a:solidFill>
+                <a:latin typeface="Calibri"/>
+              </a:rPr>
+              <a:t>The Network and Information Systems (NIS) Regulations 2018 set a security baseline for operators of essential services, such as energy and water, and for relevant digital service providers.</a:t>
+            </a:r>
+          </a:p>
+          <a:p>
+            <a:pPr>
+              <a:spcAft>
+                <a:spcPts val="1200"/>
+              </a:spcAft>
+            </a:pPr>
+            <a:r>
+              <a:rPr sz="2000" b="0">
+                <a:solidFill>
+                  <a:srgbClr val="202122"/>
+                </a:solidFill>
+                <a:latin typeface="Calibri"/>
+              </a:rPr>
+              <a:t>The Official Secrets Act 1989 protects security and intelligence information.</a:t>
+            </a:r>
+          </a:p>
+          <a:p>
+            <a:pPr>
+              <a:spcAft>
+                <a:spcPts val="1200"/>
+              </a:spcAft>
+            </a:pPr>
+            <a:r>
+              <a:rPr sz="2000" b="0">
+                <a:solidFill>
+                  <a:srgbClr val="202122"/>
+                </a:solidFill>
+                <a:latin typeface="Calibri"/>
+              </a:rPr>
+              <a:t>The Wireless Telegraphy Act 2006 regulates wireless devices and makes it an offence to intercept other people's wireless communications without authority.</a:t>
+            </a:r>
+          </a:p>
+        </p:txBody>
+      </p:sp>
+      <p:sp>
+        <p:nvSpPr>
+          <p:cNvPr id="7" name="Rounded Rectangle 6"/>
+          <p:cNvSpPr/>
+          <p:nvPr/>
+        </p:nvSpPr>
+        <p:spPr>
+          <a:xfrm>
+            <a:off x="7772400" y="1554480"/>
+            <a:ext cx="3867912" cy="4526280"/>
+          </a:xfrm>
+          <a:prstGeom prst="roundRect">
+            <a:avLst>
+              <a:gd name="adj" fmla="val 8000"/>
+            </a:avLst>
+          </a:prstGeom>
+          <a:solidFill>
+            <a:srgbClr val="03306E"/>
+          </a:solidFill>
+          <a:ln>
+            <a:noFill/>
+          </a:ln>
+          <a:effectLst/>
+        </p:spPr>
+        <p:style>
+          <a:lnRef idx="1">
+            <a:schemeClr val="accent1"/>
+          </a:lnRef>
+          <a:fillRef idx="3">
+            <a:schemeClr val="accent1"/>
+          </a:fillRef>
+          <a:effectRef idx="2">
+            <a:schemeClr val="accent1"/>
+          </a:effectRef>
+          <a:fontRef idx="minor">
+            <a:schemeClr val="lt1"/>
+          </a:fontRef>
+        </p:style>
+        <p:txBody>
+          <a:bodyPr rtlCol="0" anchor="ctr"/>
+          <a:lstStyle/>
+          <a:p/>
+        </p:txBody>
+      </p:sp>
+      <p:sp>
+        <p:nvSpPr>
+          <p:cNvPr id="8" name="Oval 7"/>
+          <p:cNvSpPr/>
+          <p:nvPr/>
+        </p:nvSpPr>
+        <p:spPr>
+          <a:xfrm>
+            <a:off x="8046720" y="1828800"/>
+            <a:ext cx="548640" cy="548640"/>
+          </a:xfrm>
+          <a:prstGeom prst="ellipse">
+            <a:avLst/>
+          </a:prstGeom>
+          <a:solidFill>
+            <a:srgbClr val="E0463A"/>
+          </a:solidFill>
+          <a:ln>
+            <a:noFill/>
+          </a:ln>
+          <a:effectLst/>
+        </p:spPr>
+        <p:style>
+          <a:lnRef idx="1">
+            <a:schemeClr val="accent1"/>
+          </a:lnRef>
+          <a:fillRef idx="3">
+            <a:schemeClr val="accent1"/>
+          </a:fillRef>
+          <a:effectRef idx="2">
+            <a:schemeClr val="accent1"/>
+          </a:effectRef>
+          <a:fontRef idx="minor">
+            <a:schemeClr val="lt1"/>
+          </a:fontRef>
+        </p:style>
+        <p:txBody>
+          <a:bodyPr rtlCol="0" anchor="ctr" lIns="0" rIns="0" tIns="0" bIns="0"/>
+          <a:lstStyle/>
+          <a:p>
+            <a:pPr algn="ctr"/>
+            <a:r>
+              <a:rPr sz="1300" b="1">
+                <a:solidFill>
+                  <a:srgbClr val="FFFFFF"/>
+                </a:solidFill>
+                <a:latin typeface="Calibri"/>
+              </a:rPr>
+              <a:t>e.g.</a:t>
+            </a:r>
+          </a:p>
+        </p:txBody>
+      </p:sp>
+      <p:sp>
+        <p:nvSpPr>
+          <p:cNvPr id="9" name="TextBox 8"/>
+          <p:cNvSpPr txBox="1"/>
+          <p:nvPr/>
+        </p:nvSpPr>
+        <p:spPr>
+          <a:xfrm>
+            <a:off x="8046720" y="2560320"/>
+            <a:ext cx="3291840" cy="365760"/>
+          </a:xfrm>
+          <a:prstGeom prst="rect">
+            <a:avLst/>
+          </a:prstGeom>
+          <a:noFill/>
+        </p:spPr>
+        <p:txBody>
+          <a:bodyPr wrap="square" anchor="t" lIns="0" rIns="0" tIns="0" bIns="0"/>
+          <a:lstStyle/>
+          <a:p>
+            <a:pPr algn="l"/>
+            <a:r>
+              <a:rPr sz="1300" b="1" i="0">
+                <a:solidFill>
+                  <a:srgbClr val="A9C8F0"/>
+                </a:solidFill>
+                <a:latin typeface="Calibri"/>
+              </a:rPr>
+              <a:t>EXAMPLE</a:t>
+            </a:r>
+          </a:p>
+        </p:txBody>
+      </p:sp>
+      <p:sp>
+        <p:nvSpPr>
+          <p:cNvPr id="10" name="TextBox 9"/>
+          <p:cNvSpPr txBox="1"/>
+          <p:nvPr/>
+        </p:nvSpPr>
+        <p:spPr>
+          <a:xfrm>
+            <a:off x="8046720" y="2971800"/>
+            <a:ext cx="3291840" cy="2971800"/>
+          </a:xfrm>
+          <a:prstGeom prst="rect">
+            <a:avLst/>
+          </a:prstGeom>
+          <a:noFill/>
+        </p:spPr>
+        <p:txBody>
+          <a:bodyPr wrap="square" anchor="t" lIns="0" rIns="0" tIns="0" bIns="0"/>
+          <a:lstStyle/>
+          <a:p>
+            <a:pPr algn="l"/>
+            <a:r>
+              <a:rPr sz="1900" b="0" i="0">
+                <a:solidFill>
+                  <a:srgbClr val="FFFFFF"/>
+                </a:solidFill>
+                <a:latin typeface="Cambria"/>
+              </a:rPr>
+              <a:t>Capturing traffic from a neighbour's Wi-Fi 'just to see' breaks the Wireless Telegraphy Act, as well as the Computer Misuse Act if you access it.</a:t>
+            </a:r>
+          </a:p>
+        </p:txBody>
+      </p:sp>
+    </p:spTree>
+  </p:cSld>
+  <p:clrMapOvr>
+    <a:masterClrMapping/>
+  </p:clrMapOvr>
+</p:sld>
+</file>
+
+<file path=ppt/slides/slide7.xml><?xml version="1.0" encoding="utf-8"?>
+<p:sld xmlns:a="http://schemas.openxmlformats.org/drawingml/2006/main" xmlns:p="http://schemas.openxmlformats.org/presentationml/2006/main" xmlns:r="http://schemas.openxmlformats.org/officeDocument/2006/relationships">
+  <p:cSld>
+    <p:bg>
+      <p:bgPr>
+        <a:solidFill>
+          <a:srgbClr val="FFFFFF"/>
+        </a:solidFill>
+        <a:effectLst/>
+      </p:bgPr>
+    </p:bg>
+    <p:spTree>
+      <p:nvGrpSpPr>
+        <p:cNvPr id="1" name=""/>
+        <p:cNvGrpSpPr/>
+        <p:nvPr/>
+      </p:nvGrpSpPr>
+      <p:grpSpPr/>
+      <p:sp>
+        <p:nvSpPr>
+          <p:cNvPr id="2" name="TextBox 1"/>
+          <p:cNvSpPr txBox="1"/>
+          <p:nvPr/>
+        </p:nvSpPr>
+        <p:spPr>
+          <a:xfrm>
+            <a:off x="548640" y="320040"/>
+            <a:ext cx="11094415" cy="274320"/>
+          </a:xfrm>
+          <a:prstGeom prst="rect">
+            <a:avLst/>
+          </a:prstGeom>
+          <a:noFill/>
+        </p:spPr>
+        <p:txBody>
+          <a:bodyPr wrap="square" anchor="t" lIns="0" rIns="0" tIns="0" bIns="0"/>
+          <a:lstStyle/>
+          <a:p>
+            <a:pPr algn="l"/>
+            <a:r>
+              <a:rPr sz="1100" b="1" i="0">
+                <a:solidFill>
+                  <a:srgbClr val="54595D"/>
+                </a:solidFill>
+                <a:latin typeface="Calibri"/>
+              </a:rPr>
+              <a:t>CYBER SECURITY  ·  Cyber Security Content Area 1</a:t>
+            </a:r>
+          </a:p>
+        </p:txBody>
+      </p:sp>
+      <p:sp>
+        <p:nvSpPr>
+          <p:cNvPr id="3" name="TextBox 2"/>
+          <p:cNvSpPr txBox="1"/>
+          <p:nvPr/>
+        </p:nvSpPr>
+        <p:spPr>
+          <a:xfrm>
+            <a:off x="548640" y="566928"/>
+            <a:ext cx="11094415" cy="822960"/>
+          </a:xfrm>
+          <a:prstGeom prst="rect">
+            <a:avLst/>
+          </a:prstGeom>
+          <a:noFill/>
+        </p:spPr>
+        <p:txBody>
+          <a:bodyPr wrap="square" anchor="ctr" lIns="0" rIns="0" tIns="0" bIns="0"/>
+          <a:lstStyle/>
+          <a:p>
+            <a:pPr algn="l"/>
+            <a:r>
+              <a:rPr sz="3200" b="1" i="0">
+                <a:solidFill>
+                  <a:srgbClr val="03306E"/>
+                </a:solidFill>
+                <a:latin typeface="Cambria"/>
+              </a:rPr>
+              <a:t>Legislation for cyber security (2)</a:t>
+            </a:r>
+          </a:p>
+        </p:txBody>
+      </p:sp>
+      <p:sp>
+        <p:nvSpPr>
+          <p:cNvPr id="4" name="TextBox 3"/>
+          <p:cNvSpPr txBox="1"/>
+          <p:nvPr/>
+        </p:nvSpPr>
+        <p:spPr>
+          <a:xfrm>
+            <a:off x="548640" y="6446520"/>
+            <a:ext cx="8229600" cy="274320"/>
+          </a:xfrm>
+          <a:prstGeom prst="rect">
+            <a:avLst/>
+          </a:prstGeom>
+          <a:noFill/>
+        </p:spPr>
+        <p:txBody>
+          <a:bodyPr wrap="square" anchor="t" lIns="0" rIns="0" tIns="0" bIns="0"/>
+          <a:lstStyle/>
+          <a:p>
+            <a:pPr algn="l"/>
+            <a:r>
+              <a:rPr sz="1000" b="0" i="0">
+                <a:solidFill>
+                  <a:srgbClr val="54595D"/>
+                </a:solidFill>
+                <a:latin typeface="Calibri"/>
+              </a:rPr>
+              <a:t>Digital Support and Security T Level  ·  Cyber Law and Ethics</a:t>
+            </a:r>
+          </a:p>
+        </p:txBody>
+      </p:sp>
+      <p:sp>
+        <p:nvSpPr>
+          <p:cNvPr id="5" name="TextBox 4"/>
+          <p:cNvSpPr txBox="1"/>
+          <p:nvPr/>
+        </p:nvSpPr>
+        <p:spPr>
+          <a:xfrm>
+            <a:off x="10728655" y="6446520"/>
+            <a:ext cx="914400" cy="274320"/>
+          </a:xfrm>
+          <a:prstGeom prst="rect">
+            <a:avLst/>
+          </a:prstGeom>
+          <a:noFill/>
+        </p:spPr>
+        <p:txBody>
+          <a:bodyPr wrap="square" anchor="t" lIns="0" rIns="0" tIns="0" bIns="0"/>
+          <a:lstStyle/>
+          <a:p>
+            <a:pPr algn="r"/>
+            <a:r>
+              <a:rPr sz="1000" b="0" i="0">
+                <a:solidFill>
+                  <a:srgbClr val="54595D"/>
+                </a:solidFill>
+                <a:latin typeface="Calibri"/>
+              </a:rPr>
+              <a:t>7</a:t>
             </a:r>
           </a:p>
         </p:txBody>
@@ -6091,2128 +11541,6 @@
 </p:sld>
 </file>
 
-<file path=ppt/slides/slide5.xml><?xml version="1.0" encoding="utf-8"?>
-<p:sld xmlns:a="http://schemas.openxmlformats.org/drawingml/2006/main" xmlns:p="http://schemas.openxmlformats.org/presentationml/2006/main" xmlns:r="http://schemas.openxmlformats.org/officeDocument/2006/relationships">
-  <p:cSld>
-    <p:bg>
-      <p:bgPr>
-        <a:solidFill>
-          <a:srgbClr val="FFFFFF"/>
-        </a:solidFill>
-        <a:effectLst/>
-      </p:bgPr>
-    </p:bg>
-    <p:spTree>
-      <p:nvGrpSpPr>
-        <p:cNvPr id="1" name=""/>
-        <p:cNvGrpSpPr/>
-        <p:nvPr/>
-      </p:nvGrpSpPr>
-      <p:grpSpPr/>
-      <p:sp>
-        <p:nvSpPr>
-          <p:cNvPr id="2" name="TextBox 1"/>
-          <p:cNvSpPr txBox="1"/>
-          <p:nvPr/>
-        </p:nvSpPr>
-        <p:spPr>
-          <a:xfrm>
-            <a:off x="548640" y="320040"/>
-            <a:ext cx="11094415" cy="274320"/>
-          </a:xfrm>
-          <a:prstGeom prst="rect">
-            <a:avLst/>
-          </a:prstGeom>
-          <a:noFill/>
-        </p:spPr>
-        <p:txBody>
-          <a:bodyPr wrap="square" anchor="t" lIns="0" rIns="0" tIns="0" bIns="0"/>
-          <a:lstStyle/>
-          <a:p>
-            <a:pPr algn="l"/>
-            <a:r>
-              <a:rPr sz="1100" b="1" i="0">
-                <a:solidFill>
-                  <a:srgbClr val="54595D"/>
-                </a:solidFill>
-                <a:latin typeface="Calibri"/>
-              </a:rPr>
-              <a:t>CYBER SECURITY  ·  Cyber Security Content Area 1</a:t>
-            </a:r>
-          </a:p>
-        </p:txBody>
-      </p:sp>
-      <p:sp>
-        <p:nvSpPr>
-          <p:cNvPr id="3" name="TextBox 2"/>
-          <p:cNvSpPr txBox="1"/>
-          <p:nvPr/>
-        </p:nvSpPr>
-        <p:spPr>
-          <a:xfrm>
-            <a:off x="548640" y="566928"/>
-            <a:ext cx="11094415" cy="822960"/>
-          </a:xfrm>
-          <a:prstGeom prst="rect">
-            <a:avLst/>
-          </a:prstGeom>
-          <a:noFill/>
-        </p:spPr>
-        <p:txBody>
-          <a:bodyPr wrap="square" anchor="ctr" lIns="0" rIns="0" tIns="0" bIns="0"/>
-          <a:lstStyle/>
-          <a:p>
-            <a:pPr algn="l"/>
-            <a:r>
-              <a:rPr sz="3200" b="1" i="0">
-                <a:solidFill>
-                  <a:srgbClr val="03306E"/>
-                </a:solidFill>
-                <a:latin typeface="Cambria"/>
-              </a:rPr>
-              <a:t>UK Cyber Security Council Code of Ethics</a:t>
-            </a:r>
-          </a:p>
-        </p:txBody>
-      </p:sp>
-      <p:sp>
-        <p:nvSpPr>
-          <p:cNvPr id="4" name="TextBox 3"/>
-          <p:cNvSpPr txBox="1"/>
-          <p:nvPr/>
-        </p:nvSpPr>
-        <p:spPr>
-          <a:xfrm>
-            <a:off x="548640" y="6446520"/>
-            <a:ext cx="8229600" cy="274320"/>
-          </a:xfrm>
-          <a:prstGeom prst="rect">
-            <a:avLst/>
-          </a:prstGeom>
-          <a:noFill/>
-        </p:spPr>
-        <p:txBody>
-          <a:bodyPr wrap="square" anchor="t" lIns="0" rIns="0" tIns="0" bIns="0"/>
-          <a:lstStyle/>
-          <a:p>
-            <a:pPr algn="l"/>
-            <a:r>
-              <a:rPr sz="1000" b="0" i="0">
-                <a:solidFill>
-                  <a:srgbClr val="54595D"/>
-                </a:solidFill>
-                <a:latin typeface="Calibri"/>
-              </a:rPr>
-              <a:t>Digital Support and Security T Level  ·  Cyber Law and Ethics</a:t>
-            </a:r>
-          </a:p>
-        </p:txBody>
-      </p:sp>
-      <p:sp>
-        <p:nvSpPr>
-          <p:cNvPr id="5" name="TextBox 4"/>
-          <p:cNvSpPr txBox="1"/>
-          <p:nvPr/>
-        </p:nvSpPr>
-        <p:spPr>
-          <a:xfrm>
-            <a:off x="10728655" y="6446520"/>
-            <a:ext cx="914400" cy="274320"/>
-          </a:xfrm>
-          <a:prstGeom prst="rect">
-            <a:avLst/>
-          </a:prstGeom>
-          <a:noFill/>
-        </p:spPr>
-        <p:txBody>
-          <a:bodyPr wrap="square" anchor="t" lIns="0" rIns="0" tIns="0" bIns="0"/>
-          <a:lstStyle/>
-          <a:p>
-            <a:pPr algn="r"/>
-            <a:r>
-              <a:rPr sz="1000" b="0" i="0">
-                <a:solidFill>
-                  <a:srgbClr val="54595D"/>
-                </a:solidFill>
-                <a:latin typeface="Calibri"/>
-              </a:rPr>
-              <a:t>5</a:t>
-            </a:r>
-          </a:p>
-        </p:txBody>
-      </p:sp>
-      <p:sp>
-        <p:nvSpPr>
-          <p:cNvPr id="6" name="Rounded Rectangle 5"/>
-          <p:cNvSpPr/>
-          <p:nvPr/>
-        </p:nvSpPr>
-        <p:spPr>
-          <a:xfrm>
-            <a:off x="548640" y="1600200"/>
-            <a:ext cx="5410047" cy="2148840"/>
-          </a:xfrm>
-          <a:prstGeom prst="roundRect">
-            <a:avLst>
-              <a:gd name="adj" fmla="val 6000"/>
-            </a:avLst>
-          </a:prstGeom>
-          <a:solidFill>
-            <a:srgbClr val="EAF3FF"/>
-          </a:solidFill>
-          <a:ln>
-            <a:noFill/>
-          </a:ln>
-          <a:effectLst/>
-        </p:spPr>
-        <p:style>
-          <a:lnRef idx="1">
-            <a:schemeClr val="accent1"/>
-          </a:lnRef>
-          <a:fillRef idx="3">
-            <a:schemeClr val="accent1"/>
-          </a:fillRef>
-          <a:effectRef idx="2">
-            <a:schemeClr val="accent1"/>
-          </a:effectRef>
-          <a:fontRef idx="minor">
-            <a:schemeClr val="lt1"/>
-          </a:fontRef>
-        </p:style>
-        <p:txBody>
-          <a:bodyPr rtlCol="0" anchor="ctr"/>
-          <a:lstStyle/>
-          <a:p/>
-        </p:txBody>
-      </p:sp>
-      <p:sp>
-        <p:nvSpPr>
-          <p:cNvPr id="7" name="Oval 6"/>
-          <p:cNvSpPr/>
-          <p:nvPr/>
-        </p:nvSpPr>
-        <p:spPr>
-          <a:xfrm>
-            <a:off x="777240" y="1828800"/>
-            <a:ext cx="457200" cy="457200"/>
-          </a:xfrm>
-          <a:prstGeom prst="ellipse">
-            <a:avLst/>
-          </a:prstGeom>
-          <a:solidFill>
-            <a:srgbClr val="E0463A"/>
-          </a:solidFill>
-          <a:ln>
-            <a:noFill/>
-          </a:ln>
-          <a:effectLst/>
-        </p:spPr>
-        <p:style>
-          <a:lnRef idx="1">
-            <a:schemeClr val="accent1"/>
-          </a:lnRef>
-          <a:fillRef idx="3">
-            <a:schemeClr val="accent1"/>
-          </a:fillRef>
-          <a:effectRef idx="2">
-            <a:schemeClr val="accent1"/>
-          </a:effectRef>
-          <a:fontRef idx="minor">
-            <a:schemeClr val="lt1"/>
-          </a:fontRef>
-        </p:style>
-        <p:txBody>
-          <a:bodyPr rtlCol="0" anchor="ctr" lIns="0" rIns="0" tIns="0" bIns="0"/>
-          <a:lstStyle/>
-          <a:p>
-            <a:pPr algn="ctr"/>
-            <a:r>
-              <a:rPr sz="1500" b="1">
-                <a:solidFill>
-                  <a:srgbClr val="FFFFFF"/>
-                </a:solidFill>
-                <a:latin typeface="Calibri"/>
-              </a:rPr>
-              <a:t>1</a:t>
-            </a:r>
-          </a:p>
-        </p:txBody>
-      </p:sp>
-      <p:sp>
-        <p:nvSpPr>
-          <p:cNvPr id="8" name="TextBox 7"/>
-          <p:cNvSpPr txBox="1"/>
-          <p:nvPr/>
-        </p:nvSpPr>
-        <p:spPr>
-          <a:xfrm>
-            <a:off x="1371600" y="1801368"/>
-            <a:ext cx="4404207" cy="512064"/>
-          </a:xfrm>
-          <a:prstGeom prst="rect">
-            <a:avLst/>
-          </a:prstGeom>
-          <a:noFill/>
-        </p:spPr>
-        <p:txBody>
-          <a:bodyPr wrap="square" anchor="ctr" lIns="0" rIns="0" tIns="0" bIns="0"/>
-          <a:lstStyle/>
-          <a:p>
-            <a:pPr algn="l"/>
-            <a:r>
-              <a:rPr sz="1900" b="1" i="0">
-                <a:solidFill>
-                  <a:srgbClr val="03306E"/>
-                </a:solidFill>
-                <a:latin typeface="Calibri"/>
-              </a:rPr>
-              <a:t>Credibility</a:t>
-            </a:r>
-          </a:p>
-        </p:txBody>
-      </p:sp>
-      <p:sp>
-        <p:nvSpPr>
-          <p:cNvPr id="9" name="TextBox 8"/>
-          <p:cNvSpPr txBox="1"/>
-          <p:nvPr/>
-        </p:nvSpPr>
-        <p:spPr>
-          <a:xfrm>
-            <a:off x="777240" y="2468880"/>
-            <a:ext cx="4952847" cy="1143000"/>
-          </a:xfrm>
-          <a:prstGeom prst="rect">
-            <a:avLst/>
-          </a:prstGeom>
-          <a:noFill/>
-        </p:spPr>
-        <p:txBody>
-          <a:bodyPr wrap="square" anchor="t" lIns="0" rIns="0" tIns="0" bIns="0"/>
-          <a:lstStyle/>
-          <a:p>
-            <a:pPr algn="l"/>
-            <a:r>
-              <a:rPr sz="2000" b="0" i="0">
-                <a:solidFill>
-                  <a:srgbClr val="202122"/>
-                </a:solidFill>
-                <a:latin typeface="Calibri"/>
-              </a:rPr>
-              <a:t>Be accountable and act ethically.</a:t>
-            </a:r>
-          </a:p>
-        </p:txBody>
-      </p:sp>
-      <p:sp>
-        <p:nvSpPr>
-          <p:cNvPr id="10" name="Rounded Rectangle 9"/>
-          <p:cNvSpPr/>
-          <p:nvPr/>
-        </p:nvSpPr>
-        <p:spPr>
-          <a:xfrm>
-            <a:off x="6233007" y="1600200"/>
-            <a:ext cx="5410047" cy="2148840"/>
-          </a:xfrm>
-          <a:prstGeom prst="roundRect">
-            <a:avLst>
-              <a:gd name="adj" fmla="val 6000"/>
-            </a:avLst>
-          </a:prstGeom>
-          <a:solidFill>
-            <a:srgbClr val="EAF3FF"/>
-          </a:solidFill>
-          <a:ln>
-            <a:noFill/>
-          </a:ln>
-          <a:effectLst/>
-        </p:spPr>
-        <p:style>
-          <a:lnRef idx="1">
-            <a:schemeClr val="accent1"/>
-          </a:lnRef>
-          <a:fillRef idx="3">
-            <a:schemeClr val="accent1"/>
-          </a:fillRef>
-          <a:effectRef idx="2">
-            <a:schemeClr val="accent1"/>
-          </a:effectRef>
-          <a:fontRef idx="minor">
-            <a:schemeClr val="lt1"/>
-          </a:fontRef>
-        </p:style>
-        <p:txBody>
-          <a:bodyPr rtlCol="0" anchor="ctr"/>
-          <a:lstStyle/>
-          <a:p/>
-        </p:txBody>
-      </p:sp>
-      <p:sp>
-        <p:nvSpPr>
-          <p:cNvPr id="11" name="Oval 10"/>
-          <p:cNvSpPr/>
-          <p:nvPr/>
-        </p:nvSpPr>
-        <p:spPr>
-          <a:xfrm>
-            <a:off x="6461607" y="1828800"/>
-            <a:ext cx="457200" cy="457200"/>
-          </a:xfrm>
-          <a:prstGeom prst="ellipse">
-            <a:avLst/>
-          </a:prstGeom>
-          <a:solidFill>
-            <a:srgbClr val="E0463A"/>
-          </a:solidFill>
-          <a:ln>
-            <a:noFill/>
-          </a:ln>
-          <a:effectLst/>
-        </p:spPr>
-        <p:style>
-          <a:lnRef idx="1">
-            <a:schemeClr val="accent1"/>
-          </a:lnRef>
-          <a:fillRef idx="3">
-            <a:schemeClr val="accent1"/>
-          </a:fillRef>
-          <a:effectRef idx="2">
-            <a:schemeClr val="accent1"/>
-          </a:effectRef>
-          <a:fontRef idx="minor">
-            <a:schemeClr val="lt1"/>
-          </a:fontRef>
-        </p:style>
-        <p:txBody>
-          <a:bodyPr rtlCol="0" anchor="ctr" lIns="0" rIns="0" tIns="0" bIns="0"/>
-          <a:lstStyle/>
-          <a:p>
-            <a:pPr algn="ctr"/>
-            <a:r>
-              <a:rPr sz="1500" b="1">
-                <a:solidFill>
-                  <a:srgbClr val="FFFFFF"/>
-                </a:solidFill>
-                <a:latin typeface="Calibri"/>
-              </a:rPr>
-              <a:t>2</a:t>
-            </a:r>
-          </a:p>
-        </p:txBody>
-      </p:sp>
-      <p:sp>
-        <p:nvSpPr>
-          <p:cNvPr id="12" name="TextBox 11"/>
-          <p:cNvSpPr txBox="1"/>
-          <p:nvPr/>
-        </p:nvSpPr>
-        <p:spPr>
-          <a:xfrm>
-            <a:off x="7055967" y="1801368"/>
-            <a:ext cx="4404207" cy="512064"/>
-          </a:xfrm>
-          <a:prstGeom prst="rect">
-            <a:avLst/>
-          </a:prstGeom>
-          <a:noFill/>
-        </p:spPr>
-        <p:txBody>
-          <a:bodyPr wrap="square" anchor="ctr" lIns="0" rIns="0" tIns="0" bIns="0"/>
-          <a:lstStyle/>
-          <a:p>
-            <a:pPr algn="l"/>
-            <a:r>
-              <a:rPr sz="1900" b="1" i="0">
-                <a:solidFill>
-                  <a:srgbClr val="03306E"/>
-                </a:solidFill>
-                <a:latin typeface="Calibri"/>
-              </a:rPr>
-              <a:t>Integrity</a:t>
-            </a:r>
-          </a:p>
-        </p:txBody>
-      </p:sp>
-      <p:sp>
-        <p:nvSpPr>
-          <p:cNvPr id="13" name="TextBox 12"/>
-          <p:cNvSpPr txBox="1"/>
-          <p:nvPr/>
-        </p:nvSpPr>
-        <p:spPr>
-          <a:xfrm>
-            <a:off x="6461607" y="2468880"/>
-            <a:ext cx="4952847" cy="1143000"/>
-          </a:xfrm>
-          <a:prstGeom prst="rect">
-            <a:avLst/>
-          </a:prstGeom>
-          <a:noFill/>
-        </p:spPr>
-        <p:txBody>
-          <a:bodyPr wrap="square" anchor="t" lIns="0" rIns="0" tIns="0" bIns="0"/>
-          <a:lstStyle/>
-          <a:p>
-            <a:pPr algn="l"/>
-            <a:r>
-              <a:rPr sz="2000" b="0" i="0">
-                <a:solidFill>
-                  <a:srgbClr val="202122"/>
-                </a:solidFill>
-                <a:latin typeface="Calibri"/>
-              </a:rPr>
-              <a:t>Be honest and obey the law.</a:t>
-            </a:r>
-          </a:p>
-        </p:txBody>
-      </p:sp>
-      <p:sp>
-        <p:nvSpPr>
-          <p:cNvPr id="14" name="Rounded Rectangle 13"/>
-          <p:cNvSpPr/>
-          <p:nvPr/>
-        </p:nvSpPr>
-        <p:spPr>
-          <a:xfrm>
-            <a:off x="548640" y="4023360"/>
-            <a:ext cx="5410047" cy="2148840"/>
-          </a:xfrm>
-          <a:prstGeom prst="roundRect">
-            <a:avLst>
-              <a:gd name="adj" fmla="val 6000"/>
-            </a:avLst>
-          </a:prstGeom>
-          <a:solidFill>
-            <a:srgbClr val="EAF3FF"/>
-          </a:solidFill>
-          <a:ln>
-            <a:noFill/>
-          </a:ln>
-          <a:effectLst/>
-        </p:spPr>
-        <p:style>
-          <a:lnRef idx="1">
-            <a:schemeClr val="accent1"/>
-          </a:lnRef>
-          <a:fillRef idx="3">
-            <a:schemeClr val="accent1"/>
-          </a:fillRef>
-          <a:effectRef idx="2">
-            <a:schemeClr val="accent1"/>
-          </a:effectRef>
-          <a:fontRef idx="minor">
-            <a:schemeClr val="lt1"/>
-          </a:fontRef>
-        </p:style>
-        <p:txBody>
-          <a:bodyPr rtlCol="0" anchor="ctr"/>
-          <a:lstStyle/>
-          <a:p/>
-        </p:txBody>
-      </p:sp>
-      <p:sp>
-        <p:nvSpPr>
-          <p:cNvPr id="15" name="Oval 14"/>
-          <p:cNvSpPr/>
-          <p:nvPr/>
-        </p:nvSpPr>
-        <p:spPr>
-          <a:xfrm>
-            <a:off x="777240" y="4251960"/>
-            <a:ext cx="457200" cy="457200"/>
-          </a:xfrm>
-          <a:prstGeom prst="ellipse">
-            <a:avLst/>
-          </a:prstGeom>
-          <a:solidFill>
-            <a:srgbClr val="E0463A"/>
-          </a:solidFill>
-          <a:ln>
-            <a:noFill/>
-          </a:ln>
-          <a:effectLst/>
-        </p:spPr>
-        <p:style>
-          <a:lnRef idx="1">
-            <a:schemeClr val="accent1"/>
-          </a:lnRef>
-          <a:fillRef idx="3">
-            <a:schemeClr val="accent1"/>
-          </a:fillRef>
-          <a:effectRef idx="2">
-            <a:schemeClr val="accent1"/>
-          </a:effectRef>
-          <a:fontRef idx="minor">
-            <a:schemeClr val="lt1"/>
-          </a:fontRef>
-        </p:style>
-        <p:txBody>
-          <a:bodyPr rtlCol="0" anchor="ctr" lIns="0" rIns="0" tIns="0" bIns="0"/>
-          <a:lstStyle/>
-          <a:p>
-            <a:pPr algn="ctr"/>
-            <a:r>
-              <a:rPr sz="1500" b="1">
-                <a:solidFill>
-                  <a:srgbClr val="FFFFFF"/>
-                </a:solidFill>
-                <a:latin typeface="Calibri"/>
-              </a:rPr>
-              <a:t>3</a:t>
-            </a:r>
-          </a:p>
-        </p:txBody>
-      </p:sp>
-      <p:sp>
-        <p:nvSpPr>
-          <p:cNvPr id="16" name="TextBox 15"/>
-          <p:cNvSpPr txBox="1"/>
-          <p:nvPr/>
-        </p:nvSpPr>
-        <p:spPr>
-          <a:xfrm>
-            <a:off x="1371600" y="4224528"/>
-            <a:ext cx="4404207" cy="512064"/>
-          </a:xfrm>
-          <a:prstGeom prst="rect">
-            <a:avLst/>
-          </a:prstGeom>
-          <a:noFill/>
-        </p:spPr>
-        <p:txBody>
-          <a:bodyPr wrap="square" anchor="ctr" lIns="0" rIns="0" tIns="0" bIns="0"/>
-          <a:lstStyle/>
-          <a:p>
-            <a:pPr algn="l"/>
-            <a:r>
-              <a:rPr sz="1900" b="1" i="0">
-                <a:solidFill>
-                  <a:srgbClr val="03306E"/>
-                </a:solidFill>
-                <a:latin typeface="Calibri"/>
-              </a:rPr>
-              <a:t>Professionalism</a:t>
-            </a:r>
-          </a:p>
-        </p:txBody>
-      </p:sp>
-      <p:sp>
-        <p:nvSpPr>
-          <p:cNvPr id="17" name="TextBox 16"/>
-          <p:cNvSpPr txBox="1"/>
-          <p:nvPr/>
-        </p:nvSpPr>
-        <p:spPr>
-          <a:xfrm>
-            <a:off x="777240" y="4892040"/>
-            <a:ext cx="4952847" cy="1143000"/>
-          </a:xfrm>
-          <a:prstGeom prst="rect">
-            <a:avLst/>
-          </a:prstGeom>
-          <a:noFill/>
-        </p:spPr>
-        <p:txBody>
-          <a:bodyPr wrap="square" anchor="t" lIns="0" rIns="0" tIns="0" bIns="0"/>
-          <a:lstStyle/>
-          <a:p>
-            <a:pPr algn="l"/>
-            <a:r>
-              <a:rPr sz="2000" b="0" i="0">
-                <a:solidFill>
-                  <a:srgbClr val="202122"/>
-                </a:solidFill>
-                <a:latin typeface="Calibri"/>
-              </a:rPr>
-              <a:t>Share knowledge, base practice on evidence, correct misinformation.</a:t>
-            </a:r>
-          </a:p>
-        </p:txBody>
-      </p:sp>
-      <p:sp>
-        <p:nvSpPr>
-          <p:cNvPr id="18" name="Rounded Rectangle 17"/>
-          <p:cNvSpPr/>
-          <p:nvPr/>
-        </p:nvSpPr>
-        <p:spPr>
-          <a:xfrm>
-            <a:off x="6233007" y="4023360"/>
-            <a:ext cx="5410047" cy="2148840"/>
-          </a:xfrm>
-          <a:prstGeom prst="roundRect">
-            <a:avLst>
-              <a:gd name="adj" fmla="val 6000"/>
-            </a:avLst>
-          </a:prstGeom>
-          <a:solidFill>
-            <a:srgbClr val="EAF3FF"/>
-          </a:solidFill>
-          <a:ln>
-            <a:noFill/>
-          </a:ln>
-          <a:effectLst/>
-        </p:spPr>
-        <p:style>
-          <a:lnRef idx="1">
-            <a:schemeClr val="accent1"/>
-          </a:lnRef>
-          <a:fillRef idx="3">
-            <a:schemeClr val="accent1"/>
-          </a:fillRef>
-          <a:effectRef idx="2">
-            <a:schemeClr val="accent1"/>
-          </a:effectRef>
-          <a:fontRef idx="minor">
-            <a:schemeClr val="lt1"/>
-          </a:fontRef>
-        </p:style>
-        <p:txBody>
-          <a:bodyPr rtlCol="0" anchor="ctr"/>
-          <a:lstStyle/>
-          <a:p/>
-        </p:txBody>
-      </p:sp>
-      <p:sp>
-        <p:nvSpPr>
-          <p:cNvPr id="19" name="Oval 18"/>
-          <p:cNvSpPr/>
-          <p:nvPr/>
-        </p:nvSpPr>
-        <p:spPr>
-          <a:xfrm>
-            <a:off x="6461607" y="4251960"/>
-            <a:ext cx="457200" cy="457200"/>
-          </a:xfrm>
-          <a:prstGeom prst="ellipse">
-            <a:avLst/>
-          </a:prstGeom>
-          <a:solidFill>
-            <a:srgbClr val="E0463A"/>
-          </a:solidFill>
-          <a:ln>
-            <a:noFill/>
-          </a:ln>
-          <a:effectLst/>
-        </p:spPr>
-        <p:style>
-          <a:lnRef idx="1">
-            <a:schemeClr val="accent1"/>
-          </a:lnRef>
-          <a:fillRef idx="3">
-            <a:schemeClr val="accent1"/>
-          </a:fillRef>
-          <a:effectRef idx="2">
-            <a:schemeClr val="accent1"/>
-          </a:effectRef>
-          <a:fontRef idx="minor">
-            <a:schemeClr val="lt1"/>
-          </a:fontRef>
-        </p:style>
-        <p:txBody>
-          <a:bodyPr rtlCol="0" anchor="ctr" lIns="0" rIns="0" tIns="0" bIns="0"/>
-          <a:lstStyle/>
-          <a:p>
-            <a:pPr algn="ctr"/>
-            <a:r>
-              <a:rPr sz="1500" b="1">
-                <a:solidFill>
-                  <a:srgbClr val="FFFFFF"/>
-                </a:solidFill>
-                <a:latin typeface="Calibri"/>
-              </a:rPr>
-              <a:t>4</a:t>
-            </a:r>
-          </a:p>
-        </p:txBody>
-      </p:sp>
-      <p:sp>
-        <p:nvSpPr>
-          <p:cNvPr id="20" name="TextBox 19"/>
-          <p:cNvSpPr txBox="1"/>
-          <p:nvPr/>
-        </p:nvSpPr>
-        <p:spPr>
-          <a:xfrm>
-            <a:off x="7055967" y="4224528"/>
-            <a:ext cx="4404207" cy="512064"/>
-          </a:xfrm>
-          <a:prstGeom prst="rect">
-            <a:avLst/>
-          </a:prstGeom>
-          <a:noFill/>
-        </p:spPr>
-        <p:txBody>
-          <a:bodyPr wrap="square" anchor="ctr" lIns="0" rIns="0" tIns="0" bIns="0"/>
-          <a:lstStyle/>
-          <a:p>
-            <a:pPr algn="l"/>
-            <a:r>
-              <a:rPr sz="1900" b="1" i="0">
-                <a:solidFill>
-                  <a:srgbClr val="03306E"/>
-                </a:solidFill>
-                <a:latin typeface="Calibri"/>
-              </a:rPr>
-              <a:t>Responsibility and respect</a:t>
-            </a:r>
-          </a:p>
-        </p:txBody>
-      </p:sp>
-      <p:sp>
-        <p:nvSpPr>
-          <p:cNvPr id="21" name="TextBox 20"/>
-          <p:cNvSpPr txBox="1"/>
-          <p:nvPr/>
-        </p:nvSpPr>
-        <p:spPr>
-          <a:xfrm>
-            <a:off x="6461607" y="4892040"/>
-            <a:ext cx="4952847" cy="1143000"/>
-          </a:xfrm>
-          <a:prstGeom prst="rect">
-            <a:avLst/>
-          </a:prstGeom>
-          <a:noFill/>
-        </p:spPr>
-        <p:txBody>
-          <a:bodyPr wrap="square" anchor="t" lIns="0" rIns="0" tIns="0" bIns="0"/>
-          <a:lstStyle/>
-          <a:p>
-            <a:pPr algn="l"/>
-            <a:r>
-              <a:rPr sz="2000" b="0" i="0">
-                <a:solidFill>
-                  <a:srgbClr val="202122"/>
-                </a:solidFill>
-                <a:latin typeface="Calibri"/>
-              </a:rPr>
-              <a:t>Take ownership, safeguard data, declare conflicts of interest, champion inclusion.</a:t>
-            </a:r>
-          </a:p>
-        </p:txBody>
-      </p:sp>
-    </p:spTree>
-  </p:cSld>
-  <p:clrMapOvr>
-    <a:masterClrMapping/>
-  </p:clrMapOvr>
-</p:sld>
-</file>
-
-<file path=ppt/slides/slide6.xml><?xml version="1.0" encoding="utf-8"?>
-<p:sld xmlns:a="http://schemas.openxmlformats.org/drawingml/2006/main" xmlns:p="http://schemas.openxmlformats.org/presentationml/2006/main" xmlns:r="http://schemas.openxmlformats.org/officeDocument/2006/relationships">
-  <p:cSld>
-    <p:bg>
-      <p:bgPr>
-        <a:solidFill>
-          <a:srgbClr val="FFFFFF"/>
-        </a:solidFill>
-        <a:effectLst/>
-      </p:bgPr>
-    </p:bg>
-    <p:spTree>
-      <p:nvGrpSpPr>
-        <p:cNvPr id="1" name=""/>
-        <p:cNvGrpSpPr/>
-        <p:nvPr/>
-      </p:nvGrpSpPr>
-      <p:grpSpPr/>
-      <p:sp>
-        <p:nvSpPr>
-          <p:cNvPr id="2" name="TextBox 1"/>
-          <p:cNvSpPr txBox="1"/>
-          <p:nvPr/>
-        </p:nvSpPr>
-        <p:spPr>
-          <a:xfrm>
-            <a:off x="548640" y="320040"/>
-            <a:ext cx="11094415" cy="274320"/>
-          </a:xfrm>
-          <a:prstGeom prst="rect">
-            <a:avLst/>
-          </a:prstGeom>
-          <a:noFill/>
-        </p:spPr>
-        <p:txBody>
-          <a:bodyPr wrap="square" anchor="t" lIns="0" rIns="0" tIns="0" bIns="0"/>
-          <a:lstStyle/>
-          <a:p>
-            <a:pPr algn="l"/>
-            <a:r>
-              <a:rPr sz="1100" b="1" i="0">
-                <a:solidFill>
-                  <a:srgbClr val="54595D"/>
-                </a:solidFill>
-                <a:latin typeface="Calibri"/>
-              </a:rPr>
-              <a:t>CYBER SECURITY  ·  Cyber Security Content Area 1</a:t>
-            </a:r>
-          </a:p>
-        </p:txBody>
-      </p:sp>
-      <p:sp>
-        <p:nvSpPr>
-          <p:cNvPr id="3" name="TextBox 2"/>
-          <p:cNvSpPr txBox="1"/>
-          <p:nvPr/>
-        </p:nvSpPr>
-        <p:spPr>
-          <a:xfrm>
-            <a:off x="548640" y="566928"/>
-            <a:ext cx="11094415" cy="822960"/>
-          </a:xfrm>
-          <a:prstGeom prst="rect">
-            <a:avLst/>
-          </a:prstGeom>
-          <a:noFill/>
-        </p:spPr>
-        <p:txBody>
-          <a:bodyPr wrap="square" anchor="ctr" lIns="0" rIns="0" tIns="0" bIns="0"/>
-          <a:lstStyle/>
-          <a:p>
-            <a:pPr algn="l"/>
-            <a:r>
-              <a:rPr sz="3200" b="1" i="0">
-                <a:solidFill>
-                  <a:srgbClr val="03306E"/>
-                </a:solidFill>
-                <a:latin typeface="Cambria"/>
-              </a:rPr>
-              <a:t>BCS code of conduct</a:t>
-            </a:r>
-          </a:p>
-        </p:txBody>
-      </p:sp>
-      <p:sp>
-        <p:nvSpPr>
-          <p:cNvPr id="4" name="TextBox 3"/>
-          <p:cNvSpPr txBox="1"/>
-          <p:nvPr/>
-        </p:nvSpPr>
-        <p:spPr>
-          <a:xfrm>
-            <a:off x="548640" y="6446520"/>
-            <a:ext cx="8229600" cy="274320"/>
-          </a:xfrm>
-          <a:prstGeom prst="rect">
-            <a:avLst/>
-          </a:prstGeom>
-          <a:noFill/>
-        </p:spPr>
-        <p:txBody>
-          <a:bodyPr wrap="square" anchor="t" lIns="0" rIns="0" tIns="0" bIns="0"/>
-          <a:lstStyle/>
-          <a:p>
-            <a:pPr algn="l"/>
-            <a:r>
-              <a:rPr sz="1000" b="0" i="0">
-                <a:solidFill>
-                  <a:srgbClr val="54595D"/>
-                </a:solidFill>
-                <a:latin typeface="Calibri"/>
-              </a:rPr>
-              <a:t>Digital Support and Security T Level  ·  Cyber Law and Ethics</a:t>
-            </a:r>
-          </a:p>
-        </p:txBody>
-      </p:sp>
-      <p:sp>
-        <p:nvSpPr>
-          <p:cNvPr id="5" name="TextBox 4"/>
-          <p:cNvSpPr txBox="1"/>
-          <p:nvPr/>
-        </p:nvSpPr>
-        <p:spPr>
-          <a:xfrm>
-            <a:off x="10728655" y="6446520"/>
-            <a:ext cx="914400" cy="274320"/>
-          </a:xfrm>
-          <a:prstGeom prst="rect">
-            <a:avLst/>
-          </a:prstGeom>
-          <a:noFill/>
-        </p:spPr>
-        <p:txBody>
-          <a:bodyPr wrap="square" anchor="t" lIns="0" rIns="0" tIns="0" bIns="0"/>
-          <a:lstStyle/>
-          <a:p>
-            <a:pPr algn="r"/>
-            <a:r>
-              <a:rPr sz="1000" b="0" i="0">
-                <a:solidFill>
-                  <a:srgbClr val="54595D"/>
-                </a:solidFill>
-                <a:latin typeface="Calibri"/>
-              </a:rPr>
-              <a:t>6</a:t>
-            </a:r>
-          </a:p>
-        </p:txBody>
-      </p:sp>
-      <p:sp>
-        <p:nvSpPr>
-          <p:cNvPr id="6" name="Rounded Rectangle 5"/>
-          <p:cNvSpPr/>
-          <p:nvPr/>
-        </p:nvSpPr>
-        <p:spPr>
-          <a:xfrm>
-            <a:off x="548640" y="1600200"/>
-            <a:ext cx="5410047" cy="2148840"/>
-          </a:xfrm>
-          <a:prstGeom prst="roundRect">
-            <a:avLst>
-              <a:gd name="adj" fmla="val 6000"/>
-            </a:avLst>
-          </a:prstGeom>
-          <a:solidFill>
-            <a:srgbClr val="EAF3FF"/>
-          </a:solidFill>
-          <a:ln>
-            <a:noFill/>
-          </a:ln>
-          <a:effectLst/>
-        </p:spPr>
-        <p:style>
-          <a:lnRef idx="1">
-            <a:schemeClr val="accent1"/>
-          </a:lnRef>
-          <a:fillRef idx="3">
-            <a:schemeClr val="accent1"/>
-          </a:fillRef>
-          <a:effectRef idx="2">
-            <a:schemeClr val="accent1"/>
-          </a:effectRef>
-          <a:fontRef idx="minor">
-            <a:schemeClr val="lt1"/>
-          </a:fontRef>
-        </p:style>
-        <p:txBody>
-          <a:bodyPr rtlCol="0" anchor="ctr"/>
-          <a:lstStyle/>
-          <a:p/>
-        </p:txBody>
-      </p:sp>
-      <p:sp>
-        <p:nvSpPr>
-          <p:cNvPr id="7" name="Oval 6"/>
-          <p:cNvSpPr/>
-          <p:nvPr/>
-        </p:nvSpPr>
-        <p:spPr>
-          <a:xfrm>
-            <a:off x="777240" y="1828800"/>
-            <a:ext cx="457200" cy="457200"/>
-          </a:xfrm>
-          <a:prstGeom prst="ellipse">
-            <a:avLst/>
-          </a:prstGeom>
-          <a:solidFill>
-            <a:srgbClr val="E0463A"/>
-          </a:solidFill>
-          <a:ln>
-            <a:noFill/>
-          </a:ln>
-          <a:effectLst/>
-        </p:spPr>
-        <p:style>
-          <a:lnRef idx="1">
-            <a:schemeClr val="accent1"/>
-          </a:lnRef>
-          <a:fillRef idx="3">
-            <a:schemeClr val="accent1"/>
-          </a:fillRef>
-          <a:effectRef idx="2">
-            <a:schemeClr val="accent1"/>
-          </a:effectRef>
-          <a:fontRef idx="minor">
-            <a:schemeClr val="lt1"/>
-          </a:fontRef>
-        </p:style>
-        <p:txBody>
-          <a:bodyPr rtlCol="0" anchor="ctr" lIns="0" rIns="0" tIns="0" bIns="0"/>
-          <a:lstStyle/>
-          <a:p>
-            <a:pPr algn="ctr"/>
-            <a:r>
-              <a:rPr sz="1500" b="1">
-                <a:solidFill>
-                  <a:srgbClr val="FFFFFF"/>
-                </a:solidFill>
-                <a:latin typeface="Calibri"/>
-              </a:rPr>
-              <a:t>1</a:t>
-            </a:r>
-          </a:p>
-        </p:txBody>
-      </p:sp>
-      <p:sp>
-        <p:nvSpPr>
-          <p:cNvPr id="8" name="TextBox 7"/>
-          <p:cNvSpPr txBox="1"/>
-          <p:nvPr/>
-        </p:nvSpPr>
-        <p:spPr>
-          <a:xfrm>
-            <a:off x="1371600" y="1801368"/>
-            <a:ext cx="4404207" cy="512064"/>
-          </a:xfrm>
-          <a:prstGeom prst="rect">
-            <a:avLst/>
-          </a:prstGeom>
-          <a:noFill/>
-        </p:spPr>
-        <p:txBody>
-          <a:bodyPr wrap="square" anchor="ctr" lIns="0" rIns="0" tIns="0" bIns="0"/>
-          <a:lstStyle/>
-          <a:p>
-            <a:pPr algn="l"/>
-            <a:r>
-              <a:rPr sz="1900" b="1" i="0">
-                <a:solidFill>
-                  <a:srgbClr val="03306E"/>
-                </a:solidFill>
-                <a:latin typeface="Calibri"/>
-              </a:rPr>
-              <a:t>Make IT for everyone</a:t>
-            </a:r>
-          </a:p>
-        </p:txBody>
-      </p:sp>
-      <p:sp>
-        <p:nvSpPr>
-          <p:cNvPr id="9" name="TextBox 8"/>
-          <p:cNvSpPr txBox="1"/>
-          <p:nvPr/>
-        </p:nvSpPr>
-        <p:spPr>
-          <a:xfrm>
-            <a:off x="777240" y="2468880"/>
-            <a:ext cx="4952847" cy="1143000"/>
-          </a:xfrm>
-          <a:prstGeom prst="rect">
-            <a:avLst/>
-          </a:prstGeom>
-          <a:noFill/>
-        </p:spPr>
-        <p:txBody>
-          <a:bodyPr wrap="square" anchor="t" lIns="0" rIns="0" tIns="0" bIns="0"/>
-          <a:lstStyle/>
-          <a:p>
-            <a:pPr algn="l"/>
-            <a:r>
-              <a:rPr sz="2000" b="0" i="0">
-                <a:solidFill>
-                  <a:srgbClr val="202122"/>
-                </a:solidFill>
-                <a:latin typeface="Calibri"/>
-              </a:rPr>
-              <a:t>Share professional information.</a:t>
-            </a:r>
-          </a:p>
-        </p:txBody>
-      </p:sp>
-      <p:sp>
-        <p:nvSpPr>
-          <p:cNvPr id="10" name="Rounded Rectangle 9"/>
-          <p:cNvSpPr/>
-          <p:nvPr/>
-        </p:nvSpPr>
-        <p:spPr>
-          <a:xfrm>
-            <a:off x="6233007" y="1600200"/>
-            <a:ext cx="5410047" cy="2148840"/>
-          </a:xfrm>
-          <a:prstGeom prst="roundRect">
-            <a:avLst>
-              <a:gd name="adj" fmla="val 6000"/>
-            </a:avLst>
-          </a:prstGeom>
-          <a:solidFill>
-            <a:srgbClr val="EAF3FF"/>
-          </a:solidFill>
-          <a:ln>
-            <a:noFill/>
-          </a:ln>
-          <a:effectLst/>
-        </p:spPr>
-        <p:style>
-          <a:lnRef idx="1">
-            <a:schemeClr val="accent1"/>
-          </a:lnRef>
-          <a:fillRef idx="3">
-            <a:schemeClr val="accent1"/>
-          </a:fillRef>
-          <a:effectRef idx="2">
-            <a:schemeClr val="accent1"/>
-          </a:effectRef>
-          <a:fontRef idx="minor">
-            <a:schemeClr val="lt1"/>
-          </a:fontRef>
-        </p:style>
-        <p:txBody>
-          <a:bodyPr rtlCol="0" anchor="ctr"/>
-          <a:lstStyle/>
-          <a:p/>
-        </p:txBody>
-      </p:sp>
-      <p:sp>
-        <p:nvSpPr>
-          <p:cNvPr id="11" name="Oval 10"/>
-          <p:cNvSpPr/>
-          <p:nvPr/>
-        </p:nvSpPr>
-        <p:spPr>
-          <a:xfrm>
-            <a:off x="6461607" y="1828800"/>
-            <a:ext cx="457200" cy="457200"/>
-          </a:xfrm>
-          <a:prstGeom prst="ellipse">
-            <a:avLst/>
-          </a:prstGeom>
-          <a:solidFill>
-            <a:srgbClr val="E0463A"/>
-          </a:solidFill>
-          <a:ln>
-            <a:noFill/>
-          </a:ln>
-          <a:effectLst/>
-        </p:spPr>
-        <p:style>
-          <a:lnRef idx="1">
-            <a:schemeClr val="accent1"/>
-          </a:lnRef>
-          <a:fillRef idx="3">
-            <a:schemeClr val="accent1"/>
-          </a:fillRef>
-          <a:effectRef idx="2">
-            <a:schemeClr val="accent1"/>
-          </a:effectRef>
-          <a:fontRef idx="minor">
-            <a:schemeClr val="lt1"/>
-          </a:fontRef>
-        </p:style>
-        <p:txBody>
-          <a:bodyPr rtlCol="0" anchor="ctr" lIns="0" rIns="0" tIns="0" bIns="0"/>
-          <a:lstStyle/>
-          <a:p>
-            <a:pPr algn="ctr"/>
-            <a:r>
-              <a:rPr sz="1500" b="1">
-                <a:solidFill>
-                  <a:srgbClr val="FFFFFF"/>
-                </a:solidFill>
-                <a:latin typeface="Calibri"/>
-              </a:rPr>
-              <a:t>2</a:t>
-            </a:r>
-          </a:p>
-        </p:txBody>
-      </p:sp>
-      <p:sp>
-        <p:nvSpPr>
-          <p:cNvPr id="12" name="TextBox 11"/>
-          <p:cNvSpPr txBox="1"/>
-          <p:nvPr/>
-        </p:nvSpPr>
-        <p:spPr>
-          <a:xfrm>
-            <a:off x="7055967" y="1801368"/>
-            <a:ext cx="4404207" cy="512064"/>
-          </a:xfrm>
-          <a:prstGeom prst="rect">
-            <a:avLst/>
-          </a:prstGeom>
-          <a:noFill/>
-        </p:spPr>
-        <p:txBody>
-          <a:bodyPr wrap="square" anchor="ctr" lIns="0" rIns="0" tIns="0" bIns="0"/>
-          <a:lstStyle/>
-          <a:p>
-            <a:pPr algn="l"/>
-            <a:r>
-              <a:rPr sz="1900" b="1" i="0">
-                <a:solidFill>
-                  <a:srgbClr val="03306E"/>
-                </a:solidFill>
-                <a:latin typeface="Calibri"/>
-              </a:rPr>
-              <a:t>Show what you know</a:t>
-            </a:r>
-          </a:p>
-        </p:txBody>
-      </p:sp>
-      <p:sp>
-        <p:nvSpPr>
-          <p:cNvPr id="13" name="TextBox 12"/>
-          <p:cNvSpPr txBox="1"/>
-          <p:nvPr/>
-        </p:nvSpPr>
-        <p:spPr>
-          <a:xfrm>
-            <a:off x="6461607" y="2468880"/>
-            <a:ext cx="4952847" cy="1143000"/>
-          </a:xfrm>
-          <a:prstGeom prst="rect">
-            <a:avLst/>
-          </a:prstGeom>
-          <a:noFill/>
-        </p:spPr>
-        <p:txBody>
-          <a:bodyPr wrap="square" anchor="t" lIns="0" rIns="0" tIns="0" bIns="0"/>
-          <a:lstStyle/>
-          <a:p>
-            <a:pPr algn="l"/>
-            <a:r>
-              <a:rPr sz="2000" b="0" i="0">
-                <a:solidFill>
-                  <a:srgbClr val="202122"/>
-                </a:solidFill>
-                <a:latin typeface="Calibri"/>
-              </a:rPr>
-              <a:t>Work within your competence, keep learning, know the law.</a:t>
-            </a:r>
-          </a:p>
-        </p:txBody>
-      </p:sp>
-      <p:sp>
-        <p:nvSpPr>
-          <p:cNvPr id="14" name="Rounded Rectangle 13"/>
-          <p:cNvSpPr/>
-          <p:nvPr/>
-        </p:nvSpPr>
-        <p:spPr>
-          <a:xfrm>
-            <a:off x="548640" y="4023360"/>
-            <a:ext cx="5410047" cy="2148840"/>
-          </a:xfrm>
-          <a:prstGeom prst="roundRect">
-            <a:avLst>
-              <a:gd name="adj" fmla="val 6000"/>
-            </a:avLst>
-          </a:prstGeom>
-          <a:solidFill>
-            <a:srgbClr val="EAF3FF"/>
-          </a:solidFill>
-          <a:ln>
-            <a:noFill/>
-          </a:ln>
-          <a:effectLst/>
-        </p:spPr>
-        <p:style>
-          <a:lnRef idx="1">
-            <a:schemeClr val="accent1"/>
-          </a:lnRef>
-          <a:fillRef idx="3">
-            <a:schemeClr val="accent1"/>
-          </a:fillRef>
-          <a:effectRef idx="2">
-            <a:schemeClr val="accent1"/>
-          </a:effectRef>
-          <a:fontRef idx="minor">
-            <a:schemeClr val="lt1"/>
-          </a:fontRef>
-        </p:style>
-        <p:txBody>
-          <a:bodyPr rtlCol="0" anchor="ctr"/>
-          <a:lstStyle/>
-          <a:p/>
-        </p:txBody>
-      </p:sp>
-      <p:sp>
-        <p:nvSpPr>
-          <p:cNvPr id="15" name="Oval 14"/>
-          <p:cNvSpPr/>
-          <p:nvPr/>
-        </p:nvSpPr>
-        <p:spPr>
-          <a:xfrm>
-            <a:off x="777240" y="4251960"/>
-            <a:ext cx="457200" cy="457200"/>
-          </a:xfrm>
-          <a:prstGeom prst="ellipse">
-            <a:avLst/>
-          </a:prstGeom>
-          <a:solidFill>
-            <a:srgbClr val="E0463A"/>
-          </a:solidFill>
-          <a:ln>
-            <a:noFill/>
-          </a:ln>
-          <a:effectLst/>
-        </p:spPr>
-        <p:style>
-          <a:lnRef idx="1">
-            <a:schemeClr val="accent1"/>
-          </a:lnRef>
-          <a:fillRef idx="3">
-            <a:schemeClr val="accent1"/>
-          </a:fillRef>
-          <a:effectRef idx="2">
-            <a:schemeClr val="accent1"/>
-          </a:effectRef>
-          <a:fontRef idx="minor">
-            <a:schemeClr val="lt1"/>
-          </a:fontRef>
-        </p:style>
-        <p:txBody>
-          <a:bodyPr rtlCol="0" anchor="ctr" lIns="0" rIns="0" tIns="0" bIns="0"/>
-          <a:lstStyle/>
-          <a:p>
-            <a:pPr algn="ctr"/>
-            <a:r>
-              <a:rPr sz="1500" b="1">
-                <a:solidFill>
-                  <a:srgbClr val="FFFFFF"/>
-                </a:solidFill>
-                <a:latin typeface="Calibri"/>
-              </a:rPr>
-              <a:t>3</a:t>
-            </a:r>
-          </a:p>
-        </p:txBody>
-      </p:sp>
-      <p:sp>
-        <p:nvSpPr>
-          <p:cNvPr id="16" name="TextBox 15"/>
-          <p:cNvSpPr txBox="1"/>
-          <p:nvPr/>
-        </p:nvSpPr>
-        <p:spPr>
-          <a:xfrm>
-            <a:off x="1371600" y="4224528"/>
-            <a:ext cx="4404207" cy="512064"/>
-          </a:xfrm>
-          <a:prstGeom prst="rect">
-            <a:avLst/>
-          </a:prstGeom>
-          <a:noFill/>
-        </p:spPr>
-        <p:txBody>
-          <a:bodyPr wrap="square" anchor="ctr" lIns="0" rIns="0" tIns="0" bIns="0"/>
-          <a:lstStyle/>
-          <a:p>
-            <a:pPr algn="l"/>
-            <a:r>
-              <a:rPr sz="1900" b="1" i="0">
-                <a:solidFill>
-                  <a:srgbClr val="03306E"/>
-                </a:solidFill>
-                <a:latin typeface="Calibri"/>
-              </a:rPr>
-              <a:t>Respect the organisation</a:t>
-            </a:r>
-          </a:p>
-        </p:txBody>
-      </p:sp>
-      <p:sp>
-        <p:nvSpPr>
-          <p:cNvPr id="17" name="TextBox 16"/>
-          <p:cNvSpPr txBox="1"/>
-          <p:nvPr/>
-        </p:nvSpPr>
-        <p:spPr>
-          <a:xfrm>
-            <a:off x="777240" y="4892040"/>
-            <a:ext cx="4952847" cy="1143000"/>
-          </a:xfrm>
-          <a:prstGeom prst="rect">
-            <a:avLst/>
-          </a:prstGeom>
-          <a:noFill/>
-        </p:spPr>
-        <p:txBody>
-          <a:bodyPr wrap="square" anchor="t" lIns="0" rIns="0" tIns="0" bIns="0"/>
-          <a:lstStyle/>
-          <a:p>
-            <a:pPr algn="l"/>
-            <a:r>
-              <a:rPr sz="2000" b="0" i="0">
-                <a:solidFill>
-                  <a:srgbClr val="202122"/>
-                </a:solidFill>
-                <a:latin typeface="Calibri"/>
-              </a:rPr>
-              <a:t>Due care, no disclosures for personal gain, do not exploit inexperience.</a:t>
-            </a:r>
-          </a:p>
-        </p:txBody>
-      </p:sp>
-      <p:sp>
-        <p:nvSpPr>
-          <p:cNvPr id="18" name="Rounded Rectangle 17"/>
-          <p:cNvSpPr/>
-          <p:nvPr/>
-        </p:nvSpPr>
-        <p:spPr>
-          <a:xfrm>
-            <a:off x="6233007" y="4023360"/>
-            <a:ext cx="5410047" cy="2148840"/>
-          </a:xfrm>
-          <a:prstGeom prst="roundRect">
-            <a:avLst>
-              <a:gd name="adj" fmla="val 6000"/>
-            </a:avLst>
-          </a:prstGeom>
-          <a:solidFill>
-            <a:srgbClr val="EAF3FF"/>
-          </a:solidFill>
-          <a:ln>
-            <a:noFill/>
-          </a:ln>
-          <a:effectLst/>
-        </p:spPr>
-        <p:style>
-          <a:lnRef idx="1">
-            <a:schemeClr val="accent1"/>
-          </a:lnRef>
-          <a:fillRef idx="3">
-            <a:schemeClr val="accent1"/>
-          </a:fillRef>
-          <a:effectRef idx="2">
-            <a:schemeClr val="accent1"/>
-          </a:effectRef>
-          <a:fontRef idx="minor">
-            <a:schemeClr val="lt1"/>
-          </a:fontRef>
-        </p:style>
-        <p:txBody>
-          <a:bodyPr rtlCol="0" anchor="ctr"/>
-          <a:lstStyle/>
-          <a:p/>
-        </p:txBody>
-      </p:sp>
-      <p:sp>
-        <p:nvSpPr>
-          <p:cNvPr id="19" name="Oval 18"/>
-          <p:cNvSpPr/>
-          <p:nvPr/>
-        </p:nvSpPr>
-        <p:spPr>
-          <a:xfrm>
-            <a:off x="6461607" y="4251960"/>
-            <a:ext cx="457200" cy="457200"/>
-          </a:xfrm>
-          <a:prstGeom prst="ellipse">
-            <a:avLst/>
-          </a:prstGeom>
-          <a:solidFill>
-            <a:srgbClr val="E0463A"/>
-          </a:solidFill>
-          <a:ln>
-            <a:noFill/>
-          </a:ln>
-          <a:effectLst/>
-        </p:spPr>
-        <p:style>
-          <a:lnRef idx="1">
-            <a:schemeClr val="accent1"/>
-          </a:lnRef>
-          <a:fillRef idx="3">
-            <a:schemeClr val="accent1"/>
-          </a:fillRef>
-          <a:effectRef idx="2">
-            <a:schemeClr val="accent1"/>
-          </a:effectRef>
-          <a:fontRef idx="minor">
-            <a:schemeClr val="lt1"/>
-          </a:fontRef>
-        </p:style>
-        <p:txBody>
-          <a:bodyPr rtlCol="0" anchor="ctr" lIns="0" rIns="0" tIns="0" bIns="0"/>
-          <a:lstStyle/>
-          <a:p>
-            <a:pPr algn="ctr"/>
-            <a:r>
-              <a:rPr sz="1500" b="1">
-                <a:solidFill>
-                  <a:srgbClr val="FFFFFF"/>
-                </a:solidFill>
-                <a:latin typeface="Calibri"/>
-              </a:rPr>
-              <a:t>4</a:t>
-            </a:r>
-          </a:p>
-        </p:txBody>
-      </p:sp>
-      <p:sp>
-        <p:nvSpPr>
-          <p:cNvPr id="20" name="TextBox 19"/>
-          <p:cNvSpPr txBox="1"/>
-          <p:nvPr/>
-        </p:nvSpPr>
-        <p:spPr>
-          <a:xfrm>
-            <a:off x="7055967" y="4224528"/>
-            <a:ext cx="4404207" cy="512064"/>
-          </a:xfrm>
-          <a:prstGeom prst="rect">
-            <a:avLst/>
-          </a:prstGeom>
-          <a:noFill/>
-        </p:spPr>
-        <p:txBody>
-          <a:bodyPr wrap="square" anchor="ctr" lIns="0" rIns="0" tIns="0" bIns="0"/>
-          <a:lstStyle/>
-          <a:p>
-            <a:pPr algn="l"/>
-            <a:r>
-              <a:rPr sz="1900" b="1" i="0">
-                <a:solidFill>
-                  <a:srgbClr val="03306E"/>
-                </a:solidFill>
-                <a:latin typeface="Calibri"/>
-              </a:rPr>
-              <a:t>Keep IT professional</a:t>
-            </a:r>
-          </a:p>
-        </p:txBody>
-      </p:sp>
-      <p:sp>
-        <p:nvSpPr>
-          <p:cNvPr id="21" name="TextBox 20"/>
-          <p:cNvSpPr txBox="1"/>
-          <p:nvPr/>
-        </p:nvSpPr>
-        <p:spPr>
-          <a:xfrm>
-            <a:off x="6461607" y="4892040"/>
-            <a:ext cx="4952847" cy="1143000"/>
-          </a:xfrm>
-          <a:prstGeom prst="rect">
-            <a:avLst/>
-          </a:prstGeom>
-          <a:noFill/>
-        </p:spPr>
-        <p:txBody>
-          <a:bodyPr wrap="square" anchor="t" lIns="0" rIns="0" tIns="0" bIns="0"/>
-          <a:lstStyle/>
-          <a:p>
-            <a:pPr algn="l"/>
-            <a:r>
-              <a:rPr sz="2000" b="0" i="0">
-                <a:solidFill>
-                  <a:srgbClr val="202122"/>
-                </a:solidFill>
-                <a:latin typeface="Calibri"/>
-              </a:rPr>
-              <a:t>Uphold the profession, raise standards, support colleagues.</a:t>
-            </a:r>
-          </a:p>
-        </p:txBody>
-      </p:sp>
-    </p:spTree>
-  </p:cSld>
-  <p:clrMapOvr>
-    <a:masterClrMapping/>
-  </p:clrMapOvr>
-</p:sld>
-</file>
-
-<file path=ppt/slides/slide7.xml><?xml version="1.0" encoding="utf-8"?>
-<p:sld xmlns:a="http://schemas.openxmlformats.org/drawingml/2006/main" xmlns:p="http://schemas.openxmlformats.org/presentationml/2006/main" xmlns:r="http://schemas.openxmlformats.org/officeDocument/2006/relationships">
-  <p:cSld>
-    <p:bg>
-      <p:bgPr>
-        <a:solidFill>
-          <a:srgbClr val="FFFFFF"/>
-        </a:solidFill>
-        <a:effectLst/>
-      </p:bgPr>
-    </p:bg>
-    <p:spTree>
-      <p:nvGrpSpPr>
-        <p:cNvPr id="1" name=""/>
-        <p:cNvGrpSpPr/>
-        <p:nvPr/>
-      </p:nvGrpSpPr>
-      <p:grpSpPr/>
-      <p:sp>
-        <p:nvSpPr>
-          <p:cNvPr id="2" name="TextBox 1"/>
-          <p:cNvSpPr txBox="1"/>
-          <p:nvPr/>
-        </p:nvSpPr>
-        <p:spPr>
-          <a:xfrm>
-            <a:off x="548640" y="320040"/>
-            <a:ext cx="11094415" cy="274320"/>
-          </a:xfrm>
-          <a:prstGeom prst="rect">
-            <a:avLst/>
-          </a:prstGeom>
-          <a:noFill/>
-        </p:spPr>
-        <p:txBody>
-          <a:bodyPr wrap="square" anchor="t" lIns="0" rIns="0" tIns="0" bIns="0"/>
-          <a:lstStyle/>
-          <a:p>
-            <a:pPr algn="l"/>
-            <a:r>
-              <a:rPr sz="1100" b="1" i="0">
-                <a:solidFill>
-                  <a:srgbClr val="54595D"/>
-                </a:solidFill>
-                <a:latin typeface="Calibri"/>
-              </a:rPr>
-              <a:t>CYBER SECURITY  ·  Cyber Security Content Area 1</a:t>
-            </a:r>
-          </a:p>
-        </p:txBody>
-      </p:sp>
-      <p:sp>
-        <p:nvSpPr>
-          <p:cNvPr id="3" name="TextBox 2"/>
-          <p:cNvSpPr txBox="1"/>
-          <p:nvPr/>
-        </p:nvSpPr>
-        <p:spPr>
-          <a:xfrm>
-            <a:off x="548640" y="566928"/>
-            <a:ext cx="11094415" cy="822960"/>
-          </a:xfrm>
-          <a:prstGeom prst="rect">
-            <a:avLst/>
-          </a:prstGeom>
-          <a:noFill/>
-        </p:spPr>
-        <p:txBody>
-          <a:bodyPr wrap="square" anchor="ctr" lIns="0" rIns="0" tIns="0" bIns="0"/>
-          <a:lstStyle/>
-          <a:p>
-            <a:pPr algn="l"/>
-            <a:r>
-              <a:rPr sz="3200" b="1" i="0">
-                <a:solidFill>
-                  <a:srgbClr val="03306E"/>
-                </a:solidFill>
-                <a:latin typeface="Cambria"/>
-              </a:rPr>
-              <a:t>Check your understanding</a:t>
-            </a:r>
-          </a:p>
-        </p:txBody>
-      </p:sp>
-      <p:sp>
-        <p:nvSpPr>
-          <p:cNvPr id="4" name="TextBox 3"/>
-          <p:cNvSpPr txBox="1"/>
-          <p:nvPr/>
-        </p:nvSpPr>
-        <p:spPr>
-          <a:xfrm>
-            <a:off x="548640" y="6446520"/>
-            <a:ext cx="8229600" cy="274320"/>
-          </a:xfrm>
-          <a:prstGeom prst="rect">
-            <a:avLst/>
-          </a:prstGeom>
-          <a:noFill/>
-        </p:spPr>
-        <p:txBody>
-          <a:bodyPr wrap="square" anchor="t" lIns="0" rIns="0" tIns="0" bIns="0"/>
-          <a:lstStyle/>
-          <a:p>
-            <a:pPr algn="l"/>
-            <a:r>
-              <a:rPr sz="1000" b="0" i="0">
-                <a:solidFill>
-                  <a:srgbClr val="54595D"/>
-                </a:solidFill>
-                <a:latin typeface="Calibri"/>
-              </a:rPr>
-              <a:t>Digital Support and Security T Level  ·  Cyber Law and Ethics</a:t>
-            </a:r>
-          </a:p>
-        </p:txBody>
-      </p:sp>
-      <p:sp>
-        <p:nvSpPr>
-          <p:cNvPr id="5" name="TextBox 4"/>
-          <p:cNvSpPr txBox="1"/>
-          <p:nvPr/>
-        </p:nvSpPr>
-        <p:spPr>
-          <a:xfrm>
-            <a:off x="10728655" y="6446520"/>
-            <a:ext cx="914400" cy="274320"/>
-          </a:xfrm>
-          <a:prstGeom prst="rect">
-            <a:avLst/>
-          </a:prstGeom>
-          <a:noFill/>
-        </p:spPr>
-        <p:txBody>
-          <a:bodyPr wrap="square" anchor="t" lIns="0" rIns="0" tIns="0" bIns="0"/>
-          <a:lstStyle/>
-          <a:p>
-            <a:pPr algn="r"/>
-            <a:r>
-              <a:rPr sz="1000" b="0" i="0">
-                <a:solidFill>
-                  <a:srgbClr val="54595D"/>
-                </a:solidFill>
-                <a:latin typeface="Calibri"/>
-              </a:rPr>
-              <a:t>7</a:t>
-            </a:r>
-          </a:p>
-        </p:txBody>
-      </p:sp>
-      <p:sp>
-        <p:nvSpPr>
-          <p:cNvPr id="6" name="Oval 5"/>
-          <p:cNvSpPr/>
-          <p:nvPr/>
-        </p:nvSpPr>
-        <p:spPr>
-          <a:xfrm>
-            <a:off x="548640" y="1618488"/>
-            <a:ext cx="411480" cy="411480"/>
-          </a:xfrm>
-          <a:prstGeom prst="ellipse">
-            <a:avLst/>
-          </a:prstGeom>
-          <a:solidFill>
-            <a:srgbClr val="E0463A"/>
-          </a:solidFill>
-          <a:ln>
-            <a:noFill/>
-          </a:ln>
-          <a:effectLst/>
-        </p:spPr>
-        <p:style>
-          <a:lnRef idx="1">
-            <a:schemeClr val="accent1"/>
-          </a:lnRef>
-          <a:fillRef idx="3">
-            <a:schemeClr val="accent1"/>
-          </a:fillRef>
-          <a:effectRef idx="2">
-            <a:schemeClr val="accent1"/>
-          </a:effectRef>
-          <a:fontRef idx="minor">
-            <a:schemeClr val="lt1"/>
-          </a:fontRef>
-        </p:style>
-        <p:txBody>
-          <a:bodyPr rtlCol="0" anchor="ctr" lIns="0" rIns="0" tIns="0" bIns="0"/>
-          <a:lstStyle/>
-          <a:p>
-            <a:pPr algn="ctr"/>
-            <a:r>
-              <a:rPr sz="1400" b="1">
-                <a:solidFill>
-                  <a:srgbClr val="FFFFFF"/>
-                </a:solidFill>
-                <a:latin typeface="Calibri"/>
-              </a:rPr>
-              <a:t>1</a:t>
-            </a:r>
-          </a:p>
-        </p:txBody>
-      </p:sp>
-      <p:sp>
-        <p:nvSpPr>
-          <p:cNvPr id="7" name="TextBox 6"/>
-          <p:cNvSpPr txBox="1"/>
-          <p:nvPr/>
-        </p:nvSpPr>
-        <p:spPr>
-          <a:xfrm>
-            <a:off x="1234440" y="1600200"/>
-            <a:ext cx="10408615" cy="1030986"/>
-          </a:xfrm>
-          <a:prstGeom prst="rect">
-            <a:avLst/>
-          </a:prstGeom>
-          <a:noFill/>
-        </p:spPr>
-        <p:txBody>
-          <a:bodyPr wrap="square" anchor="t" lIns="0" rIns="0" tIns="0" bIns="0"/>
-          <a:lstStyle/>
-          <a:p>
-            <a:pPr algn="l"/>
-            <a:r>
-              <a:rPr sz="2200" b="0" i="0">
-                <a:solidFill>
-                  <a:srgbClr val="202122"/>
-                </a:solidFill>
-                <a:latin typeface="Calibri"/>
-              </a:rPr>
-              <a:t>Which Act makes supplying hacking tools an offence?</a:t>
-            </a:r>
-          </a:p>
-        </p:txBody>
-      </p:sp>
-      <p:sp>
-        <p:nvSpPr>
-          <p:cNvPr id="8" name="Oval 7"/>
-          <p:cNvSpPr/>
-          <p:nvPr/>
-        </p:nvSpPr>
-        <p:spPr>
-          <a:xfrm>
-            <a:off x="548640" y="2814066"/>
-            <a:ext cx="411480" cy="411480"/>
-          </a:xfrm>
-          <a:prstGeom prst="ellipse">
-            <a:avLst/>
-          </a:prstGeom>
-          <a:solidFill>
-            <a:srgbClr val="E0463A"/>
-          </a:solidFill>
-          <a:ln>
-            <a:noFill/>
-          </a:ln>
-          <a:effectLst/>
-        </p:spPr>
-        <p:style>
-          <a:lnRef idx="1">
-            <a:schemeClr val="accent1"/>
-          </a:lnRef>
-          <a:fillRef idx="3">
-            <a:schemeClr val="accent1"/>
-          </a:fillRef>
-          <a:effectRef idx="2">
-            <a:schemeClr val="accent1"/>
-          </a:effectRef>
-          <a:fontRef idx="minor">
-            <a:schemeClr val="lt1"/>
-          </a:fontRef>
-        </p:style>
-        <p:txBody>
-          <a:bodyPr rtlCol="0" anchor="ctr" lIns="0" rIns="0" tIns="0" bIns="0"/>
-          <a:lstStyle/>
-          <a:p>
-            <a:pPr algn="ctr"/>
-            <a:r>
-              <a:rPr sz="1400" b="1">
-                <a:solidFill>
-                  <a:srgbClr val="FFFFFF"/>
-                </a:solidFill>
-                <a:latin typeface="Calibri"/>
-              </a:rPr>
-              <a:t>2</a:t>
-            </a:r>
-          </a:p>
-        </p:txBody>
-      </p:sp>
-      <p:sp>
-        <p:nvSpPr>
-          <p:cNvPr id="9" name="TextBox 8"/>
-          <p:cNvSpPr txBox="1"/>
-          <p:nvPr/>
-        </p:nvSpPr>
-        <p:spPr>
-          <a:xfrm>
-            <a:off x="1234440" y="2795778"/>
-            <a:ext cx="10408615" cy="1030986"/>
-          </a:xfrm>
-          <a:prstGeom prst="rect">
-            <a:avLst/>
-          </a:prstGeom>
-          <a:noFill/>
-        </p:spPr>
-        <p:txBody>
-          <a:bodyPr wrap="square" anchor="t" lIns="0" rIns="0" tIns="0" bIns="0"/>
-          <a:lstStyle/>
-          <a:p>
-            <a:pPr algn="l"/>
-            <a:r>
-              <a:rPr sz="2200" b="0" i="0">
-                <a:solidFill>
-                  <a:srgbClr val="202122"/>
-                </a:solidFill>
-                <a:latin typeface="Calibri"/>
-              </a:rPr>
-              <a:t>Which regulations set a security baseline for operators of essential services?</a:t>
-            </a:r>
-          </a:p>
-        </p:txBody>
-      </p:sp>
-      <p:sp>
-        <p:nvSpPr>
-          <p:cNvPr id="10" name="Oval 9"/>
-          <p:cNvSpPr/>
-          <p:nvPr/>
-        </p:nvSpPr>
-        <p:spPr>
-          <a:xfrm>
-            <a:off x="548640" y="4009644"/>
-            <a:ext cx="411480" cy="411480"/>
-          </a:xfrm>
-          <a:prstGeom prst="ellipse">
-            <a:avLst/>
-          </a:prstGeom>
-          <a:solidFill>
-            <a:srgbClr val="E0463A"/>
-          </a:solidFill>
-          <a:ln>
-            <a:noFill/>
-          </a:ln>
-          <a:effectLst/>
-        </p:spPr>
-        <p:style>
-          <a:lnRef idx="1">
-            <a:schemeClr val="accent1"/>
-          </a:lnRef>
-          <a:fillRef idx="3">
-            <a:schemeClr val="accent1"/>
-          </a:fillRef>
-          <a:effectRef idx="2">
-            <a:schemeClr val="accent1"/>
-          </a:effectRef>
-          <a:fontRef idx="minor">
-            <a:schemeClr val="lt1"/>
-          </a:fontRef>
-        </p:style>
-        <p:txBody>
-          <a:bodyPr rtlCol="0" anchor="ctr" lIns="0" rIns="0" tIns="0" bIns="0"/>
-          <a:lstStyle/>
-          <a:p>
-            <a:pPr algn="ctr"/>
-            <a:r>
-              <a:rPr sz="1400" b="1">
-                <a:solidFill>
-                  <a:srgbClr val="FFFFFF"/>
-                </a:solidFill>
-                <a:latin typeface="Calibri"/>
-              </a:rPr>
-              <a:t>3</a:t>
-            </a:r>
-          </a:p>
-        </p:txBody>
-      </p:sp>
-      <p:sp>
-        <p:nvSpPr>
-          <p:cNvPr id="11" name="TextBox 10"/>
-          <p:cNvSpPr txBox="1"/>
-          <p:nvPr/>
-        </p:nvSpPr>
-        <p:spPr>
-          <a:xfrm>
-            <a:off x="1234440" y="3991356"/>
-            <a:ext cx="10408615" cy="1030986"/>
-          </a:xfrm>
-          <a:prstGeom prst="rect">
-            <a:avLst/>
-          </a:prstGeom>
-          <a:noFill/>
-        </p:spPr>
-        <p:txBody>
-          <a:bodyPr wrap="square" anchor="t" lIns="0" rIns="0" tIns="0" bIns="0"/>
-          <a:lstStyle/>
-          <a:p>
-            <a:pPr algn="l"/>
-            <a:r>
-              <a:rPr sz="2200" b="0" i="0">
-                <a:solidFill>
-                  <a:srgbClr val="202122"/>
-                </a:solidFill>
-                <a:latin typeface="Calibri"/>
-              </a:rPr>
-              <a:t>Which Act criminalises intercepting someone else's Wi-Fi traffic?</a:t>
-            </a:r>
-          </a:p>
-        </p:txBody>
-      </p:sp>
-      <p:sp>
-        <p:nvSpPr>
-          <p:cNvPr id="12" name="Oval 11"/>
-          <p:cNvSpPr/>
-          <p:nvPr/>
-        </p:nvSpPr>
-        <p:spPr>
-          <a:xfrm>
-            <a:off x="548640" y="5205221"/>
-            <a:ext cx="411480" cy="411480"/>
-          </a:xfrm>
-          <a:prstGeom prst="ellipse">
-            <a:avLst/>
-          </a:prstGeom>
-          <a:solidFill>
-            <a:srgbClr val="E0463A"/>
-          </a:solidFill>
-          <a:ln>
-            <a:noFill/>
-          </a:ln>
-          <a:effectLst/>
-        </p:spPr>
-        <p:style>
-          <a:lnRef idx="1">
-            <a:schemeClr val="accent1"/>
-          </a:lnRef>
-          <a:fillRef idx="3">
-            <a:schemeClr val="accent1"/>
-          </a:fillRef>
-          <a:effectRef idx="2">
-            <a:schemeClr val="accent1"/>
-          </a:effectRef>
-          <a:fontRef idx="minor">
-            <a:schemeClr val="lt1"/>
-          </a:fontRef>
-        </p:style>
-        <p:txBody>
-          <a:bodyPr rtlCol="0" anchor="ctr" lIns="0" rIns="0" tIns="0" bIns="0"/>
-          <a:lstStyle/>
-          <a:p>
-            <a:pPr algn="ctr"/>
-            <a:r>
-              <a:rPr sz="1400" b="1">
-                <a:solidFill>
-                  <a:srgbClr val="FFFFFF"/>
-                </a:solidFill>
-                <a:latin typeface="Calibri"/>
-              </a:rPr>
-              <a:t>4</a:t>
-            </a:r>
-          </a:p>
-        </p:txBody>
-      </p:sp>
-      <p:sp>
-        <p:nvSpPr>
-          <p:cNvPr id="13" name="TextBox 12"/>
-          <p:cNvSpPr txBox="1"/>
-          <p:nvPr/>
-        </p:nvSpPr>
-        <p:spPr>
-          <a:xfrm>
-            <a:off x="1234440" y="5186933"/>
-            <a:ext cx="10408615" cy="1030986"/>
-          </a:xfrm>
-          <a:prstGeom prst="rect">
-            <a:avLst/>
-          </a:prstGeom>
-          <a:noFill/>
-        </p:spPr>
-        <p:txBody>
-          <a:bodyPr wrap="square" anchor="t" lIns="0" rIns="0" tIns="0" bIns="0"/>
-          <a:lstStyle/>
-          <a:p>
-            <a:pPr algn="l"/>
-            <a:r>
-              <a:rPr sz="2200" b="0" i="0">
-                <a:solidFill>
-                  <a:srgbClr val="202122"/>
-                </a:solidFill>
-                <a:latin typeface="Calibri"/>
-              </a:rPr>
-              <a:t>Name two principles of the UK Cyber Security Council Code of Ethics.</a:t>
-            </a:r>
-          </a:p>
-        </p:txBody>
-      </p:sp>
-    </p:spTree>
-  </p:cSld>
-  <p:clrMapOvr>
-    <a:masterClrMapping/>
-  </p:clrMapOvr>
-</p:sld>
-</file>
-
 <file path=ppt/slides/slide8.xml><?xml version="1.0" encoding="utf-8"?>
 <p:sld xmlns:a="http://schemas.openxmlformats.org/drawingml/2006/main" xmlns:p="http://schemas.openxmlformats.org/presentationml/2006/main" xmlns:r="http://schemas.openxmlformats.org/officeDocument/2006/relationships">
   <p:cSld>
@@ -8292,7 +11620,7 @@
                 </a:solidFill>
                 <a:latin typeface="Cambria"/>
               </a:rPr>
-              <a:t>Answers</a:t>
+              <a:t>Quick check: Legislation for cyber security (2)</a:t>
             </a:r>
           </a:p>
         </p:txBody>
@@ -8371,8 +11699,8 @@
         </p:nvSpPr>
         <p:spPr>
           <a:xfrm>
-            <a:off x="548640" y="1618488"/>
-            <a:ext cx="411480" cy="411480"/>
+            <a:off x="548640" y="1691640"/>
+            <a:ext cx="502920" cy="502920"/>
           </a:xfrm>
           <a:prstGeom prst="ellipse">
             <a:avLst/>
@@ -8405,7 +11733,7 @@
           <a:p>
             <a:pPr algn="ctr"/>
             <a:r>
-              <a:rPr sz="1400" b="1">
+              <a:rPr sz="1600" b="1">
                 <a:solidFill>
                   <a:srgbClr val="FFFFFF"/>
                 </a:solidFill>
@@ -8424,8 +11752,8 @@
         </p:nvSpPr>
         <p:spPr>
           <a:xfrm>
-            <a:off x="1234440" y="1600200"/>
-            <a:ext cx="10408615" cy="1030986"/>
+            <a:off x="1371600" y="1645920"/>
+            <a:ext cx="10271455" cy="1188720"/>
           </a:xfrm>
           <a:prstGeom prst="rect">
             <a:avLst/>
@@ -8438,24 +11766,13 @@
           <a:p>
             <a:pPr algn="l"/>
             <a:r>
-              <a:rPr sz="1800" b="0" i="0">
-                <a:solidFill>
-                  <a:srgbClr val="54595D"/>
-                </a:solidFill>
-                <a:latin typeface="Calibri"/>
-              </a:rPr>
-              <a:t>Which Act makes supplying hacking tools an offence?</a:t>
-            </a:r>
-          </a:p>
-          <a:p>
-            <a:r>
-              <a:rPr sz="1800" b="1">
-                <a:solidFill>
-                  <a:srgbClr val="03306E"/>
-                </a:solidFill>
-                <a:latin typeface="Calibri"/>
-              </a:rPr>
-              <a:t>The Computer Misuse Act 1990.</a:t>
+              <a:rPr sz="2400" b="0" i="0">
+                <a:solidFill>
+                  <a:srgbClr val="202122"/>
+                </a:solidFill>
+                <a:latin typeface="Calibri"/>
+              </a:rPr>
+              <a:t>Which regulations cover operators of essential services?</a:t>
             </a:r>
           </a:p>
         </p:txBody>
@@ -8468,8 +11785,8 @@
         </p:nvSpPr>
         <p:spPr>
           <a:xfrm>
-            <a:off x="548640" y="2814066"/>
-            <a:ext cx="411480" cy="411480"/>
+            <a:off x="548640" y="3108960"/>
+            <a:ext cx="502920" cy="502920"/>
           </a:xfrm>
           <a:prstGeom prst="ellipse">
             <a:avLst/>
@@ -8502,7 +11819,7 @@
           <a:p>
             <a:pPr algn="ctr"/>
             <a:r>
-              <a:rPr sz="1400" b="1">
+              <a:rPr sz="1600" b="1">
                 <a:solidFill>
                   <a:srgbClr val="FFFFFF"/>
                 </a:solidFill>
@@ -8521,8 +11838,8 @@
         </p:nvSpPr>
         <p:spPr>
           <a:xfrm>
-            <a:off x="1234440" y="2795778"/>
-            <a:ext cx="10408615" cy="1030986"/>
+            <a:off x="1371600" y="3063240"/>
+            <a:ext cx="10271455" cy="1188720"/>
           </a:xfrm>
           <a:prstGeom prst="rect">
             <a:avLst/>
@@ -8535,24 +11852,13 @@
           <a:p>
             <a:pPr algn="l"/>
             <a:r>
-              <a:rPr sz="1800" b="0" i="0">
-                <a:solidFill>
-                  <a:srgbClr val="54595D"/>
-                </a:solidFill>
-                <a:latin typeface="Calibri"/>
-              </a:rPr>
-              <a:t>Which regulations set a security baseline for operators of essential services?</a:t>
-            </a:r>
-          </a:p>
-          <a:p>
-            <a:r>
-              <a:rPr sz="1800" b="1">
-                <a:solidFill>
-                  <a:srgbClr val="03306E"/>
-                </a:solidFill>
-                <a:latin typeface="Calibri"/>
-              </a:rPr>
-              <a:t>The Network and Information Systems (NIS) Regulations 2018.</a:t>
+              <a:rPr sz="2400" b="0" i="0">
+                <a:solidFill>
+                  <a:srgbClr val="202122"/>
+                </a:solidFill>
+                <a:latin typeface="Calibri"/>
+              </a:rPr>
+              <a:t>Which Act makes intercepting wireless communications an offence?</a:t>
             </a:r>
           </a:p>
         </p:txBody>
@@ -8565,8 +11871,8 @@
         </p:nvSpPr>
         <p:spPr>
           <a:xfrm>
-            <a:off x="548640" y="4009644"/>
-            <a:ext cx="411480" cy="411480"/>
+            <a:off x="548640" y="4526280"/>
+            <a:ext cx="502920" cy="502920"/>
           </a:xfrm>
           <a:prstGeom prst="ellipse">
             <a:avLst/>
@@ -8599,7 +11905,7 @@
           <a:p>
             <a:pPr algn="ctr"/>
             <a:r>
-              <a:rPr sz="1400" b="1">
+              <a:rPr sz="1600" b="1">
                 <a:solidFill>
                   <a:srgbClr val="FFFFFF"/>
                 </a:solidFill>
@@ -8618,8 +11924,8 @@
         </p:nvSpPr>
         <p:spPr>
           <a:xfrm>
-            <a:off x="1234440" y="3991356"/>
-            <a:ext cx="10408615" cy="1030986"/>
+            <a:off x="1371600" y="4480560"/>
+            <a:ext cx="10271455" cy="1188720"/>
           </a:xfrm>
           <a:prstGeom prst="rect">
             <a:avLst/>
@@ -8632,121 +11938,46 @@
           <a:p>
             <a:pPr algn="l"/>
             <a:r>
-              <a:rPr sz="1800" b="0" i="0">
+              <a:rPr sz="2400" b="0" i="0">
+                <a:solidFill>
+                  <a:srgbClr val="202122"/>
+                </a:solidFill>
+                <a:latin typeface="Calibri"/>
+              </a:rPr>
+              <a:t>Is the NCSC covered by FOI requests?</a:t>
+            </a:r>
+          </a:p>
+        </p:txBody>
+      </p:sp>
+      <p:sp>
+        <p:nvSpPr>
+          <p:cNvPr id="12" name="TextBox 11"/>
+          <p:cNvSpPr txBox="1"/>
+          <p:nvPr/>
+        </p:nvSpPr>
+        <p:spPr>
+          <a:xfrm>
+            <a:off x="548640" y="5852160"/>
+            <a:ext cx="11094415" cy="365760"/>
+          </a:xfrm>
+          <a:prstGeom prst="rect">
+            <a:avLst/>
+          </a:prstGeom>
+          <a:noFill/>
+        </p:spPr>
+        <p:txBody>
+          <a:bodyPr wrap="square" anchor="t" lIns="0" rIns="0" tIns="0" bIns="0"/>
+          <a:lstStyle/>
+          <a:p>
+            <a:pPr algn="l"/>
+            <a:r>
+              <a:rPr sz="1300" b="0" i="1">
                 <a:solidFill>
                   <a:srgbClr val="54595D"/>
                 </a:solidFill>
                 <a:latin typeface="Calibri"/>
               </a:rPr>
-              <a:t>Which Act criminalises intercepting someone else's Wi-Fi traffic?</a:t>
-            </a:r>
-          </a:p>
-          <a:p>
-            <a:r>
-              <a:rPr sz="1800" b="1">
-                <a:solidFill>
-                  <a:srgbClr val="03306E"/>
-                </a:solidFill>
-                <a:latin typeface="Calibri"/>
-              </a:rPr>
-              <a:t>The Wireless Telegraphy Act 2006.</a:t>
-            </a:r>
-          </a:p>
-        </p:txBody>
-      </p:sp>
-      <p:sp>
-        <p:nvSpPr>
-          <p:cNvPr id="12" name="Oval 11"/>
-          <p:cNvSpPr/>
-          <p:nvPr/>
-        </p:nvSpPr>
-        <p:spPr>
-          <a:xfrm>
-            <a:off x="548640" y="5205221"/>
-            <a:ext cx="411480" cy="411480"/>
-          </a:xfrm>
-          <a:prstGeom prst="ellipse">
-            <a:avLst/>
-          </a:prstGeom>
-          <a:solidFill>
-            <a:srgbClr val="E0463A"/>
-          </a:solidFill>
-          <a:ln>
-            <a:noFill/>
-          </a:ln>
-          <a:effectLst/>
-        </p:spPr>
-        <p:style>
-          <a:lnRef idx="1">
-            <a:schemeClr val="accent1"/>
-          </a:lnRef>
-          <a:fillRef idx="3">
-            <a:schemeClr val="accent1"/>
-          </a:fillRef>
-          <a:effectRef idx="2">
-            <a:schemeClr val="accent1"/>
-          </a:effectRef>
-          <a:fontRef idx="minor">
-            <a:schemeClr val="lt1"/>
-          </a:fontRef>
-        </p:style>
-        <p:txBody>
-          <a:bodyPr rtlCol="0" anchor="ctr" lIns="0" rIns="0" tIns="0" bIns="0"/>
-          <a:lstStyle/>
-          <a:p>
-            <a:pPr algn="ctr"/>
-            <a:r>
-              <a:rPr sz="1400" b="1">
-                <a:solidFill>
-                  <a:srgbClr val="FFFFFF"/>
-                </a:solidFill>
-                <a:latin typeface="Calibri"/>
-              </a:rPr>
-              <a:t>4</a:t>
-            </a:r>
-          </a:p>
-        </p:txBody>
-      </p:sp>
-      <p:sp>
-        <p:nvSpPr>
-          <p:cNvPr id="13" name="TextBox 12"/>
-          <p:cNvSpPr txBox="1"/>
-          <p:nvPr/>
-        </p:nvSpPr>
-        <p:spPr>
-          <a:xfrm>
-            <a:off x="1234440" y="5186933"/>
-            <a:ext cx="10408615" cy="1030986"/>
-          </a:xfrm>
-          <a:prstGeom prst="rect">
-            <a:avLst/>
-          </a:prstGeom>
-          <a:noFill/>
-        </p:spPr>
-        <p:txBody>
-          <a:bodyPr wrap="square" anchor="t" lIns="0" rIns="0" tIns="0" bIns="0"/>
-          <a:lstStyle/>
-          <a:p>
-            <a:pPr algn="l"/>
-            <a:r>
-              <a:rPr sz="1800" b="0" i="0">
-                <a:solidFill>
-                  <a:srgbClr val="54595D"/>
-                </a:solidFill>
-                <a:latin typeface="Calibri"/>
-              </a:rPr>
-              <a:t>Name two principles of the UK Cyber Security Council Code of Ethics.</a:t>
-            </a:r>
-          </a:p>
-          <a:p>
-            <a:r>
-              <a:rPr sz="1800" b="1">
-                <a:solidFill>
-                  <a:srgbClr val="03306E"/>
-                </a:solidFill>
-                <a:latin typeface="Calibri"/>
-              </a:rPr>
-              <a:t>Any two of: credibility, integrity, professionalism, responsibility and respect.</a:t>
+              <a:t>Answer on mini whiteboards or in your book. Answers are in the speaker notes.</a:t>
             </a:r>
           </a:p>
         </p:txBody>
@@ -8838,7 +12069,7 @@
                 </a:solidFill>
                 <a:latin typeface="Cambria"/>
               </a:rPr>
-              <a:t>Activity: Ethics dilemmas</a:t>
+              <a:t>UK Cyber Security Council Code of Ethics</a:t>
             </a:r>
           </a:p>
         </p:txBody>
@@ -8911,19 +12142,116 @@
       </p:sp>
       <p:sp>
         <p:nvSpPr>
-          <p:cNvPr id="6" name="Rounded Rectangle 5"/>
+          <p:cNvPr id="6" name="TextBox 5"/>
+          <p:cNvSpPr txBox="1"/>
+          <p:nvPr/>
+        </p:nvSpPr>
+        <p:spPr>
+          <a:xfrm>
+            <a:off x="548640" y="1554480"/>
+            <a:ext cx="6720840" cy="4617720"/>
+          </a:xfrm>
+          <a:prstGeom prst="rect">
+            <a:avLst/>
+          </a:prstGeom>
+          <a:noFill/>
+        </p:spPr>
+        <p:txBody>
+          <a:bodyPr wrap="square" lIns="0" rIns="0" tIns="0" bIns="0">
+            <a:spAutoFit/>
+          </a:bodyPr>
+          <a:lstStyle/>
+          <a:p>
+            <a:pPr>
+              <a:spcAft>
+                <a:spcPts val="1320"/>
+              </a:spcAft>
+            </a:pPr>
+            <a:r>
+              <a:rPr sz="2200" b="0">
+                <a:solidFill>
+                  <a:srgbClr val="202122"/>
+                </a:solidFill>
+                <a:latin typeface="Calibri"/>
+              </a:rPr>
+              <a:t>Cyber security professionals have powerful skills and access, so ethics matter.</a:t>
+            </a:r>
+          </a:p>
+          <a:p>
+            <a:pPr>
+              <a:spcAft>
+                <a:spcPts val="1320"/>
+              </a:spcAft>
+            </a:pPr>
+            <a:r>
+              <a:rPr sz="2200" b="0">
+                <a:solidFill>
+                  <a:srgbClr val="202122"/>
+                </a:solidFill>
+                <a:latin typeface="Calibri"/>
+              </a:rPr>
+              <a:t>The UK Cyber Security Council's code has four principles. Credibility: be accountable and act ethically. Integrity: be honest and obey the law. Professionalism: share knowledge, base your work on evidence, promote public understanding and correct misinformation. Responsibility and respect: take ownership of your work, safeguard data, declare conflicts of interest, and champion equality, diversity and inclusion.</a:t>
+            </a:r>
+          </a:p>
+        </p:txBody>
+      </p:sp>
+      <p:sp>
+        <p:nvSpPr>
+          <p:cNvPr id="7" name="Rounded Rectangle 6"/>
           <p:cNvSpPr/>
           <p:nvPr/>
         </p:nvSpPr>
         <p:spPr>
           <a:xfrm>
-            <a:off x="548640" y="1508760"/>
-            <a:ext cx="2011680" cy="457200"/>
+            <a:off x="7772400" y="1554480"/>
+            <a:ext cx="3867912" cy="4526280"/>
           </a:xfrm>
           <a:prstGeom prst="roundRect">
             <a:avLst>
-              <a:gd name="adj" fmla="val 50000"/>
+              <a:gd name="adj" fmla="val 8000"/>
             </a:avLst>
+          </a:prstGeom>
+          <a:solidFill>
+            <a:srgbClr val="03306E"/>
+          </a:solidFill>
+          <a:ln>
+            <a:noFill/>
+          </a:ln>
+          <a:effectLst/>
+        </p:spPr>
+        <p:style>
+          <a:lnRef idx="1">
+            <a:schemeClr val="accent1"/>
+          </a:lnRef>
+          <a:fillRef idx="3">
+            <a:schemeClr val="accent1"/>
+          </a:fillRef>
+          <a:effectRef idx="2">
+            <a:schemeClr val="accent1"/>
+          </a:effectRef>
+          <a:fontRef idx="minor">
+            <a:schemeClr val="lt1"/>
+          </a:fontRef>
+        </p:style>
+        <p:txBody>
+          <a:bodyPr rtlCol="0" anchor="ctr"/>
+          <a:lstStyle/>
+          <a:p/>
+        </p:txBody>
+      </p:sp>
+      <p:sp>
+        <p:nvSpPr>
+          <p:cNvPr id="8" name="Oval 7"/>
+          <p:cNvSpPr/>
+          <p:nvPr/>
+        </p:nvSpPr>
+        <p:spPr>
+          <a:xfrm>
+            <a:off x="8046720" y="1828800"/>
+            <a:ext cx="548640" cy="548640"/>
+          </a:xfrm>
+          <a:prstGeom prst="ellipse">
+            <a:avLst/>
           </a:prstGeom>
           <a:solidFill>
             <a:srgbClr val="E0463A"/>
@@ -8948,21 +12276,32 @@
           </a:fontRef>
         </p:style>
         <p:txBody>
-          <a:bodyPr rtlCol="0" anchor="ctr"/>
-          <a:lstStyle/>
-          <a:p/>
-        </p:txBody>
-      </p:sp>
-      <p:sp>
-        <p:nvSpPr>
-          <p:cNvPr id="7" name="TextBox 6"/>
+          <a:bodyPr rtlCol="0" anchor="ctr" lIns="0" rIns="0" tIns="0" bIns="0"/>
+          <a:lstStyle/>
+          <a:p>
+            <a:pPr algn="ctr"/>
+            <a:r>
+              <a:rPr sz="1300" b="1">
+                <a:solidFill>
+                  <a:srgbClr val="FFFFFF"/>
+                </a:solidFill>
+                <a:latin typeface="Calibri"/>
+              </a:rPr>
+              <a:t>e.g.</a:t>
+            </a:r>
+          </a:p>
+        </p:txBody>
+      </p:sp>
+      <p:sp>
+        <p:nvSpPr>
+          <p:cNvPr id="9" name="TextBox 8"/>
           <p:cNvSpPr txBox="1"/>
           <p:nvPr/>
         </p:nvSpPr>
         <p:spPr>
           <a:xfrm>
-            <a:off x="548640" y="1508760"/>
-            <a:ext cx="2011680" cy="457200"/>
+            <a:off x="8046720" y="2560320"/>
+            <a:ext cx="3291840" cy="365760"/>
           </a:xfrm>
           <a:prstGeom prst="rect">
             <a:avLst/>
@@ -8970,104 +12309,18 @@
           <a:noFill/>
         </p:spPr>
         <p:txBody>
-          <a:bodyPr wrap="square" anchor="ctr" lIns="0" rIns="0" tIns="0" bIns="0"/>
-          <a:lstStyle/>
-          <a:p>
-            <a:pPr algn="ctr"/>
-            <a:r>
-              <a:rPr sz="1400" b="1" i="0">
-                <a:solidFill>
-                  <a:srgbClr val="FFFFFF"/>
-                </a:solidFill>
-                <a:latin typeface="Calibri"/>
-              </a:rPr>
-              <a:t>20 minutes</a:t>
-            </a:r>
-          </a:p>
-        </p:txBody>
-      </p:sp>
-      <p:sp>
-        <p:nvSpPr>
-          <p:cNvPr id="8" name="TextBox 7"/>
-          <p:cNvSpPr txBox="1"/>
-          <p:nvPr/>
-        </p:nvSpPr>
-        <p:spPr>
-          <a:xfrm>
-            <a:off x="2743200" y="1508760"/>
-            <a:ext cx="4754880" cy="457200"/>
-          </a:xfrm>
-          <a:prstGeom prst="rect">
-            <a:avLst/>
-          </a:prstGeom>
-          <a:noFill/>
-        </p:spPr>
-        <p:txBody>
-          <a:bodyPr wrap="square" anchor="ctr" lIns="0" rIns="0" tIns="0" bIns="0"/>
+          <a:bodyPr wrap="square" anchor="t" lIns="0" rIns="0" tIns="0" bIns="0"/>
           <a:lstStyle/>
           <a:p>
             <a:pPr algn="l"/>
             <a:r>
-              <a:rPr sz="1400" b="0" i="1">
-                <a:solidFill>
-                  <a:srgbClr val="54595D"/>
-                </a:solidFill>
-                <a:latin typeface="Calibri"/>
-              </a:rPr>
-              <a:t>Small groups</a:t>
-            </a:r>
-          </a:p>
-        </p:txBody>
-      </p:sp>
-      <p:sp>
-        <p:nvSpPr>
-          <p:cNvPr id="9" name="Oval 8"/>
-          <p:cNvSpPr/>
-          <p:nvPr/>
-        </p:nvSpPr>
-        <p:spPr>
-          <a:xfrm>
-            <a:off x="548640" y="2482596"/>
-            <a:ext cx="384048" cy="384048"/>
-          </a:xfrm>
-          <a:prstGeom prst="ellipse">
-            <a:avLst/>
-          </a:prstGeom>
-          <a:solidFill>
-            <a:srgbClr val="0645AD"/>
-          </a:solidFill>
-          <a:ln>
-            <a:noFill/>
-          </a:ln>
-          <a:effectLst/>
-        </p:spPr>
-        <p:style>
-          <a:lnRef idx="1">
-            <a:schemeClr val="accent1"/>
-          </a:lnRef>
-          <a:fillRef idx="3">
-            <a:schemeClr val="accent1"/>
-          </a:fillRef>
-          <a:effectRef idx="2">
-            <a:schemeClr val="accent1"/>
-          </a:effectRef>
-          <a:fontRef idx="minor">
-            <a:schemeClr val="lt1"/>
-          </a:fontRef>
-        </p:style>
-        <p:txBody>
-          <a:bodyPr rtlCol="0" anchor="ctr" lIns="0" rIns="0" tIns="0" bIns="0"/>
-          <a:lstStyle/>
-          <a:p>
-            <a:pPr algn="ctr"/>
-            <a:r>
-              <a:rPr sz="1300" b="1">
-                <a:solidFill>
-                  <a:srgbClr val="FFFFFF"/>
-                </a:solidFill>
-                <a:latin typeface="Calibri"/>
-              </a:rPr>
-              <a:t>1</a:t>
+              <a:rPr sz="1300" b="1" i="0">
+                <a:solidFill>
+                  <a:srgbClr val="A9C8F0"/>
+                </a:solidFill>
+                <a:latin typeface="Calibri"/>
+              </a:rPr>
+              <a:t>EXAMPLE</a:t>
             </a:r>
           </a:p>
         </p:txBody>
@@ -9080,8 +12333,8 @@
         </p:nvSpPr>
         <p:spPr>
           <a:xfrm>
-            <a:off x="1143000" y="2240280"/>
-            <a:ext cx="5943600" cy="868680"/>
+            <a:off x="8046720" y="2971800"/>
+            <a:ext cx="3291840" cy="2971800"/>
           </a:xfrm>
           <a:prstGeom prst="rect">
             <a:avLst/>
@@ -9089,439 +12342,18 @@
           <a:noFill/>
         </p:spPr>
         <p:txBody>
-          <a:bodyPr wrap="square" anchor="ctr" lIns="0" rIns="0" tIns="0" bIns="0"/>
+          <a:bodyPr wrap="square" anchor="t" lIns="0" rIns="0" tIns="0" bIns="0"/>
           <a:lstStyle/>
           <a:p>
             <a:pPr algn="l"/>
             <a:r>
-              <a:rPr sz="1700" b="0" i="0">
-                <a:solidFill>
-                  <a:srgbClr val="202122"/>
-                </a:solidFill>
-                <a:latin typeface="Calibri"/>
-              </a:rPr>
-              <a:t>Discuss the starter dilemma and three more from your teacher.</a:t>
-            </a:r>
-          </a:p>
-        </p:txBody>
-      </p:sp>
-      <p:sp>
-        <p:nvSpPr>
-          <p:cNvPr id="11" name="Oval 10"/>
-          <p:cNvSpPr/>
-          <p:nvPr/>
-        </p:nvSpPr>
-        <p:spPr>
-          <a:xfrm>
-            <a:off x="548640" y="3461004"/>
-            <a:ext cx="384048" cy="384048"/>
-          </a:xfrm>
-          <a:prstGeom prst="ellipse">
-            <a:avLst/>
-          </a:prstGeom>
-          <a:solidFill>
-            <a:srgbClr val="0645AD"/>
-          </a:solidFill>
-          <a:ln>
-            <a:noFill/>
-          </a:ln>
-          <a:effectLst/>
-        </p:spPr>
-        <p:style>
-          <a:lnRef idx="1">
-            <a:schemeClr val="accent1"/>
-          </a:lnRef>
-          <a:fillRef idx="3">
-            <a:schemeClr val="accent1"/>
-          </a:fillRef>
-          <a:effectRef idx="2">
-            <a:schemeClr val="accent1"/>
-          </a:effectRef>
-          <a:fontRef idx="minor">
-            <a:schemeClr val="lt1"/>
-          </a:fontRef>
-        </p:style>
-        <p:txBody>
-          <a:bodyPr rtlCol="0" anchor="ctr" lIns="0" rIns="0" tIns="0" bIns="0"/>
-          <a:lstStyle/>
-          <a:p>
-            <a:pPr algn="ctr"/>
-            <a:r>
-              <a:rPr sz="1300" b="1">
+              <a:rPr sz="1900" b="0" i="0">
                 <a:solidFill>
                   <a:srgbClr val="FFFFFF"/>
                 </a:solidFill>
-                <a:latin typeface="Calibri"/>
-              </a:rPr>
-              <a:t>2</a:t>
-            </a:r>
-          </a:p>
-        </p:txBody>
-      </p:sp>
-      <p:sp>
-        <p:nvSpPr>
-          <p:cNvPr id="12" name="TextBox 11"/>
-          <p:cNvSpPr txBox="1"/>
-          <p:nvPr/>
-        </p:nvSpPr>
-        <p:spPr>
-          <a:xfrm>
-            <a:off x="1143000" y="3218688"/>
-            <a:ext cx="5943600" cy="868680"/>
-          </a:xfrm>
-          <a:prstGeom prst="rect">
-            <a:avLst/>
-          </a:prstGeom>
-          <a:noFill/>
-        </p:spPr>
-        <p:txBody>
-          <a:bodyPr wrap="square" anchor="ctr" lIns="0" rIns="0" tIns="0" bIns="0"/>
-          <a:lstStyle/>
-          <a:p>
-            <a:pPr algn="l"/>
-            <a:r>
-              <a:rPr sz="1700" b="0" i="0">
-                <a:solidFill>
-                  <a:srgbClr val="202122"/>
-                </a:solidFill>
-                <a:latin typeface="Calibri"/>
-              </a:rPr>
-              <a:t>For each, name any law that would be broken.</a:t>
-            </a:r>
-          </a:p>
-        </p:txBody>
-      </p:sp>
-      <p:sp>
-        <p:nvSpPr>
-          <p:cNvPr id="13" name="Oval 12"/>
-          <p:cNvSpPr/>
-          <p:nvPr/>
-        </p:nvSpPr>
-        <p:spPr>
-          <a:xfrm>
-            <a:off x="548640" y="4439412"/>
-            <a:ext cx="384048" cy="384048"/>
-          </a:xfrm>
-          <a:prstGeom prst="ellipse">
-            <a:avLst/>
-          </a:prstGeom>
-          <a:solidFill>
-            <a:srgbClr val="0645AD"/>
-          </a:solidFill>
-          <a:ln>
-            <a:noFill/>
-          </a:ln>
-          <a:effectLst/>
-        </p:spPr>
-        <p:style>
-          <a:lnRef idx="1">
-            <a:schemeClr val="accent1"/>
-          </a:lnRef>
-          <a:fillRef idx="3">
-            <a:schemeClr val="accent1"/>
-          </a:fillRef>
-          <a:effectRef idx="2">
-            <a:schemeClr val="accent1"/>
-          </a:effectRef>
-          <a:fontRef idx="minor">
-            <a:schemeClr val="lt1"/>
-          </a:fontRef>
-        </p:style>
-        <p:txBody>
-          <a:bodyPr rtlCol="0" anchor="ctr" lIns="0" rIns="0" tIns="0" bIns="0"/>
-          <a:lstStyle/>
-          <a:p>
-            <a:pPr algn="ctr"/>
-            <a:r>
-              <a:rPr sz="1300" b="1">
-                <a:solidFill>
-                  <a:srgbClr val="FFFFFF"/>
-                </a:solidFill>
-                <a:latin typeface="Calibri"/>
-              </a:rPr>
-              <a:t>3</a:t>
-            </a:r>
-          </a:p>
-        </p:txBody>
-      </p:sp>
-      <p:sp>
-        <p:nvSpPr>
-          <p:cNvPr id="14" name="TextBox 13"/>
-          <p:cNvSpPr txBox="1"/>
-          <p:nvPr/>
-        </p:nvSpPr>
-        <p:spPr>
-          <a:xfrm>
-            <a:off x="1143000" y="4197096"/>
-            <a:ext cx="5943600" cy="868680"/>
-          </a:xfrm>
-          <a:prstGeom prst="rect">
-            <a:avLst/>
-          </a:prstGeom>
-          <a:noFill/>
-        </p:spPr>
-        <p:txBody>
-          <a:bodyPr wrap="square" anchor="ctr" lIns="0" rIns="0" tIns="0" bIns="0"/>
-          <a:lstStyle/>
-          <a:p>
-            <a:pPr algn="l"/>
-            <a:r>
-              <a:rPr sz="1700" b="0" i="0">
-                <a:solidFill>
-                  <a:srgbClr val="202122"/>
-                </a:solidFill>
-                <a:latin typeface="Calibri"/>
-              </a:rPr>
-              <a:t>Name the ethical principle that guides the right action.</a:t>
-            </a:r>
-          </a:p>
-        </p:txBody>
-      </p:sp>
-      <p:sp>
-        <p:nvSpPr>
-          <p:cNvPr id="15" name="Oval 14"/>
-          <p:cNvSpPr/>
-          <p:nvPr/>
-        </p:nvSpPr>
-        <p:spPr>
-          <a:xfrm>
-            <a:off x="548640" y="5417820"/>
-            <a:ext cx="384048" cy="384048"/>
-          </a:xfrm>
-          <a:prstGeom prst="ellipse">
-            <a:avLst/>
-          </a:prstGeom>
-          <a:solidFill>
-            <a:srgbClr val="0645AD"/>
-          </a:solidFill>
-          <a:ln>
-            <a:noFill/>
-          </a:ln>
-          <a:effectLst/>
-        </p:spPr>
-        <p:style>
-          <a:lnRef idx="1">
-            <a:schemeClr val="accent1"/>
-          </a:lnRef>
-          <a:fillRef idx="3">
-            <a:schemeClr val="accent1"/>
-          </a:fillRef>
-          <a:effectRef idx="2">
-            <a:schemeClr val="accent1"/>
-          </a:effectRef>
-          <a:fontRef idx="minor">
-            <a:schemeClr val="lt1"/>
-          </a:fontRef>
-        </p:style>
-        <p:txBody>
-          <a:bodyPr rtlCol="0" anchor="ctr" lIns="0" rIns="0" tIns="0" bIns="0"/>
-          <a:lstStyle/>
-          <a:p>
-            <a:pPr algn="ctr"/>
-            <a:r>
-              <a:rPr sz="1300" b="1">
-                <a:solidFill>
-                  <a:srgbClr val="FFFFFF"/>
-                </a:solidFill>
-                <a:latin typeface="Calibri"/>
-              </a:rPr>
-              <a:t>4</a:t>
-            </a:r>
-          </a:p>
-        </p:txBody>
-      </p:sp>
-      <p:sp>
-        <p:nvSpPr>
-          <p:cNvPr id="16" name="TextBox 15"/>
-          <p:cNvSpPr txBox="1"/>
-          <p:nvPr/>
-        </p:nvSpPr>
-        <p:spPr>
-          <a:xfrm>
-            <a:off x="1143000" y="5175504"/>
-            <a:ext cx="5943600" cy="868680"/>
-          </a:xfrm>
-          <a:prstGeom prst="rect">
-            <a:avLst/>
-          </a:prstGeom>
-          <a:noFill/>
-        </p:spPr>
-        <p:txBody>
-          <a:bodyPr wrap="square" anchor="ctr" lIns="0" rIns="0" tIns="0" bIns="0"/>
-          <a:lstStyle/>
-          <a:p>
-            <a:pPr algn="l"/>
-            <a:r>
-              <a:rPr sz="1700" b="0" i="0">
-                <a:solidFill>
-                  <a:srgbClr val="202122"/>
-                </a:solidFill>
-                <a:latin typeface="Calibri"/>
-              </a:rPr>
-              <a:t>Agree what a professional would actually do.</a:t>
-            </a:r>
-          </a:p>
-        </p:txBody>
-      </p:sp>
-      <p:sp>
-        <p:nvSpPr>
-          <p:cNvPr id="17" name="Rounded Rectangle 16"/>
-          <p:cNvSpPr/>
-          <p:nvPr/>
-        </p:nvSpPr>
-        <p:spPr>
-          <a:xfrm>
-            <a:off x="7772400" y="1508760"/>
-            <a:ext cx="3867912" cy="4572000"/>
-          </a:xfrm>
-          <a:prstGeom prst="roundRect">
-            <a:avLst>
-              <a:gd name="adj" fmla="val 8000"/>
-            </a:avLst>
-          </a:prstGeom>
-          <a:solidFill>
-            <a:srgbClr val="EAF3FF"/>
-          </a:solidFill>
-          <a:ln>
-            <a:noFill/>
-          </a:ln>
-          <a:effectLst/>
-        </p:spPr>
-        <p:style>
-          <a:lnRef idx="1">
-            <a:schemeClr val="accent1"/>
-          </a:lnRef>
-          <a:fillRef idx="3">
-            <a:schemeClr val="accent1"/>
-          </a:fillRef>
-          <a:effectRef idx="2">
-            <a:schemeClr val="accent1"/>
-          </a:effectRef>
-          <a:fontRef idx="minor">
-            <a:schemeClr val="lt1"/>
-          </a:fontRef>
-        </p:style>
-        <p:txBody>
-          <a:bodyPr rtlCol="0" anchor="ctr"/>
-          <a:lstStyle/>
-          <a:p/>
-        </p:txBody>
-      </p:sp>
-      <p:sp>
-        <p:nvSpPr>
-          <p:cNvPr id="18" name="TextBox 17"/>
-          <p:cNvSpPr txBox="1"/>
-          <p:nvPr/>
-        </p:nvSpPr>
-        <p:spPr>
-          <a:xfrm>
-            <a:off x="8046720" y="1737360"/>
-            <a:ext cx="3291840" cy="365760"/>
-          </a:xfrm>
-          <a:prstGeom prst="rect">
-            <a:avLst/>
-          </a:prstGeom>
-          <a:noFill/>
-        </p:spPr>
-        <p:txBody>
-          <a:bodyPr wrap="square" anchor="t" lIns="0" rIns="0" tIns="0" bIns="0"/>
-          <a:lstStyle/>
-          <a:p>
-            <a:pPr algn="l"/>
-            <a:r>
-              <a:rPr sz="1300" b="1" i="0">
-                <a:solidFill>
-                  <a:srgbClr val="0645AD"/>
-                </a:solidFill>
-                <a:latin typeface="Calibri"/>
-              </a:rPr>
-              <a:t>SUCCESS CRITERIA</a:t>
-            </a:r>
-          </a:p>
-        </p:txBody>
-      </p:sp>
-      <p:sp>
-        <p:nvSpPr>
-          <p:cNvPr id="19" name="TextBox 18"/>
-          <p:cNvSpPr txBox="1"/>
-          <p:nvPr/>
-        </p:nvSpPr>
-        <p:spPr>
-          <a:xfrm>
-            <a:off x="8046720" y="2240280"/>
-            <a:ext cx="3337560" cy="3657600"/>
-          </a:xfrm>
-          <a:prstGeom prst="rect">
-            <a:avLst/>
-          </a:prstGeom>
-          <a:noFill/>
-        </p:spPr>
-        <p:txBody>
-          <a:bodyPr wrap="square" lIns="0" rIns="0" tIns="0" bIns="0">
-            <a:spAutoFit/>
-          </a:bodyPr>
-          <a:lstStyle/>
-          <a:p>
-            <a:pPr marL="274320" indent="-274320">
-              <a:spcAft>
-                <a:spcPts val="810"/>
-              </a:spcAft>
-              <a:buClr>
-                <a:srgbClr val="0645AD"/>
-              </a:buClr>
-              <a:buFont typeface="Arial"/>
-              <a:buChar char="•"/>
-            </a:pPr>
-            <a:r>
-              <a:rPr sz="1800" b="0">
-                <a:solidFill>
-                  <a:srgbClr val="202122"/>
-                </a:solidFill>
-                <a:latin typeface="Calibri"/>
-              </a:rPr>
-              <a:t>Laws named accurately</a:t>
-            </a:r>
-          </a:p>
-          <a:p>
-            <a:pPr marL="274320" indent="-274320">
-              <a:spcAft>
-                <a:spcPts val="810"/>
-              </a:spcAft>
-              <a:buClr>
-                <a:srgbClr val="0645AD"/>
-              </a:buClr>
-              <a:buFont typeface="Arial"/>
-              <a:buChar char="•"/>
-            </a:pPr>
-            <a:r>
-              <a:rPr sz="1800" b="0">
-                <a:solidFill>
-                  <a:srgbClr val="202122"/>
-                </a:solidFill>
-                <a:latin typeface="Calibri"/>
-              </a:rPr>
-              <a:t>Ethical principles applied, not just opinions</a:t>
-            </a:r>
-          </a:p>
-          <a:p>
-            <a:pPr marL="274320" indent="-274320">
-              <a:spcAft>
-                <a:spcPts val="810"/>
-              </a:spcAft>
-              <a:buClr>
-                <a:srgbClr val="0645AD"/>
-              </a:buClr>
-              <a:buFont typeface="Arial"/>
-              <a:buChar char="•"/>
-            </a:pPr>
-            <a:r>
-              <a:rPr sz="1800" b="0">
-                <a:solidFill>
-                  <a:srgbClr val="202122"/>
-                </a:solidFill>
-                <a:latin typeface="Calibri"/>
-              </a:rPr>
-              <a:t>Actions are realistic and professional</a:t>
+                <a:latin typeface="Cambria"/>
+              </a:rPr>
+              <a:t>A tester who finds a serious flaw reports it through the agreed channel rather than posting it online for attention: integrity and responsibility.</a:t>
             </a:r>
           </a:p>
         </p:txBody>
